--- a/image/이미지 생성용.pptx
+++ b/image/이미지 생성용.pptx
@@ -6,6 +6,7 @@
   </p:sldMasterIdLst>
   <p:sldIdLst>
     <p:sldId id="256" r:id="rId2"/>
+    <p:sldId id="257" r:id="rId3"/>
   </p:sldIdLst>
   <p:sldSz cx="12192000" cy="6858000"/>
   <p:notesSz cx="6858000" cy="9144000"/>
@@ -243,7 +244,7 @@
           <a:p>
             <a:fld id="{F0CD9246-440E-46C2-946E-50CD81230ED2}" type="datetimeFigureOut">
               <a:rPr lang="ko-KR" altLang="en-US" smtClean="0"/>
-              <a:t>2025-12-24</a:t>
+              <a:t>2025-12-25</a:t>
             </a:fld>
             <a:endParaRPr lang="ko-KR" altLang="en-US"/>
           </a:p>
@@ -413,7 +414,7 @@
           <a:p>
             <a:fld id="{F0CD9246-440E-46C2-946E-50CD81230ED2}" type="datetimeFigureOut">
               <a:rPr lang="ko-KR" altLang="en-US" smtClean="0"/>
-              <a:t>2025-12-24</a:t>
+              <a:t>2025-12-25</a:t>
             </a:fld>
             <a:endParaRPr lang="ko-KR" altLang="en-US"/>
           </a:p>
@@ -593,7 +594,7 @@
           <a:p>
             <a:fld id="{F0CD9246-440E-46C2-946E-50CD81230ED2}" type="datetimeFigureOut">
               <a:rPr lang="ko-KR" altLang="en-US" smtClean="0"/>
-              <a:t>2025-12-24</a:t>
+              <a:t>2025-12-25</a:t>
             </a:fld>
             <a:endParaRPr lang="ko-KR" altLang="en-US"/>
           </a:p>
@@ -763,7 +764,7 @@
           <a:p>
             <a:fld id="{F0CD9246-440E-46C2-946E-50CD81230ED2}" type="datetimeFigureOut">
               <a:rPr lang="ko-KR" altLang="en-US" smtClean="0"/>
-              <a:t>2025-12-24</a:t>
+              <a:t>2025-12-25</a:t>
             </a:fld>
             <a:endParaRPr lang="ko-KR" altLang="en-US"/>
           </a:p>
@@ -1009,7 +1010,7 @@
           <a:p>
             <a:fld id="{F0CD9246-440E-46C2-946E-50CD81230ED2}" type="datetimeFigureOut">
               <a:rPr lang="ko-KR" altLang="en-US" smtClean="0"/>
-              <a:t>2025-12-24</a:t>
+              <a:t>2025-12-25</a:t>
             </a:fld>
             <a:endParaRPr lang="ko-KR" altLang="en-US"/>
           </a:p>
@@ -1241,7 +1242,7 @@
           <a:p>
             <a:fld id="{F0CD9246-440E-46C2-946E-50CD81230ED2}" type="datetimeFigureOut">
               <a:rPr lang="ko-KR" altLang="en-US" smtClean="0"/>
-              <a:t>2025-12-24</a:t>
+              <a:t>2025-12-25</a:t>
             </a:fld>
             <a:endParaRPr lang="ko-KR" altLang="en-US"/>
           </a:p>
@@ -1608,7 +1609,7 @@
           <a:p>
             <a:fld id="{F0CD9246-440E-46C2-946E-50CD81230ED2}" type="datetimeFigureOut">
               <a:rPr lang="ko-KR" altLang="en-US" smtClean="0"/>
-              <a:t>2025-12-24</a:t>
+              <a:t>2025-12-25</a:t>
             </a:fld>
             <a:endParaRPr lang="ko-KR" altLang="en-US"/>
           </a:p>
@@ -1726,7 +1727,7 @@
           <a:p>
             <a:fld id="{F0CD9246-440E-46C2-946E-50CD81230ED2}" type="datetimeFigureOut">
               <a:rPr lang="ko-KR" altLang="en-US" smtClean="0"/>
-              <a:t>2025-12-24</a:t>
+              <a:t>2025-12-25</a:t>
             </a:fld>
             <a:endParaRPr lang="ko-KR" altLang="en-US"/>
           </a:p>
@@ -1821,7 +1822,7 @@
           <a:p>
             <a:fld id="{F0CD9246-440E-46C2-946E-50CD81230ED2}" type="datetimeFigureOut">
               <a:rPr lang="ko-KR" altLang="en-US" smtClean="0"/>
-              <a:t>2025-12-24</a:t>
+              <a:t>2025-12-25</a:t>
             </a:fld>
             <a:endParaRPr lang="ko-KR" altLang="en-US"/>
           </a:p>
@@ -2098,7 +2099,7 @@
           <a:p>
             <a:fld id="{F0CD9246-440E-46C2-946E-50CD81230ED2}" type="datetimeFigureOut">
               <a:rPr lang="ko-KR" altLang="en-US" smtClean="0"/>
-              <a:t>2025-12-24</a:t>
+              <a:t>2025-12-25</a:t>
             </a:fld>
             <a:endParaRPr lang="ko-KR" altLang="en-US"/>
           </a:p>
@@ -2351,7 +2352,7 @@
           <a:p>
             <a:fld id="{F0CD9246-440E-46C2-946E-50CD81230ED2}" type="datetimeFigureOut">
               <a:rPr lang="ko-KR" altLang="en-US" smtClean="0"/>
-              <a:t>2025-12-24</a:t>
+              <a:t>2025-12-25</a:t>
             </a:fld>
             <a:endParaRPr lang="ko-KR" altLang="en-US"/>
           </a:p>
@@ -2564,7 +2565,7 @@
           <a:p>
             <a:fld id="{F0CD9246-440E-46C2-946E-50CD81230ED2}" type="datetimeFigureOut">
               <a:rPr lang="ko-KR" altLang="en-US" smtClean="0"/>
-              <a:t>2025-12-24</a:t>
+              <a:t>2025-12-25</a:t>
             </a:fld>
             <a:endParaRPr lang="ko-KR" altLang="en-US"/>
           </a:p>
@@ -2969,48 +2970,208 @@
           <a:chExt cx="0" cy="0"/>
         </a:xfrm>
       </p:grpSpPr>
-      <p:sp>
-        <p:nvSpPr>
-          <p:cNvPr id="2" name="제목 1"/>
-          <p:cNvSpPr>
-            <a:spLocks noGrp="1"/>
-          </p:cNvSpPr>
-          <p:nvPr>
-            <p:ph type="ctrTitle"/>
-          </p:nvPr>
-        </p:nvSpPr>
-        <p:spPr/>
-        <p:txBody>
-          <a:bodyPr/>
-          <a:lstStyle/>
-          <a:p>
-            <a:endParaRPr lang="ko-KR" altLang="en-US"/>
-          </a:p>
-        </p:txBody>
-      </p:sp>
-      <p:sp>
-        <p:nvSpPr>
-          <p:cNvPr id="3" name="부제목 2"/>
-          <p:cNvSpPr>
-            <a:spLocks noGrp="1"/>
-          </p:cNvSpPr>
-          <p:nvPr>
-            <p:ph type="subTitle" idx="1"/>
-          </p:nvPr>
-        </p:nvSpPr>
-        <p:spPr/>
-        <p:txBody>
-          <a:bodyPr/>
-          <a:lstStyle/>
-          <a:p>
-            <a:endParaRPr lang="ko-KR" altLang="en-US"/>
-          </a:p>
-        </p:txBody>
-      </p:sp>
+      <p:pic>
+        <p:nvPicPr>
+          <p:cNvPr id="4" name="그림 3"/>
+          <p:cNvPicPr>
+            <a:picLocks noChangeAspect="1"/>
+          </p:cNvPicPr>
+          <p:nvPr/>
+        </p:nvPicPr>
+        <p:blipFill>
+          <a:blip r:embed="rId2"/>
+          <a:stretch>
+            <a:fillRect/>
+          </a:stretch>
+        </p:blipFill>
+        <p:spPr>
+          <a:xfrm>
+            <a:off x="337710" y="114146"/>
+            <a:ext cx="6125430" cy="2210108"/>
+          </a:xfrm>
+          <a:prstGeom prst="rect">
+            <a:avLst/>
+          </a:prstGeom>
+        </p:spPr>
+      </p:pic>
+      <p:pic>
+        <p:nvPicPr>
+          <p:cNvPr id="5" name="그림 4"/>
+          <p:cNvPicPr>
+            <a:picLocks noChangeAspect="1"/>
+          </p:cNvPicPr>
+          <p:nvPr/>
+        </p:nvPicPr>
+        <p:blipFill>
+          <a:blip r:embed="rId3"/>
+          <a:stretch>
+            <a:fillRect/>
+          </a:stretch>
+        </p:blipFill>
+        <p:spPr>
+          <a:xfrm>
+            <a:off x="7438715" y="233058"/>
+            <a:ext cx="2663562" cy="2612120"/>
+          </a:xfrm>
+          <a:prstGeom prst="rect">
+            <a:avLst/>
+          </a:prstGeom>
+        </p:spPr>
+      </p:pic>
+      <p:pic>
+        <p:nvPicPr>
+          <p:cNvPr id="6" name="그림 5"/>
+          <p:cNvPicPr>
+            <a:picLocks noChangeAspect="1"/>
+          </p:cNvPicPr>
+          <p:nvPr/>
+        </p:nvPicPr>
+        <p:blipFill>
+          <a:blip r:embed="rId4"/>
+          <a:stretch>
+            <a:fillRect/>
+          </a:stretch>
+        </p:blipFill>
+        <p:spPr>
+          <a:xfrm>
+            <a:off x="1109198" y="3166945"/>
+            <a:ext cx="6658904" cy="1686160"/>
+          </a:xfrm>
+          <a:prstGeom prst="rect">
+            <a:avLst/>
+          </a:prstGeom>
+        </p:spPr>
+      </p:pic>
     </p:spTree>
     <p:extLst>
       <p:ext uri="{BB962C8B-B14F-4D97-AF65-F5344CB8AC3E}">
         <p14:creationId xmlns:p14="http://schemas.microsoft.com/office/powerpoint/2010/main" val="2053922668"/>
+      </p:ext>
+    </p:extLst>
+  </p:cSld>
+  <p:clrMapOvr>
+    <a:masterClrMapping/>
+  </p:clrMapOvr>
+</p:sld>
+</file>
+
+<file path=ppt/slides/slide2.xml><?xml version="1.0" encoding="utf-8"?>
+<p:sld xmlns:a="http://schemas.openxmlformats.org/drawingml/2006/main" xmlns:r="http://schemas.openxmlformats.org/officeDocument/2006/relationships" xmlns:p="http://schemas.openxmlformats.org/presentationml/2006/main">
+  <p:cSld>
+    <p:spTree>
+      <p:nvGrpSpPr>
+        <p:cNvPr id="1" name=""/>
+        <p:cNvGrpSpPr/>
+        <p:nvPr/>
+      </p:nvGrpSpPr>
+      <p:grpSpPr>
+        <a:xfrm>
+          <a:off x="0" y="0"/>
+          <a:ext cx="0" cy="0"/>
+          <a:chOff x="0" y="0"/>
+          <a:chExt cx="0" cy="0"/>
+        </a:xfrm>
+      </p:grpSpPr>
+      <p:pic>
+        <p:nvPicPr>
+          <p:cNvPr id="4" name="그림 3"/>
+          <p:cNvPicPr>
+            <a:picLocks noChangeAspect="1"/>
+          </p:cNvPicPr>
+          <p:nvPr/>
+        </p:nvPicPr>
+        <p:blipFill>
+          <a:blip r:embed="rId2"/>
+          <a:stretch>
+            <a:fillRect/>
+          </a:stretch>
+        </p:blipFill>
+        <p:spPr>
+          <a:xfrm>
+            <a:off x="299547" y="371100"/>
+            <a:ext cx="4212543" cy="3235141"/>
+          </a:xfrm>
+          <a:prstGeom prst="rect">
+            <a:avLst/>
+          </a:prstGeom>
+        </p:spPr>
+      </p:pic>
+      <p:pic>
+        <p:nvPicPr>
+          <p:cNvPr id="5" name="그림 4"/>
+          <p:cNvPicPr>
+            <a:picLocks noChangeAspect="1"/>
+          </p:cNvPicPr>
+          <p:nvPr/>
+        </p:nvPicPr>
+        <p:blipFill>
+          <a:blip r:embed="rId3"/>
+          <a:stretch>
+            <a:fillRect/>
+          </a:stretch>
+        </p:blipFill>
+        <p:spPr>
+          <a:xfrm>
+            <a:off x="609134" y="4167072"/>
+            <a:ext cx="4001059" cy="1000265"/>
+          </a:xfrm>
+          <a:prstGeom prst="rect">
+            <a:avLst/>
+          </a:prstGeom>
+        </p:spPr>
+      </p:pic>
+      <p:pic>
+        <p:nvPicPr>
+          <p:cNvPr id="6" name="그림 5"/>
+          <p:cNvPicPr>
+            <a:picLocks noChangeAspect="1"/>
+          </p:cNvPicPr>
+          <p:nvPr/>
+        </p:nvPicPr>
+        <p:blipFill>
+          <a:blip r:embed="rId4"/>
+          <a:stretch>
+            <a:fillRect/>
+          </a:stretch>
+        </p:blipFill>
+        <p:spPr>
+          <a:xfrm>
+            <a:off x="5495647" y="371100"/>
+            <a:ext cx="2389204" cy="2389204"/>
+          </a:xfrm>
+          <a:prstGeom prst="rect">
+            <a:avLst/>
+          </a:prstGeom>
+        </p:spPr>
+      </p:pic>
+      <p:pic>
+        <p:nvPicPr>
+          <p:cNvPr id="7" name="그림 6"/>
+          <p:cNvPicPr>
+            <a:picLocks noChangeAspect="1"/>
+          </p:cNvPicPr>
+          <p:nvPr/>
+        </p:nvPicPr>
+        <p:blipFill>
+          <a:blip r:embed="rId5"/>
+          <a:stretch>
+            <a:fillRect/>
+          </a:stretch>
+        </p:blipFill>
+        <p:spPr>
+          <a:xfrm>
+            <a:off x="5323983" y="3002913"/>
+            <a:ext cx="4229690" cy="2172003"/>
+          </a:xfrm>
+          <a:prstGeom prst="rect">
+            <a:avLst/>
+          </a:prstGeom>
+        </p:spPr>
+      </p:pic>
+    </p:spTree>
+    <p:extLst>
+      <p:ext uri="{BB962C8B-B14F-4D97-AF65-F5344CB8AC3E}">
+        <p14:creationId xmlns:p14="http://schemas.microsoft.com/office/powerpoint/2010/main" val="2628583716"/>
       </p:ext>
     </p:extLst>
   </p:cSld>

--- a/image/이미지 생성용.pptx
+++ b/image/이미지 생성용.pptx
@@ -7,6 +7,7 @@
   <p:sldIdLst>
     <p:sldId id="256" r:id="rId2"/>
     <p:sldId id="257" r:id="rId3"/>
+    <p:sldId id="258" r:id="rId4"/>
   </p:sldIdLst>
   <p:sldSz cx="12192000" cy="6858000"/>
   <p:notesSz cx="6858000" cy="9144000"/>
@@ -3181,6 +3182,60 @@
 </p:sld>
 </file>
 
+<file path=ppt/slides/slide3.xml><?xml version="1.0" encoding="utf-8"?>
+<p:sld xmlns:a="http://schemas.openxmlformats.org/drawingml/2006/main" xmlns:r="http://schemas.openxmlformats.org/officeDocument/2006/relationships" xmlns:p="http://schemas.openxmlformats.org/presentationml/2006/main">
+  <p:cSld>
+    <p:spTree>
+      <p:nvGrpSpPr>
+        <p:cNvPr id="1" name=""/>
+        <p:cNvGrpSpPr/>
+        <p:nvPr/>
+      </p:nvGrpSpPr>
+      <p:grpSpPr>
+        <a:xfrm>
+          <a:off x="0" y="0"/>
+          <a:ext cx="0" cy="0"/>
+          <a:chOff x="0" y="0"/>
+          <a:chExt cx="0" cy="0"/>
+        </a:xfrm>
+      </p:grpSpPr>
+      <p:pic>
+        <p:nvPicPr>
+          <p:cNvPr id="4" name="그림 3"/>
+          <p:cNvPicPr>
+            <a:picLocks noChangeAspect="1"/>
+          </p:cNvPicPr>
+          <p:nvPr/>
+        </p:nvPicPr>
+        <p:blipFill>
+          <a:blip r:embed="rId2"/>
+          <a:stretch>
+            <a:fillRect/>
+          </a:stretch>
+        </p:blipFill>
+        <p:spPr>
+          <a:xfrm>
+            <a:off x="813880" y="385493"/>
+            <a:ext cx="7268589" cy="3858163"/>
+          </a:xfrm>
+          <a:prstGeom prst="rect">
+            <a:avLst/>
+          </a:prstGeom>
+        </p:spPr>
+      </p:pic>
+    </p:spTree>
+    <p:extLst>
+      <p:ext uri="{BB962C8B-B14F-4D97-AF65-F5344CB8AC3E}">
+        <p14:creationId xmlns:p14="http://schemas.microsoft.com/office/powerpoint/2010/main" val="2668780768"/>
+      </p:ext>
+    </p:extLst>
+  </p:cSld>
+  <p:clrMapOvr>
+    <a:masterClrMapping/>
+  </p:clrMapOvr>
+</p:sld>
+</file>
+
 <file path=ppt/theme/theme1.xml><?xml version="1.0" encoding="utf-8"?>
 <a:theme xmlns:a="http://schemas.openxmlformats.org/drawingml/2006/main" name="Office 테마">
   <a:themeElements>

--- a/image/이미지 생성용.pptx
+++ b/image/이미지 생성용.pptx
@@ -8,6 +8,7 @@
     <p:sldId id="256" r:id="rId2"/>
     <p:sldId id="257" r:id="rId3"/>
     <p:sldId id="258" r:id="rId4"/>
+    <p:sldId id="259" r:id="rId5"/>
   </p:sldIdLst>
   <p:sldSz cx="12192000" cy="6858000"/>
   <p:notesSz cx="6858000" cy="9144000"/>
@@ -245,7 +246,7 @@
           <a:p>
             <a:fld id="{F0CD9246-440E-46C2-946E-50CD81230ED2}" type="datetimeFigureOut">
               <a:rPr lang="ko-KR" altLang="en-US" smtClean="0"/>
-              <a:t>2025-12-25</a:t>
+              <a:t>2025-12-26</a:t>
             </a:fld>
             <a:endParaRPr lang="ko-KR" altLang="en-US"/>
           </a:p>
@@ -415,7 +416,7 @@
           <a:p>
             <a:fld id="{F0CD9246-440E-46C2-946E-50CD81230ED2}" type="datetimeFigureOut">
               <a:rPr lang="ko-KR" altLang="en-US" smtClean="0"/>
-              <a:t>2025-12-25</a:t>
+              <a:t>2025-12-26</a:t>
             </a:fld>
             <a:endParaRPr lang="ko-KR" altLang="en-US"/>
           </a:p>
@@ -595,7 +596,7 @@
           <a:p>
             <a:fld id="{F0CD9246-440E-46C2-946E-50CD81230ED2}" type="datetimeFigureOut">
               <a:rPr lang="ko-KR" altLang="en-US" smtClean="0"/>
-              <a:t>2025-12-25</a:t>
+              <a:t>2025-12-26</a:t>
             </a:fld>
             <a:endParaRPr lang="ko-KR" altLang="en-US"/>
           </a:p>
@@ -765,7 +766,7 @@
           <a:p>
             <a:fld id="{F0CD9246-440E-46C2-946E-50CD81230ED2}" type="datetimeFigureOut">
               <a:rPr lang="ko-KR" altLang="en-US" smtClean="0"/>
-              <a:t>2025-12-25</a:t>
+              <a:t>2025-12-26</a:t>
             </a:fld>
             <a:endParaRPr lang="ko-KR" altLang="en-US"/>
           </a:p>
@@ -1011,7 +1012,7 @@
           <a:p>
             <a:fld id="{F0CD9246-440E-46C2-946E-50CD81230ED2}" type="datetimeFigureOut">
               <a:rPr lang="ko-KR" altLang="en-US" smtClean="0"/>
-              <a:t>2025-12-25</a:t>
+              <a:t>2025-12-26</a:t>
             </a:fld>
             <a:endParaRPr lang="ko-KR" altLang="en-US"/>
           </a:p>
@@ -1243,7 +1244,7 @@
           <a:p>
             <a:fld id="{F0CD9246-440E-46C2-946E-50CD81230ED2}" type="datetimeFigureOut">
               <a:rPr lang="ko-KR" altLang="en-US" smtClean="0"/>
-              <a:t>2025-12-25</a:t>
+              <a:t>2025-12-26</a:t>
             </a:fld>
             <a:endParaRPr lang="ko-KR" altLang="en-US"/>
           </a:p>
@@ -1610,7 +1611,7 @@
           <a:p>
             <a:fld id="{F0CD9246-440E-46C2-946E-50CD81230ED2}" type="datetimeFigureOut">
               <a:rPr lang="ko-KR" altLang="en-US" smtClean="0"/>
-              <a:t>2025-12-25</a:t>
+              <a:t>2025-12-26</a:t>
             </a:fld>
             <a:endParaRPr lang="ko-KR" altLang="en-US"/>
           </a:p>
@@ -1728,7 +1729,7 @@
           <a:p>
             <a:fld id="{F0CD9246-440E-46C2-946E-50CD81230ED2}" type="datetimeFigureOut">
               <a:rPr lang="ko-KR" altLang="en-US" smtClean="0"/>
-              <a:t>2025-12-25</a:t>
+              <a:t>2025-12-26</a:t>
             </a:fld>
             <a:endParaRPr lang="ko-KR" altLang="en-US"/>
           </a:p>
@@ -1823,7 +1824,7 @@
           <a:p>
             <a:fld id="{F0CD9246-440E-46C2-946E-50CD81230ED2}" type="datetimeFigureOut">
               <a:rPr lang="ko-KR" altLang="en-US" smtClean="0"/>
-              <a:t>2025-12-25</a:t>
+              <a:t>2025-12-26</a:t>
             </a:fld>
             <a:endParaRPr lang="ko-KR" altLang="en-US"/>
           </a:p>
@@ -2100,7 +2101,7 @@
           <a:p>
             <a:fld id="{F0CD9246-440E-46C2-946E-50CD81230ED2}" type="datetimeFigureOut">
               <a:rPr lang="ko-KR" altLang="en-US" smtClean="0"/>
-              <a:t>2025-12-25</a:t>
+              <a:t>2025-12-26</a:t>
             </a:fld>
             <a:endParaRPr lang="ko-KR" altLang="en-US"/>
           </a:p>
@@ -2353,7 +2354,7 @@
           <a:p>
             <a:fld id="{F0CD9246-440E-46C2-946E-50CD81230ED2}" type="datetimeFigureOut">
               <a:rPr lang="ko-KR" altLang="en-US" smtClean="0"/>
-              <a:t>2025-12-25</a:t>
+              <a:t>2025-12-26</a:t>
             </a:fld>
             <a:endParaRPr lang="ko-KR" altLang="en-US"/>
           </a:p>
@@ -2566,7 +2567,7 @@
           <a:p>
             <a:fld id="{F0CD9246-440E-46C2-946E-50CD81230ED2}" type="datetimeFigureOut">
               <a:rPr lang="ko-KR" altLang="en-US" smtClean="0"/>
-              <a:t>2025-12-25</a:t>
+              <a:t>2025-12-26</a:t>
             </a:fld>
             <a:endParaRPr lang="ko-KR" altLang="en-US"/>
           </a:p>
@@ -3236,6 +3237,84 @@
 </p:sld>
 </file>
 
+<file path=ppt/slides/slide4.xml><?xml version="1.0" encoding="utf-8"?>
+<p:sld xmlns:a="http://schemas.openxmlformats.org/drawingml/2006/main" xmlns:r="http://schemas.openxmlformats.org/officeDocument/2006/relationships" xmlns:p="http://schemas.openxmlformats.org/presentationml/2006/main">
+  <p:cSld>
+    <p:spTree>
+      <p:nvGrpSpPr>
+        <p:cNvPr id="1" name=""/>
+        <p:cNvGrpSpPr/>
+        <p:nvPr/>
+      </p:nvGrpSpPr>
+      <p:grpSpPr>
+        <a:xfrm>
+          <a:off x="0" y="0"/>
+          <a:ext cx="0" cy="0"/>
+          <a:chOff x="0" y="0"/>
+          <a:chExt cx="0" cy="0"/>
+        </a:xfrm>
+      </p:grpSpPr>
+      <p:pic>
+        <p:nvPicPr>
+          <p:cNvPr id="4" name="그림 3"/>
+          <p:cNvPicPr>
+            <a:picLocks noChangeAspect="1"/>
+          </p:cNvPicPr>
+          <p:nvPr/>
+        </p:nvPicPr>
+        <p:blipFill>
+          <a:blip r:embed="rId2"/>
+          <a:stretch>
+            <a:fillRect/>
+          </a:stretch>
+        </p:blipFill>
+        <p:spPr>
+          <a:xfrm>
+            <a:off x="656405" y="419195"/>
+            <a:ext cx="3086531" cy="1960519"/>
+          </a:xfrm>
+          <a:prstGeom prst="rect">
+            <a:avLst/>
+          </a:prstGeom>
+        </p:spPr>
+      </p:pic>
+      <p:pic>
+        <p:nvPicPr>
+          <p:cNvPr id="5" name="그림 4"/>
+          <p:cNvPicPr>
+            <a:picLocks noChangeAspect="1"/>
+          </p:cNvPicPr>
+          <p:nvPr/>
+        </p:nvPicPr>
+        <p:blipFill>
+          <a:blip r:embed="rId3"/>
+          <a:stretch>
+            <a:fillRect/>
+          </a:stretch>
+        </p:blipFill>
+        <p:spPr>
+          <a:xfrm>
+            <a:off x="656405" y="2630478"/>
+            <a:ext cx="7182852" cy="1171739"/>
+          </a:xfrm>
+          <a:prstGeom prst="rect">
+            <a:avLst/>
+          </a:prstGeom>
+        </p:spPr>
+      </p:pic>
+    </p:spTree>
+    <p:extLst>
+      <p:ext uri="{BB962C8B-B14F-4D97-AF65-F5344CB8AC3E}">
+        <p14:creationId xmlns:p14="http://schemas.microsoft.com/office/powerpoint/2010/main" val="2672974803"/>
+      </p:ext>
+    </p:extLst>
+  </p:cSld>
+  <p:clrMapOvr>
+    <a:masterClrMapping/>
+  </p:clrMapOvr>
+</p:sld>
+</file>
+
 <file path=ppt/theme/theme1.xml><?xml version="1.0" encoding="utf-8"?>
 <a:theme xmlns:a="http://schemas.openxmlformats.org/drawingml/2006/main" name="Office 테마">
   <a:themeElements>

--- a/image/이미지 생성용.pptx
+++ b/image/이미지 생성용.pptx
@@ -246,7 +246,7 @@
           <a:p>
             <a:fld id="{F0CD9246-440E-46C2-946E-50CD81230ED2}" type="datetimeFigureOut">
               <a:rPr lang="ko-KR" altLang="en-US" smtClean="0"/>
-              <a:t>2025-12-26</a:t>
+              <a:t>2025-12-27</a:t>
             </a:fld>
             <a:endParaRPr lang="ko-KR" altLang="en-US"/>
           </a:p>
@@ -416,7 +416,7 @@
           <a:p>
             <a:fld id="{F0CD9246-440E-46C2-946E-50CD81230ED2}" type="datetimeFigureOut">
               <a:rPr lang="ko-KR" altLang="en-US" smtClean="0"/>
-              <a:t>2025-12-26</a:t>
+              <a:t>2025-12-27</a:t>
             </a:fld>
             <a:endParaRPr lang="ko-KR" altLang="en-US"/>
           </a:p>
@@ -596,7 +596,7 @@
           <a:p>
             <a:fld id="{F0CD9246-440E-46C2-946E-50CD81230ED2}" type="datetimeFigureOut">
               <a:rPr lang="ko-KR" altLang="en-US" smtClean="0"/>
-              <a:t>2025-12-26</a:t>
+              <a:t>2025-12-27</a:t>
             </a:fld>
             <a:endParaRPr lang="ko-KR" altLang="en-US"/>
           </a:p>
@@ -766,7 +766,7 @@
           <a:p>
             <a:fld id="{F0CD9246-440E-46C2-946E-50CD81230ED2}" type="datetimeFigureOut">
               <a:rPr lang="ko-KR" altLang="en-US" smtClean="0"/>
-              <a:t>2025-12-26</a:t>
+              <a:t>2025-12-27</a:t>
             </a:fld>
             <a:endParaRPr lang="ko-KR" altLang="en-US"/>
           </a:p>
@@ -1012,7 +1012,7 @@
           <a:p>
             <a:fld id="{F0CD9246-440E-46C2-946E-50CD81230ED2}" type="datetimeFigureOut">
               <a:rPr lang="ko-KR" altLang="en-US" smtClean="0"/>
-              <a:t>2025-12-26</a:t>
+              <a:t>2025-12-27</a:t>
             </a:fld>
             <a:endParaRPr lang="ko-KR" altLang="en-US"/>
           </a:p>
@@ -1244,7 +1244,7 @@
           <a:p>
             <a:fld id="{F0CD9246-440E-46C2-946E-50CD81230ED2}" type="datetimeFigureOut">
               <a:rPr lang="ko-KR" altLang="en-US" smtClean="0"/>
-              <a:t>2025-12-26</a:t>
+              <a:t>2025-12-27</a:t>
             </a:fld>
             <a:endParaRPr lang="ko-KR" altLang="en-US"/>
           </a:p>
@@ -1611,7 +1611,7 @@
           <a:p>
             <a:fld id="{F0CD9246-440E-46C2-946E-50CD81230ED2}" type="datetimeFigureOut">
               <a:rPr lang="ko-KR" altLang="en-US" smtClean="0"/>
-              <a:t>2025-12-26</a:t>
+              <a:t>2025-12-27</a:t>
             </a:fld>
             <a:endParaRPr lang="ko-KR" altLang="en-US"/>
           </a:p>
@@ -1729,7 +1729,7 @@
           <a:p>
             <a:fld id="{F0CD9246-440E-46C2-946E-50CD81230ED2}" type="datetimeFigureOut">
               <a:rPr lang="ko-KR" altLang="en-US" smtClean="0"/>
-              <a:t>2025-12-26</a:t>
+              <a:t>2025-12-27</a:t>
             </a:fld>
             <a:endParaRPr lang="ko-KR" altLang="en-US"/>
           </a:p>
@@ -1824,7 +1824,7 @@
           <a:p>
             <a:fld id="{F0CD9246-440E-46C2-946E-50CD81230ED2}" type="datetimeFigureOut">
               <a:rPr lang="ko-KR" altLang="en-US" smtClean="0"/>
-              <a:t>2025-12-26</a:t>
+              <a:t>2025-12-27</a:t>
             </a:fld>
             <a:endParaRPr lang="ko-KR" altLang="en-US"/>
           </a:p>
@@ -2101,7 +2101,7 @@
           <a:p>
             <a:fld id="{F0CD9246-440E-46C2-946E-50CD81230ED2}" type="datetimeFigureOut">
               <a:rPr lang="ko-KR" altLang="en-US" smtClean="0"/>
-              <a:t>2025-12-26</a:t>
+              <a:t>2025-12-27</a:t>
             </a:fld>
             <a:endParaRPr lang="ko-KR" altLang="en-US"/>
           </a:p>
@@ -2354,7 +2354,7 @@
           <a:p>
             <a:fld id="{F0CD9246-440E-46C2-946E-50CD81230ED2}" type="datetimeFigureOut">
               <a:rPr lang="ko-KR" altLang="en-US" smtClean="0"/>
-              <a:t>2025-12-26</a:t>
+              <a:t>2025-12-27</a:t>
             </a:fld>
             <a:endParaRPr lang="ko-KR" altLang="en-US"/>
           </a:p>
@@ -2567,7 +2567,7 @@
           <a:p>
             <a:fld id="{F0CD9246-440E-46C2-946E-50CD81230ED2}" type="datetimeFigureOut">
               <a:rPr lang="ko-KR" altLang="en-US" smtClean="0"/>
-              <a:t>2025-12-26</a:t>
+              <a:t>2025-12-27</a:t>
             </a:fld>
             <a:endParaRPr lang="ko-KR" altLang="en-US"/>
           </a:p>
@@ -3302,6 +3302,78 @@
           </a:prstGeom>
         </p:spPr>
       </p:pic>
+      <p:pic>
+        <p:nvPicPr>
+          <p:cNvPr id="2" name="그림 1"/>
+          <p:cNvPicPr>
+            <a:picLocks noChangeAspect="1"/>
+          </p:cNvPicPr>
+          <p:nvPr/>
+        </p:nvPicPr>
+        <p:blipFill>
+          <a:blip r:embed="rId4"/>
+          <a:stretch>
+            <a:fillRect/>
+          </a:stretch>
+        </p:blipFill>
+        <p:spPr>
+          <a:xfrm>
+            <a:off x="4156895" y="251531"/>
+            <a:ext cx="4212543" cy="1377507"/>
+          </a:xfrm>
+          <a:prstGeom prst="rect">
+            <a:avLst/>
+          </a:prstGeom>
+        </p:spPr>
+      </p:pic>
+      <p:pic>
+        <p:nvPicPr>
+          <p:cNvPr id="3" name="그림 2"/>
+          <p:cNvPicPr>
+            <a:picLocks noChangeAspect="1"/>
+          </p:cNvPicPr>
+          <p:nvPr/>
+        </p:nvPicPr>
+        <p:blipFill>
+          <a:blip r:embed="rId5"/>
+          <a:stretch>
+            <a:fillRect/>
+          </a:stretch>
+        </p:blipFill>
+        <p:spPr>
+          <a:xfrm>
+            <a:off x="656405" y="4332329"/>
+            <a:ext cx="3801005" cy="1863350"/>
+          </a:xfrm>
+          <a:prstGeom prst="rect">
+            <a:avLst/>
+          </a:prstGeom>
+        </p:spPr>
+      </p:pic>
+      <p:pic>
+        <p:nvPicPr>
+          <p:cNvPr id="6" name="그림 5"/>
+          <p:cNvPicPr>
+            <a:picLocks noChangeAspect="1"/>
+          </p:cNvPicPr>
+          <p:nvPr/>
+        </p:nvPicPr>
+        <p:blipFill>
+          <a:blip r:embed="rId6"/>
+          <a:stretch>
+            <a:fillRect/>
+          </a:stretch>
+        </p:blipFill>
+        <p:spPr>
+          <a:xfrm>
+            <a:off x="5161177" y="4220871"/>
+            <a:ext cx="4183964" cy="2086266"/>
+          </a:xfrm>
+          <a:prstGeom prst="rect">
+            <a:avLst/>
+          </a:prstGeom>
+        </p:spPr>
+      </p:pic>
     </p:spTree>
     <p:extLst>
       <p:ext uri="{BB962C8B-B14F-4D97-AF65-F5344CB8AC3E}">

--- a/image/이미지 생성용.pptx
+++ b/image/이미지 생성용.pptx
@@ -7,17 +7,18 @@
   <p:sldIdLst>
     <p:sldId id="256" r:id="rId2"/>
     <p:sldId id="268" r:id="rId3"/>
-    <p:sldId id="267" r:id="rId4"/>
-    <p:sldId id="265" r:id="rId5"/>
-    <p:sldId id="266" r:id="rId6"/>
-    <p:sldId id="264" r:id="rId7"/>
-    <p:sldId id="263" r:id="rId8"/>
-    <p:sldId id="261" r:id="rId9"/>
-    <p:sldId id="262" r:id="rId10"/>
-    <p:sldId id="257" r:id="rId11"/>
-    <p:sldId id="258" r:id="rId12"/>
-    <p:sldId id="259" r:id="rId13"/>
-    <p:sldId id="260" r:id="rId14"/>
+    <p:sldId id="269" r:id="rId4"/>
+    <p:sldId id="267" r:id="rId5"/>
+    <p:sldId id="265" r:id="rId6"/>
+    <p:sldId id="266" r:id="rId7"/>
+    <p:sldId id="264" r:id="rId8"/>
+    <p:sldId id="263" r:id="rId9"/>
+    <p:sldId id="261" r:id="rId10"/>
+    <p:sldId id="262" r:id="rId11"/>
+    <p:sldId id="257" r:id="rId12"/>
+    <p:sldId id="258" r:id="rId13"/>
+    <p:sldId id="259" r:id="rId14"/>
+    <p:sldId id="260" r:id="rId15"/>
   </p:sldIdLst>
   <p:sldSz cx="12192000" cy="6858000"/>
   <p:notesSz cx="6858000" cy="9144000"/>
@@ -166,10 +167,9 @@
           </a:lstStyle>
           <a:p>
             <a:r>
-              <a:rPr lang="ko-KR" altLang="en-US" smtClean="0"/>
+              <a:rPr lang="ko-KR" altLang="en-US"/>
               <a:t>마스터 제목 스타일 편집</a:t>
             </a:r>
-            <a:endParaRPr lang="ko-KR" altLang="en-US"/>
           </a:p>
         </p:txBody>
       </p:sp>
@@ -231,10 +231,9 @@
           </a:lstStyle>
           <a:p>
             <a:r>
-              <a:rPr lang="ko-KR" altLang="en-US" smtClean="0"/>
+              <a:rPr lang="ko-KR" altLang="en-US"/>
               <a:t>클릭하여 마스터 부제목 스타일 편집</a:t>
             </a:r>
-            <a:endParaRPr lang="ko-KR" altLang="en-US"/>
           </a:p>
         </p:txBody>
       </p:sp>
@@ -255,7 +254,7 @@
           <a:p>
             <a:fld id="{F0CD9246-440E-46C2-946E-50CD81230ED2}" type="datetimeFigureOut">
               <a:rPr lang="ko-KR" altLang="en-US" smtClean="0"/>
-              <a:t>2026-01-20</a:t>
+              <a:t>2026-02-02</a:t>
             </a:fld>
             <a:endParaRPr lang="ko-KR" altLang="en-US"/>
           </a:p>
@@ -349,10 +348,9 @@
           <a:lstStyle/>
           <a:p>
             <a:r>
-              <a:rPr lang="ko-KR" altLang="en-US" smtClean="0"/>
+              <a:rPr lang="ko-KR" altLang="en-US"/>
               <a:t>마스터 제목 스타일 편집</a:t>
             </a:r>
-            <a:endParaRPr lang="ko-KR" altLang="en-US"/>
           </a:p>
         </p:txBody>
       </p:sp>
@@ -373,38 +371,37 @@
           <a:p>
             <a:pPr lvl="0"/>
             <a:r>
-              <a:rPr lang="ko-KR" altLang="en-US" smtClean="0"/>
+              <a:rPr lang="ko-KR" altLang="en-US"/>
               <a:t>마스터 텍스트 스타일 편집</a:t>
             </a:r>
           </a:p>
           <a:p>
             <a:pPr lvl="1"/>
             <a:r>
-              <a:rPr lang="ko-KR" altLang="en-US" smtClean="0"/>
+              <a:rPr lang="ko-KR" altLang="en-US"/>
               <a:t>둘째 수준</a:t>
             </a:r>
           </a:p>
           <a:p>
             <a:pPr lvl="2"/>
             <a:r>
-              <a:rPr lang="ko-KR" altLang="en-US" smtClean="0"/>
+              <a:rPr lang="ko-KR" altLang="en-US"/>
               <a:t>셋째 수준</a:t>
             </a:r>
           </a:p>
           <a:p>
             <a:pPr lvl="3"/>
             <a:r>
-              <a:rPr lang="ko-KR" altLang="en-US" smtClean="0"/>
+              <a:rPr lang="ko-KR" altLang="en-US"/>
               <a:t>넷째 수준</a:t>
             </a:r>
           </a:p>
           <a:p>
             <a:pPr lvl="4"/>
             <a:r>
-              <a:rPr lang="ko-KR" altLang="en-US" smtClean="0"/>
+              <a:rPr lang="ko-KR" altLang="en-US"/>
               <a:t>다섯째 수준</a:t>
             </a:r>
-            <a:endParaRPr lang="ko-KR" altLang="en-US"/>
           </a:p>
         </p:txBody>
       </p:sp>
@@ -425,7 +422,7 @@
           <a:p>
             <a:fld id="{F0CD9246-440E-46C2-946E-50CD81230ED2}" type="datetimeFigureOut">
               <a:rPr lang="ko-KR" altLang="en-US" smtClean="0"/>
-              <a:t>2026-01-20</a:t>
+              <a:t>2026-02-02</a:t>
             </a:fld>
             <a:endParaRPr lang="ko-KR" altLang="en-US"/>
           </a:p>
@@ -524,10 +521,9 @@
           <a:lstStyle/>
           <a:p>
             <a:r>
-              <a:rPr lang="ko-KR" altLang="en-US" smtClean="0"/>
+              <a:rPr lang="ko-KR" altLang="en-US"/>
               <a:t>마스터 제목 스타일 편집</a:t>
             </a:r>
-            <a:endParaRPr lang="ko-KR" altLang="en-US"/>
           </a:p>
         </p:txBody>
       </p:sp>
@@ -553,38 +549,37 @@
           <a:p>
             <a:pPr lvl="0"/>
             <a:r>
-              <a:rPr lang="ko-KR" altLang="en-US" smtClean="0"/>
+              <a:rPr lang="ko-KR" altLang="en-US"/>
               <a:t>마스터 텍스트 스타일 편집</a:t>
             </a:r>
           </a:p>
           <a:p>
             <a:pPr lvl="1"/>
             <a:r>
-              <a:rPr lang="ko-KR" altLang="en-US" smtClean="0"/>
+              <a:rPr lang="ko-KR" altLang="en-US"/>
               <a:t>둘째 수준</a:t>
             </a:r>
           </a:p>
           <a:p>
             <a:pPr lvl="2"/>
             <a:r>
-              <a:rPr lang="ko-KR" altLang="en-US" smtClean="0"/>
+              <a:rPr lang="ko-KR" altLang="en-US"/>
               <a:t>셋째 수준</a:t>
             </a:r>
           </a:p>
           <a:p>
             <a:pPr lvl="3"/>
             <a:r>
-              <a:rPr lang="ko-KR" altLang="en-US" smtClean="0"/>
+              <a:rPr lang="ko-KR" altLang="en-US"/>
               <a:t>넷째 수준</a:t>
             </a:r>
           </a:p>
           <a:p>
             <a:pPr lvl="4"/>
             <a:r>
-              <a:rPr lang="ko-KR" altLang="en-US" smtClean="0"/>
+              <a:rPr lang="ko-KR" altLang="en-US"/>
               <a:t>다섯째 수준</a:t>
             </a:r>
-            <a:endParaRPr lang="ko-KR" altLang="en-US"/>
           </a:p>
         </p:txBody>
       </p:sp>
@@ -605,7 +600,7 @@
           <a:p>
             <a:fld id="{F0CD9246-440E-46C2-946E-50CD81230ED2}" type="datetimeFigureOut">
               <a:rPr lang="ko-KR" altLang="en-US" smtClean="0"/>
-              <a:t>2026-01-20</a:t>
+              <a:t>2026-02-02</a:t>
             </a:fld>
             <a:endParaRPr lang="ko-KR" altLang="en-US"/>
           </a:p>
@@ -699,10 +694,9 @@
           <a:lstStyle/>
           <a:p>
             <a:r>
-              <a:rPr lang="ko-KR" altLang="en-US" smtClean="0"/>
+              <a:rPr lang="ko-KR" altLang="en-US"/>
               <a:t>마스터 제목 스타일 편집</a:t>
             </a:r>
-            <a:endParaRPr lang="ko-KR" altLang="en-US"/>
           </a:p>
         </p:txBody>
       </p:sp>
@@ -723,38 +717,37 @@
           <a:p>
             <a:pPr lvl="0"/>
             <a:r>
-              <a:rPr lang="ko-KR" altLang="en-US" smtClean="0"/>
+              <a:rPr lang="ko-KR" altLang="en-US"/>
               <a:t>마스터 텍스트 스타일 편집</a:t>
             </a:r>
           </a:p>
           <a:p>
             <a:pPr lvl="1"/>
             <a:r>
-              <a:rPr lang="ko-KR" altLang="en-US" smtClean="0"/>
+              <a:rPr lang="ko-KR" altLang="en-US"/>
               <a:t>둘째 수준</a:t>
             </a:r>
           </a:p>
           <a:p>
             <a:pPr lvl="2"/>
             <a:r>
-              <a:rPr lang="ko-KR" altLang="en-US" smtClean="0"/>
+              <a:rPr lang="ko-KR" altLang="en-US"/>
               <a:t>셋째 수준</a:t>
             </a:r>
           </a:p>
           <a:p>
             <a:pPr lvl="3"/>
             <a:r>
-              <a:rPr lang="ko-KR" altLang="en-US" smtClean="0"/>
+              <a:rPr lang="ko-KR" altLang="en-US"/>
               <a:t>넷째 수준</a:t>
             </a:r>
           </a:p>
           <a:p>
             <a:pPr lvl="4"/>
             <a:r>
-              <a:rPr lang="ko-KR" altLang="en-US" smtClean="0"/>
+              <a:rPr lang="ko-KR" altLang="en-US"/>
               <a:t>다섯째 수준</a:t>
             </a:r>
-            <a:endParaRPr lang="ko-KR" altLang="en-US"/>
           </a:p>
         </p:txBody>
       </p:sp>
@@ -775,7 +768,7 @@
           <a:p>
             <a:fld id="{F0CD9246-440E-46C2-946E-50CD81230ED2}" type="datetimeFigureOut">
               <a:rPr lang="ko-KR" altLang="en-US" smtClean="0"/>
-              <a:t>2026-01-20</a:t>
+              <a:t>2026-02-02</a:t>
             </a:fld>
             <a:endParaRPr lang="ko-KR" altLang="en-US"/>
           </a:p>
@@ -878,10 +871,9 @@
           </a:lstStyle>
           <a:p>
             <a:r>
-              <a:rPr lang="ko-KR" altLang="en-US" smtClean="0"/>
+              <a:rPr lang="ko-KR" altLang="en-US"/>
               <a:t>마스터 제목 스타일 편집</a:t>
             </a:r>
-            <a:endParaRPr lang="ko-KR" altLang="en-US"/>
           </a:p>
         </p:txBody>
       </p:sp>
@@ -998,7 +990,7 @@
           <a:p>
             <a:pPr lvl="0"/>
             <a:r>
-              <a:rPr lang="ko-KR" altLang="en-US" smtClean="0"/>
+              <a:rPr lang="ko-KR" altLang="en-US"/>
               <a:t>마스터 텍스트 스타일 편집</a:t>
             </a:r>
           </a:p>
@@ -1021,7 +1013,7 @@
           <a:p>
             <a:fld id="{F0CD9246-440E-46C2-946E-50CD81230ED2}" type="datetimeFigureOut">
               <a:rPr lang="ko-KR" altLang="en-US" smtClean="0"/>
-              <a:t>2026-01-20</a:t>
+              <a:t>2026-02-02</a:t>
             </a:fld>
             <a:endParaRPr lang="ko-KR" altLang="en-US"/>
           </a:p>
@@ -1115,10 +1107,9 @@
           <a:lstStyle/>
           <a:p>
             <a:r>
-              <a:rPr lang="ko-KR" altLang="en-US" smtClean="0"/>
+              <a:rPr lang="ko-KR" altLang="en-US"/>
               <a:t>마스터 제목 스타일 편집</a:t>
             </a:r>
-            <a:endParaRPr lang="ko-KR" altLang="en-US"/>
           </a:p>
         </p:txBody>
       </p:sp>
@@ -1144,38 +1135,37 @@
           <a:p>
             <a:pPr lvl="0"/>
             <a:r>
-              <a:rPr lang="ko-KR" altLang="en-US" smtClean="0"/>
+              <a:rPr lang="ko-KR" altLang="en-US"/>
               <a:t>마스터 텍스트 스타일 편집</a:t>
             </a:r>
           </a:p>
           <a:p>
             <a:pPr lvl="1"/>
             <a:r>
-              <a:rPr lang="ko-KR" altLang="en-US" smtClean="0"/>
+              <a:rPr lang="ko-KR" altLang="en-US"/>
               <a:t>둘째 수준</a:t>
             </a:r>
           </a:p>
           <a:p>
             <a:pPr lvl="2"/>
             <a:r>
-              <a:rPr lang="ko-KR" altLang="en-US" smtClean="0"/>
+              <a:rPr lang="ko-KR" altLang="en-US"/>
               <a:t>셋째 수준</a:t>
             </a:r>
           </a:p>
           <a:p>
             <a:pPr lvl="3"/>
             <a:r>
-              <a:rPr lang="ko-KR" altLang="en-US" smtClean="0"/>
+              <a:rPr lang="ko-KR" altLang="en-US"/>
               <a:t>넷째 수준</a:t>
             </a:r>
           </a:p>
           <a:p>
             <a:pPr lvl="4"/>
             <a:r>
-              <a:rPr lang="ko-KR" altLang="en-US" smtClean="0"/>
+              <a:rPr lang="ko-KR" altLang="en-US"/>
               <a:t>다섯째 수준</a:t>
             </a:r>
-            <a:endParaRPr lang="ko-KR" altLang="en-US"/>
           </a:p>
         </p:txBody>
       </p:sp>
@@ -1201,38 +1191,37 @@
           <a:p>
             <a:pPr lvl="0"/>
             <a:r>
-              <a:rPr lang="ko-KR" altLang="en-US" smtClean="0"/>
+              <a:rPr lang="ko-KR" altLang="en-US"/>
               <a:t>마스터 텍스트 스타일 편집</a:t>
             </a:r>
           </a:p>
           <a:p>
             <a:pPr lvl="1"/>
             <a:r>
-              <a:rPr lang="ko-KR" altLang="en-US" smtClean="0"/>
+              <a:rPr lang="ko-KR" altLang="en-US"/>
               <a:t>둘째 수준</a:t>
             </a:r>
           </a:p>
           <a:p>
             <a:pPr lvl="2"/>
             <a:r>
-              <a:rPr lang="ko-KR" altLang="en-US" smtClean="0"/>
+              <a:rPr lang="ko-KR" altLang="en-US"/>
               <a:t>셋째 수준</a:t>
             </a:r>
           </a:p>
           <a:p>
             <a:pPr lvl="3"/>
             <a:r>
-              <a:rPr lang="ko-KR" altLang="en-US" smtClean="0"/>
+              <a:rPr lang="ko-KR" altLang="en-US"/>
               <a:t>넷째 수준</a:t>
             </a:r>
           </a:p>
           <a:p>
             <a:pPr lvl="4"/>
             <a:r>
-              <a:rPr lang="ko-KR" altLang="en-US" smtClean="0"/>
+              <a:rPr lang="ko-KR" altLang="en-US"/>
               <a:t>다섯째 수준</a:t>
             </a:r>
-            <a:endParaRPr lang="ko-KR" altLang="en-US"/>
           </a:p>
         </p:txBody>
       </p:sp>
@@ -1253,7 +1242,7 @@
           <a:p>
             <a:fld id="{F0CD9246-440E-46C2-946E-50CD81230ED2}" type="datetimeFigureOut">
               <a:rPr lang="ko-KR" altLang="en-US" smtClean="0"/>
-              <a:t>2026-01-20</a:t>
+              <a:t>2026-02-02</a:t>
             </a:fld>
             <a:endParaRPr lang="ko-KR" altLang="en-US"/>
           </a:p>
@@ -1352,10 +1341,9 @@
           <a:lstStyle/>
           <a:p>
             <a:r>
-              <a:rPr lang="ko-KR" altLang="en-US" smtClean="0"/>
+              <a:rPr lang="ko-KR" altLang="en-US"/>
               <a:t>마스터 제목 스타일 편집</a:t>
             </a:r>
-            <a:endParaRPr lang="ko-KR" altLang="en-US"/>
           </a:p>
         </p:txBody>
       </p:sp>
@@ -1418,7 +1406,7 @@
           <a:p>
             <a:pPr lvl="0"/>
             <a:r>
-              <a:rPr lang="ko-KR" altLang="en-US" smtClean="0"/>
+              <a:rPr lang="ko-KR" altLang="en-US"/>
               <a:t>마스터 텍스트 스타일 편집</a:t>
             </a:r>
           </a:p>
@@ -1446,38 +1434,37 @@
           <a:p>
             <a:pPr lvl="0"/>
             <a:r>
-              <a:rPr lang="ko-KR" altLang="en-US" smtClean="0"/>
+              <a:rPr lang="ko-KR" altLang="en-US"/>
               <a:t>마스터 텍스트 스타일 편집</a:t>
             </a:r>
           </a:p>
           <a:p>
             <a:pPr lvl="1"/>
             <a:r>
-              <a:rPr lang="ko-KR" altLang="en-US" smtClean="0"/>
+              <a:rPr lang="ko-KR" altLang="en-US"/>
               <a:t>둘째 수준</a:t>
             </a:r>
           </a:p>
           <a:p>
             <a:pPr lvl="2"/>
             <a:r>
-              <a:rPr lang="ko-KR" altLang="en-US" smtClean="0"/>
+              <a:rPr lang="ko-KR" altLang="en-US"/>
               <a:t>셋째 수준</a:t>
             </a:r>
           </a:p>
           <a:p>
             <a:pPr lvl="3"/>
             <a:r>
-              <a:rPr lang="ko-KR" altLang="en-US" smtClean="0"/>
+              <a:rPr lang="ko-KR" altLang="en-US"/>
               <a:t>넷째 수준</a:t>
             </a:r>
           </a:p>
           <a:p>
             <a:pPr lvl="4"/>
             <a:r>
-              <a:rPr lang="ko-KR" altLang="en-US" smtClean="0"/>
+              <a:rPr lang="ko-KR" altLang="en-US"/>
               <a:t>다섯째 수준</a:t>
             </a:r>
-            <a:endParaRPr lang="ko-KR" altLang="en-US"/>
           </a:p>
         </p:txBody>
       </p:sp>
@@ -1540,7 +1527,7 @@
           <a:p>
             <a:pPr lvl="0"/>
             <a:r>
-              <a:rPr lang="ko-KR" altLang="en-US" smtClean="0"/>
+              <a:rPr lang="ko-KR" altLang="en-US"/>
               <a:t>마스터 텍스트 스타일 편집</a:t>
             </a:r>
           </a:p>
@@ -1568,38 +1555,37 @@
           <a:p>
             <a:pPr lvl="0"/>
             <a:r>
-              <a:rPr lang="ko-KR" altLang="en-US" smtClean="0"/>
+              <a:rPr lang="ko-KR" altLang="en-US"/>
               <a:t>마스터 텍스트 스타일 편집</a:t>
             </a:r>
           </a:p>
           <a:p>
             <a:pPr lvl="1"/>
             <a:r>
-              <a:rPr lang="ko-KR" altLang="en-US" smtClean="0"/>
+              <a:rPr lang="ko-KR" altLang="en-US"/>
               <a:t>둘째 수준</a:t>
             </a:r>
           </a:p>
           <a:p>
             <a:pPr lvl="2"/>
             <a:r>
-              <a:rPr lang="ko-KR" altLang="en-US" smtClean="0"/>
+              <a:rPr lang="ko-KR" altLang="en-US"/>
               <a:t>셋째 수준</a:t>
             </a:r>
           </a:p>
           <a:p>
             <a:pPr lvl="3"/>
             <a:r>
-              <a:rPr lang="ko-KR" altLang="en-US" smtClean="0"/>
+              <a:rPr lang="ko-KR" altLang="en-US"/>
               <a:t>넷째 수준</a:t>
             </a:r>
           </a:p>
           <a:p>
             <a:pPr lvl="4"/>
             <a:r>
-              <a:rPr lang="ko-KR" altLang="en-US" smtClean="0"/>
+              <a:rPr lang="ko-KR" altLang="en-US"/>
               <a:t>다섯째 수준</a:t>
             </a:r>
-            <a:endParaRPr lang="ko-KR" altLang="en-US"/>
           </a:p>
         </p:txBody>
       </p:sp>
@@ -1620,7 +1606,7 @@
           <a:p>
             <a:fld id="{F0CD9246-440E-46C2-946E-50CD81230ED2}" type="datetimeFigureOut">
               <a:rPr lang="ko-KR" altLang="en-US" smtClean="0"/>
-              <a:t>2026-01-20</a:t>
+              <a:t>2026-02-02</a:t>
             </a:fld>
             <a:endParaRPr lang="ko-KR" altLang="en-US"/>
           </a:p>
@@ -1714,10 +1700,9 @@
           <a:lstStyle/>
           <a:p>
             <a:r>
-              <a:rPr lang="ko-KR" altLang="en-US" smtClean="0"/>
+              <a:rPr lang="ko-KR" altLang="en-US"/>
               <a:t>마스터 제목 스타일 편집</a:t>
             </a:r>
-            <a:endParaRPr lang="ko-KR" altLang="en-US"/>
           </a:p>
         </p:txBody>
       </p:sp>
@@ -1738,7 +1723,7 @@
           <a:p>
             <a:fld id="{F0CD9246-440E-46C2-946E-50CD81230ED2}" type="datetimeFigureOut">
               <a:rPr lang="ko-KR" altLang="en-US" smtClean="0"/>
-              <a:t>2026-01-20</a:t>
+              <a:t>2026-02-02</a:t>
             </a:fld>
             <a:endParaRPr lang="ko-KR" altLang="en-US"/>
           </a:p>
@@ -1833,7 +1818,7 @@
           <a:p>
             <a:fld id="{F0CD9246-440E-46C2-946E-50CD81230ED2}" type="datetimeFigureOut">
               <a:rPr lang="ko-KR" altLang="en-US" smtClean="0"/>
-              <a:t>2026-01-20</a:t>
+              <a:t>2026-02-02</a:t>
             </a:fld>
             <a:endParaRPr lang="ko-KR" altLang="en-US"/>
           </a:p>
@@ -1936,10 +1921,9 @@
           </a:lstStyle>
           <a:p>
             <a:r>
-              <a:rPr lang="ko-KR" altLang="en-US" smtClean="0"/>
+              <a:rPr lang="ko-KR" altLang="en-US"/>
               <a:t>마스터 제목 스타일 편집</a:t>
             </a:r>
-            <a:endParaRPr lang="ko-KR" altLang="en-US"/>
           </a:p>
         </p:txBody>
       </p:sp>
@@ -1993,38 +1977,37 @@
           <a:p>
             <a:pPr lvl="0"/>
             <a:r>
-              <a:rPr lang="ko-KR" altLang="en-US" smtClean="0"/>
+              <a:rPr lang="ko-KR" altLang="en-US"/>
               <a:t>마스터 텍스트 스타일 편집</a:t>
             </a:r>
           </a:p>
           <a:p>
             <a:pPr lvl="1"/>
             <a:r>
-              <a:rPr lang="ko-KR" altLang="en-US" smtClean="0"/>
+              <a:rPr lang="ko-KR" altLang="en-US"/>
               <a:t>둘째 수준</a:t>
             </a:r>
           </a:p>
           <a:p>
             <a:pPr lvl="2"/>
             <a:r>
-              <a:rPr lang="ko-KR" altLang="en-US" smtClean="0"/>
+              <a:rPr lang="ko-KR" altLang="en-US"/>
               <a:t>셋째 수준</a:t>
             </a:r>
           </a:p>
           <a:p>
             <a:pPr lvl="3"/>
             <a:r>
-              <a:rPr lang="ko-KR" altLang="en-US" smtClean="0"/>
+              <a:rPr lang="ko-KR" altLang="en-US"/>
               <a:t>넷째 수준</a:t>
             </a:r>
           </a:p>
           <a:p>
             <a:pPr lvl="4"/>
             <a:r>
-              <a:rPr lang="ko-KR" altLang="en-US" smtClean="0"/>
+              <a:rPr lang="ko-KR" altLang="en-US"/>
               <a:t>다섯째 수준</a:t>
             </a:r>
-            <a:endParaRPr lang="ko-KR" altLang="en-US"/>
           </a:p>
         </p:txBody>
       </p:sp>
@@ -2087,7 +2070,7 @@
           <a:p>
             <a:pPr lvl="0"/>
             <a:r>
-              <a:rPr lang="ko-KR" altLang="en-US" smtClean="0"/>
+              <a:rPr lang="ko-KR" altLang="en-US"/>
               <a:t>마스터 텍스트 스타일 편집</a:t>
             </a:r>
           </a:p>
@@ -2110,7 +2093,7 @@
           <a:p>
             <a:fld id="{F0CD9246-440E-46C2-946E-50CD81230ED2}" type="datetimeFigureOut">
               <a:rPr lang="ko-KR" altLang="en-US" smtClean="0"/>
-              <a:t>2026-01-20</a:t>
+              <a:t>2026-02-02</a:t>
             </a:fld>
             <a:endParaRPr lang="ko-KR" altLang="en-US"/>
           </a:p>
@@ -2213,10 +2196,9 @@
           </a:lstStyle>
           <a:p>
             <a:r>
-              <a:rPr lang="ko-KR" altLang="en-US" smtClean="0"/>
+              <a:rPr lang="ko-KR" altLang="en-US"/>
               <a:t>마스터 제목 스타일 편집</a:t>
             </a:r>
-            <a:endParaRPr lang="ko-KR" altLang="en-US"/>
           </a:p>
         </p:txBody>
       </p:sp>
@@ -2340,7 +2322,7 @@
           <a:p>
             <a:pPr lvl="0"/>
             <a:r>
-              <a:rPr lang="ko-KR" altLang="en-US" smtClean="0"/>
+              <a:rPr lang="ko-KR" altLang="en-US"/>
               <a:t>마스터 텍스트 스타일 편집</a:t>
             </a:r>
           </a:p>
@@ -2363,7 +2345,7 @@
           <a:p>
             <a:fld id="{F0CD9246-440E-46C2-946E-50CD81230ED2}" type="datetimeFigureOut">
               <a:rPr lang="ko-KR" altLang="en-US" smtClean="0"/>
-              <a:t>2026-01-20</a:t>
+              <a:t>2026-02-02</a:t>
             </a:fld>
             <a:endParaRPr lang="ko-KR" altLang="en-US"/>
           </a:p>
@@ -2472,10 +2454,9 @@
           <a:lstStyle/>
           <a:p>
             <a:r>
-              <a:rPr lang="ko-KR" altLang="en-US" smtClean="0"/>
+              <a:rPr lang="ko-KR" altLang="en-US"/>
               <a:t>마스터 제목 스타일 편집</a:t>
             </a:r>
-            <a:endParaRPr lang="ko-KR" altLang="en-US"/>
           </a:p>
         </p:txBody>
       </p:sp>
@@ -2506,38 +2487,37 @@
           <a:p>
             <a:pPr lvl="0"/>
             <a:r>
-              <a:rPr lang="ko-KR" altLang="en-US" smtClean="0"/>
+              <a:rPr lang="ko-KR" altLang="en-US"/>
               <a:t>마스터 텍스트 스타일 편집</a:t>
             </a:r>
           </a:p>
           <a:p>
             <a:pPr lvl="1"/>
             <a:r>
-              <a:rPr lang="ko-KR" altLang="en-US" smtClean="0"/>
+              <a:rPr lang="ko-KR" altLang="en-US"/>
               <a:t>둘째 수준</a:t>
             </a:r>
           </a:p>
           <a:p>
             <a:pPr lvl="2"/>
             <a:r>
-              <a:rPr lang="ko-KR" altLang="en-US" smtClean="0"/>
+              <a:rPr lang="ko-KR" altLang="en-US"/>
               <a:t>셋째 수준</a:t>
             </a:r>
           </a:p>
           <a:p>
             <a:pPr lvl="3"/>
             <a:r>
-              <a:rPr lang="ko-KR" altLang="en-US" smtClean="0"/>
+              <a:rPr lang="ko-KR" altLang="en-US"/>
               <a:t>넷째 수준</a:t>
             </a:r>
           </a:p>
           <a:p>
             <a:pPr lvl="4"/>
             <a:r>
-              <a:rPr lang="ko-KR" altLang="en-US" smtClean="0"/>
+              <a:rPr lang="ko-KR" altLang="en-US"/>
               <a:t>다섯째 수준</a:t>
             </a:r>
-            <a:endParaRPr lang="ko-KR" altLang="en-US"/>
           </a:p>
         </p:txBody>
       </p:sp>
@@ -2576,7 +2556,7 @@
           <a:p>
             <a:fld id="{F0CD9246-440E-46C2-946E-50CD81230ED2}" type="datetimeFigureOut">
               <a:rPr lang="ko-KR" altLang="en-US" smtClean="0"/>
-              <a:t>2026-01-20</a:t>
+              <a:t>2026-02-02</a:t>
             </a:fld>
             <a:endParaRPr lang="ko-KR" altLang="en-US"/>
           </a:p>
@@ -3123,8 +3103,8 @@
         </p:blipFill>
         <p:spPr>
           <a:xfrm>
-            <a:off x="299547" y="371100"/>
-            <a:ext cx="4212543" cy="3235141"/>
+            <a:off x="280392" y="278487"/>
+            <a:ext cx="4315427" cy="2406351"/>
           </a:xfrm>
           <a:prstGeom prst="rect">
             <a:avLst/>
@@ -3147,56 +3127,71 @@
         </p:blipFill>
         <p:spPr>
           <a:xfrm>
-            <a:off x="609134" y="4167072"/>
-            <a:ext cx="4001059" cy="1000265"/>
+            <a:off x="5312126" y="373818"/>
+            <a:ext cx="3326594" cy="2709288"/>
           </a:xfrm>
           <a:prstGeom prst="rect">
             <a:avLst/>
           </a:prstGeom>
         </p:spPr>
       </p:pic>
+      <p:sp>
+        <p:nvSpPr>
+          <p:cNvPr id="2" name="직사각형 1"/>
+          <p:cNvSpPr/>
+          <p:nvPr/>
+        </p:nvSpPr>
+        <p:spPr>
+          <a:xfrm>
+            <a:off x="4167427" y="3244334"/>
+            <a:ext cx="3857146" cy="369332"/>
+          </a:xfrm>
+          <a:prstGeom prst="rect">
+            <a:avLst/>
+          </a:prstGeom>
+        </p:spPr>
+        <p:txBody>
+          <a:bodyPr wrap="none">
+            <a:spAutoFit/>
+          </a:bodyPr>
+          <a:lstStyle/>
+          <a:p>
+            <a:r>
+              <a:rPr lang="en-US" altLang="ko-KR" dirty="0">
+                <a:solidFill>
+                  <a:srgbClr val="CCCCCC"/>
+                </a:solidFill>
+                <a:latin typeface="Consolas" panose="020B0609020204030204" pitchFamily="49" charset="0"/>
+              </a:rPr>
+              <a:t>03_04_bertviz_neuron_view.png</a:t>
+            </a:r>
+            <a:endParaRPr lang="en-US" altLang="ko-KR" b="0" dirty="0">
+              <a:solidFill>
+                <a:srgbClr val="CCCCCC"/>
+              </a:solidFill>
+              <a:effectLst/>
+              <a:latin typeface="Consolas" panose="020B0609020204030204" pitchFamily="49" charset="0"/>
+            </a:endParaRPr>
+          </a:p>
+        </p:txBody>
+      </p:sp>
       <p:pic>
         <p:nvPicPr>
-          <p:cNvPr id="6" name="그림 5"/>
+          <p:cNvPr id="3" name="그림 2"/>
           <p:cNvPicPr>
             <a:picLocks noChangeAspect="1"/>
           </p:cNvPicPr>
           <p:nvPr/>
         </p:nvPicPr>
-        <p:blipFill>
+        <p:blipFill rotWithShape="1">
           <a:blip r:embed="rId4"/>
-          <a:stretch>
-            <a:fillRect/>
-          </a:stretch>
+          <a:srcRect t="14277"/>
+          <a:stretch/>
         </p:blipFill>
         <p:spPr>
           <a:xfrm>
-            <a:off x="5495647" y="371100"/>
-            <a:ext cx="2389204" cy="2389204"/>
-          </a:xfrm>
-          <a:prstGeom prst="rect">
-            <a:avLst/>
-          </a:prstGeom>
-        </p:spPr>
-      </p:pic>
-      <p:pic>
-        <p:nvPicPr>
-          <p:cNvPr id="7" name="그림 6"/>
-          <p:cNvPicPr>
-            <a:picLocks noChangeAspect="1"/>
-          </p:cNvPicPr>
-          <p:nvPr/>
-        </p:nvPicPr>
-        <p:blipFill>
-          <a:blip r:embed="rId5"/>
-          <a:stretch>
-            <a:fillRect/>
-          </a:stretch>
-        </p:blipFill>
-        <p:spPr>
-          <a:xfrm>
-            <a:off x="5323983" y="3002913"/>
-            <a:ext cx="4229690" cy="2172003"/>
+            <a:off x="1185915" y="3879541"/>
+            <a:ext cx="7192379" cy="2327387"/>
           </a:xfrm>
           <a:prstGeom prst="rect">
             <a:avLst/>
@@ -3206,7 +3201,7 @@
     </p:spTree>
     <p:extLst>
       <p:ext uri="{BB962C8B-B14F-4D97-AF65-F5344CB8AC3E}">
-        <p14:creationId xmlns:p14="http://schemas.microsoft.com/office/powerpoint/2010/main" val="2628583716"/>
+        <p14:creationId xmlns:p14="http://schemas.microsoft.com/office/powerpoint/2010/main" val="1575043608"/>
       </p:ext>
     </p:extLst>
   </p:cSld>
@@ -3249,8 +3244,80 @@
         </p:blipFill>
         <p:spPr>
           <a:xfrm>
-            <a:off x="813880" y="385493"/>
-            <a:ext cx="7268589" cy="3858163"/>
+            <a:off x="299547" y="371100"/>
+            <a:ext cx="4212543" cy="3235141"/>
+          </a:xfrm>
+          <a:prstGeom prst="rect">
+            <a:avLst/>
+          </a:prstGeom>
+        </p:spPr>
+      </p:pic>
+      <p:pic>
+        <p:nvPicPr>
+          <p:cNvPr id="5" name="그림 4"/>
+          <p:cNvPicPr>
+            <a:picLocks noChangeAspect="1"/>
+          </p:cNvPicPr>
+          <p:nvPr/>
+        </p:nvPicPr>
+        <p:blipFill>
+          <a:blip r:embed="rId3"/>
+          <a:stretch>
+            <a:fillRect/>
+          </a:stretch>
+        </p:blipFill>
+        <p:spPr>
+          <a:xfrm>
+            <a:off x="609134" y="4167072"/>
+            <a:ext cx="4001059" cy="1000265"/>
+          </a:xfrm>
+          <a:prstGeom prst="rect">
+            <a:avLst/>
+          </a:prstGeom>
+        </p:spPr>
+      </p:pic>
+      <p:pic>
+        <p:nvPicPr>
+          <p:cNvPr id="6" name="그림 5"/>
+          <p:cNvPicPr>
+            <a:picLocks noChangeAspect="1"/>
+          </p:cNvPicPr>
+          <p:nvPr/>
+        </p:nvPicPr>
+        <p:blipFill>
+          <a:blip r:embed="rId4"/>
+          <a:stretch>
+            <a:fillRect/>
+          </a:stretch>
+        </p:blipFill>
+        <p:spPr>
+          <a:xfrm>
+            <a:off x="5495647" y="371100"/>
+            <a:ext cx="2389204" cy="2389204"/>
+          </a:xfrm>
+          <a:prstGeom prst="rect">
+            <a:avLst/>
+          </a:prstGeom>
+        </p:spPr>
+      </p:pic>
+      <p:pic>
+        <p:nvPicPr>
+          <p:cNvPr id="7" name="그림 6"/>
+          <p:cNvPicPr>
+            <a:picLocks noChangeAspect="1"/>
+          </p:cNvPicPr>
+          <p:nvPr/>
+        </p:nvPicPr>
+        <p:blipFill>
+          <a:blip r:embed="rId5"/>
+          <a:stretch>
+            <a:fillRect/>
+          </a:stretch>
+        </p:blipFill>
+        <p:spPr>
+          <a:xfrm>
+            <a:off x="5323983" y="3002913"/>
+            <a:ext cx="4229690" cy="2172003"/>
           </a:xfrm>
           <a:prstGeom prst="rect">
             <a:avLst/>
@@ -3260,7 +3327,7 @@
     </p:spTree>
     <p:extLst>
       <p:ext uri="{BB962C8B-B14F-4D97-AF65-F5344CB8AC3E}">
-        <p14:creationId xmlns:p14="http://schemas.microsoft.com/office/powerpoint/2010/main" val="2668780768"/>
+        <p14:creationId xmlns:p14="http://schemas.microsoft.com/office/powerpoint/2010/main" val="2628583716"/>
       </p:ext>
     </p:extLst>
   </p:cSld>
@@ -3303,6 +3370,60 @@
         </p:blipFill>
         <p:spPr>
           <a:xfrm>
+            <a:off x="813880" y="385493"/>
+            <a:ext cx="7268589" cy="3858163"/>
+          </a:xfrm>
+          <a:prstGeom prst="rect">
+            <a:avLst/>
+          </a:prstGeom>
+        </p:spPr>
+      </p:pic>
+    </p:spTree>
+    <p:extLst>
+      <p:ext uri="{BB962C8B-B14F-4D97-AF65-F5344CB8AC3E}">
+        <p14:creationId xmlns:p14="http://schemas.microsoft.com/office/powerpoint/2010/main" val="2668780768"/>
+      </p:ext>
+    </p:extLst>
+  </p:cSld>
+  <p:clrMapOvr>
+    <a:masterClrMapping/>
+  </p:clrMapOvr>
+</p:sld>
+</file>
+
+<file path=ppt/slides/slide13.xml><?xml version="1.0" encoding="utf-8"?>
+<p:sld xmlns:a="http://schemas.openxmlformats.org/drawingml/2006/main" xmlns:r="http://schemas.openxmlformats.org/officeDocument/2006/relationships" xmlns:p="http://schemas.openxmlformats.org/presentationml/2006/main">
+  <p:cSld>
+    <p:spTree>
+      <p:nvGrpSpPr>
+        <p:cNvPr id="1" name=""/>
+        <p:cNvGrpSpPr/>
+        <p:nvPr/>
+      </p:nvGrpSpPr>
+      <p:grpSpPr>
+        <a:xfrm>
+          <a:off x="0" y="0"/>
+          <a:ext cx="0" cy="0"/>
+          <a:chOff x="0" y="0"/>
+          <a:chExt cx="0" cy="0"/>
+        </a:xfrm>
+      </p:grpSpPr>
+      <p:pic>
+        <p:nvPicPr>
+          <p:cNvPr id="4" name="그림 3"/>
+          <p:cNvPicPr>
+            <a:picLocks noChangeAspect="1"/>
+          </p:cNvPicPr>
+          <p:nvPr/>
+        </p:nvPicPr>
+        <p:blipFill>
+          <a:blip r:embed="rId2"/>
+          <a:stretch>
+            <a:fillRect/>
+          </a:stretch>
+        </p:blipFill>
+        <p:spPr>
+          <a:xfrm>
             <a:off x="656405" y="419195"/>
             <a:ext cx="3086531" cy="1960519"/>
           </a:xfrm>
@@ -3420,7 +3541,7 @@
 </p:sld>
 </file>
 
-<file path=ppt/slides/slide13.xml><?xml version="1.0" encoding="utf-8"?>
+<file path=ppt/slides/slide14.xml><?xml version="1.0" encoding="utf-8"?>
 <p:sld xmlns:a="http://schemas.openxmlformats.org/drawingml/2006/main" xmlns:r="http://schemas.openxmlformats.org/officeDocument/2006/relationships" xmlns:p="http://schemas.openxmlformats.org/presentationml/2006/main">
   <p:cSld>
     <p:spTree>
@@ -3515,6 +3636,66 @@
           </a:prstGeom>
         </p:spPr>
       </p:pic>
+      <p:pic>
+        <p:nvPicPr>
+          <p:cNvPr id="2" name="그림 1">
+            <a:extLst>
+              <a:ext uri="{FF2B5EF4-FFF2-40B4-BE49-F238E27FC236}">
+                <a16:creationId xmlns:a16="http://schemas.microsoft.com/office/drawing/2014/main" id="{559598B3-61CB-4487-AD7E-17C8113D27DA}"/>
+              </a:ext>
+            </a:extLst>
+          </p:cNvPr>
+          <p:cNvPicPr>
+            <a:picLocks noChangeAspect="1"/>
+          </p:cNvPicPr>
+          <p:nvPr/>
+        </p:nvPicPr>
+        <p:blipFill>
+          <a:blip r:embed="rId3"/>
+          <a:stretch>
+            <a:fillRect/>
+          </a:stretch>
+        </p:blipFill>
+        <p:spPr>
+          <a:xfrm>
+            <a:off x="4666334" y="267181"/>
+            <a:ext cx="5534797" cy="3715268"/>
+          </a:xfrm>
+          <a:prstGeom prst="rect">
+            <a:avLst/>
+          </a:prstGeom>
+        </p:spPr>
+      </p:pic>
+      <p:pic>
+        <p:nvPicPr>
+          <p:cNvPr id="3" name="그림 2">
+            <a:extLst>
+              <a:ext uri="{FF2B5EF4-FFF2-40B4-BE49-F238E27FC236}">
+                <a16:creationId xmlns:a16="http://schemas.microsoft.com/office/drawing/2014/main" id="{E4736E57-56FD-4EAE-9E4C-C2ACE7377FFF}"/>
+              </a:ext>
+            </a:extLst>
+          </p:cNvPr>
+          <p:cNvPicPr>
+            <a:picLocks noChangeAspect="1"/>
+          </p:cNvPicPr>
+          <p:nvPr/>
+        </p:nvPicPr>
+        <p:blipFill>
+          <a:blip r:embed="rId4"/>
+          <a:stretch>
+            <a:fillRect/>
+          </a:stretch>
+        </p:blipFill>
+        <p:spPr>
+          <a:xfrm>
+            <a:off x="460459" y="3551921"/>
+            <a:ext cx="6973273" cy="2905530"/>
+          </a:xfrm>
+          <a:prstGeom prst="rect">
+            <a:avLst/>
+          </a:prstGeom>
+        </p:spPr>
+      </p:pic>
     </p:spTree>
     <p:extLst>
       <p:ext uri="{BB962C8B-B14F-4D97-AF65-F5344CB8AC3E}">
@@ -3547,7 +3728,13 @@
       </p:grpSpPr>
       <p:pic>
         <p:nvPicPr>
-          <p:cNvPr id="4" name="그림 3"/>
+          <p:cNvPr id="4" name="그림 3">
+            <a:extLst>
+              <a:ext uri="{FF2B5EF4-FFF2-40B4-BE49-F238E27FC236}">
+                <a16:creationId xmlns:a16="http://schemas.microsoft.com/office/drawing/2014/main" id="{02290F7B-2E0E-4105-8B91-BA3EB9A13482}"/>
+              </a:ext>
+            </a:extLst>
+          </p:cNvPr>
           <p:cNvPicPr>
             <a:picLocks noChangeAspect="1"/>
           </p:cNvPicPr>
@@ -3561,8 +3748,8 @@
         </p:blipFill>
         <p:spPr>
           <a:xfrm>
-            <a:off x="460967" y="230838"/>
-            <a:ext cx="6973273" cy="3715268"/>
+            <a:off x="187468" y="173402"/>
+            <a:ext cx="5534797" cy="2362530"/>
           </a:xfrm>
           <a:prstGeom prst="rect">
             <a:avLst/>
@@ -3571,7 +3758,13 @@
       </p:pic>
       <p:pic>
         <p:nvPicPr>
-          <p:cNvPr id="5" name="그림 4"/>
+          <p:cNvPr id="5" name="그림 4">
+            <a:extLst>
+              <a:ext uri="{FF2B5EF4-FFF2-40B4-BE49-F238E27FC236}">
+                <a16:creationId xmlns:a16="http://schemas.microsoft.com/office/drawing/2014/main" id="{4928C752-B48F-4831-BCA9-E816D9BB2F90}"/>
+              </a:ext>
+            </a:extLst>
+          </p:cNvPr>
           <p:cNvPicPr>
             <a:picLocks noChangeAspect="1"/>
           </p:cNvPicPr>
@@ -3585,8 +3778,8 @@
         </p:blipFill>
         <p:spPr>
           <a:xfrm>
-            <a:off x="345558" y="3294244"/>
-            <a:ext cx="6973273" cy="2915057"/>
+            <a:off x="6337982" y="173402"/>
+            <a:ext cx="5391902" cy="3734321"/>
           </a:xfrm>
           <a:prstGeom prst="rect">
             <a:avLst/>
@@ -3595,7 +3788,13 @@
       </p:pic>
       <p:pic>
         <p:nvPicPr>
-          <p:cNvPr id="6" name="그림 5"/>
+          <p:cNvPr id="6" name="그림 5">
+            <a:extLst>
+              <a:ext uri="{FF2B5EF4-FFF2-40B4-BE49-F238E27FC236}">
+                <a16:creationId xmlns:a16="http://schemas.microsoft.com/office/drawing/2014/main" id="{CFF215EE-59DB-46F9-BD12-DA759A22F320}"/>
+              </a:ext>
+            </a:extLst>
+          </p:cNvPr>
           <p:cNvPicPr>
             <a:picLocks noChangeAspect="1"/>
           </p:cNvPicPr>
@@ -3609,8 +3808,8 @@
         </p:blipFill>
         <p:spPr>
           <a:xfrm>
-            <a:off x="2537916" y="1571366"/>
-            <a:ext cx="7116168" cy="3715268"/>
+            <a:off x="555500" y="2607532"/>
+            <a:ext cx="5782482" cy="2896004"/>
           </a:xfrm>
           <a:prstGeom prst="rect">
             <a:avLst/>
@@ -3620,7 +3819,7 @@
     </p:spTree>
     <p:extLst>
       <p:ext uri="{BB962C8B-B14F-4D97-AF65-F5344CB8AC3E}">
-        <p14:creationId xmlns:p14="http://schemas.microsoft.com/office/powerpoint/2010/main" val="2005913688"/>
+        <p14:creationId xmlns:p14="http://schemas.microsoft.com/office/powerpoint/2010/main" val="3011048765"/>
       </p:ext>
     </p:extLst>
   </p:cSld>
@@ -3663,8 +3862,8 @@
         </p:blipFill>
         <p:spPr>
           <a:xfrm>
-            <a:off x="177975" y="246068"/>
-            <a:ext cx="7201905" cy="790685"/>
+            <a:off x="460967" y="230838"/>
+            <a:ext cx="6973273" cy="3715268"/>
           </a:xfrm>
           <a:prstGeom prst="rect">
             <a:avLst/>
@@ -3687,8 +3886,8 @@
         </p:blipFill>
         <p:spPr>
           <a:xfrm>
-            <a:off x="539773" y="1179285"/>
-            <a:ext cx="6744641" cy="4801270"/>
+            <a:off x="345558" y="3294244"/>
+            <a:ext cx="6973273" cy="2915057"/>
           </a:xfrm>
           <a:prstGeom prst="rect">
             <a:avLst/>
@@ -3697,7 +3896,7 @@
       </p:pic>
       <p:pic>
         <p:nvPicPr>
-          <p:cNvPr id="2" name="그림 1"/>
+          <p:cNvPr id="6" name="그림 5"/>
           <p:cNvPicPr>
             <a:picLocks noChangeAspect="1"/>
           </p:cNvPicPr>
@@ -3711,32 +3910,8 @@
         </p:blipFill>
         <p:spPr>
           <a:xfrm>
-            <a:off x="5711524" y="246068"/>
-            <a:ext cx="6077798" cy="2181529"/>
-          </a:xfrm>
-          <a:prstGeom prst="rect">
-            <a:avLst/>
-          </a:prstGeom>
-        </p:spPr>
-      </p:pic>
-      <p:pic>
-        <p:nvPicPr>
-          <p:cNvPr id="3" name="그림 2"/>
-          <p:cNvPicPr>
-            <a:picLocks noChangeAspect="1"/>
-          </p:cNvPicPr>
-          <p:nvPr/>
-        </p:nvPicPr>
-        <p:blipFill>
-          <a:blip r:embed="rId5"/>
-          <a:stretch>
-            <a:fillRect/>
-          </a:stretch>
-        </p:blipFill>
-        <p:spPr>
-          <a:xfrm>
-            <a:off x="3171417" y="2019103"/>
-            <a:ext cx="5849166" cy="2819794"/>
+            <a:off x="2537916" y="1571366"/>
+            <a:ext cx="7116168" cy="3715268"/>
           </a:xfrm>
           <a:prstGeom prst="rect">
             <a:avLst/>
@@ -3746,7 +3921,7 @@
     </p:spTree>
     <p:extLst>
       <p:ext uri="{BB962C8B-B14F-4D97-AF65-F5344CB8AC3E}">
-        <p14:creationId xmlns:p14="http://schemas.microsoft.com/office/powerpoint/2010/main" val="1321305327"/>
+        <p14:creationId xmlns:p14="http://schemas.microsoft.com/office/powerpoint/2010/main" val="2005913688"/>
       </p:ext>
     </p:extLst>
   </p:cSld>
@@ -3789,8 +3964,8 @@
         </p:blipFill>
         <p:spPr>
           <a:xfrm>
-            <a:off x="513362" y="338928"/>
-            <a:ext cx="6868484" cy="4582164"/>
+            <a:off x="177975" y="246068"/>
+            <a:ext cx="7201905" cy="790685"/>
           </a:xfrm>
           <a:prstGeom prst="rect">
             <a:avLst/>
@@ -3813,6 +3988,132 @@
         </p:blipFill>
         <p:spPr>
           <a:xfrm>
+            <a:off x="539773" y="1179285"/>
+            <a:ext cx="6744641" cy="4801270"/>
+          </a:xfrm>
+          <a:prstGeom prst="rect">
+            <a:avLst/>
+          </a:prstGeom>
+        </p:spPr>
+      </p:pic>
+      <p:pic>
+        <p:nvPicPr>
+          <p:cNvPr id="2" name="그림 1"/>
+          <p:cNvPicPr>
+            <a:picLocks noChangeAspect="1"/>
+          </p:cNvPicPr>
+          <p:nvPr/>
+        </p:nvPicPr>
+        <p:blipFill>
+          <a:blip r:embed="rId4"/>
+          <a:stretch>
+            <a:fillRect/>
+          </a:stretch>
+        </p:blipFill>
+        <p:spPr>
+          <a:xfrm>
+            <a:off x="5711524" y="246068"/>
+            <a:ext cx="6077798" cy="2181529"/>
+          </a:xfrm>
+          <a:prstGeom prst="rect">
+            <a:avLst/>
+          </a:prstGeom>
+        </p:spPr>
+      </p:pic>
+      <p:pic>
+        <p:nvPicPr>
+          <p:cNvPr id="3" name="그림 2"/>
+          <p:cNvPicPr>
+            <a:picLocks noChangeAspect="1"/>
+          </p:cNvPicPr>
+          <p:nvPr/>
+        </p:nvPicPr>
+        <p:blipFill>
+          <a:blip r:embed="rId5"/>
+          <a:stretch>
+            <a:fillRect/>
+          </a:stretch>
+        </p:blipFill>
+        <p:spPr>
+          <a:xfrm>
+            <a:off x="3171417" y="2019103"/>
+            <a:ext cx="5849166" cy="2819794"/>
+          </a:xfrm>
+          <a:prstGeom prst="rect">
+            <a:avLst/>
+          </a:prstGeom>
+        </p:spPr>
+      </p:pic>
+    </p:spTree>
+    <p:extLst>
+      <p:ext uri="{BB962C8B-B14F-4D97-AF65-F5344CB8AC3E}">
+        <p14:creationId xmlns:p14="http://schemas.microsoft.com/office/powerpoint/2010/main" val="1321305327"/>
+      </p:ext>
+    </p:extLst>
+  </p:cSld>
+  <p:clrMapOvr>
+    <a:masterClrMapping/>
+  </p:clrMapOvr>
+</p:sld>
+</file>
+
+<file path=ppt/slides/slide6.xml><?xml version="1.0" encoding="utf-8"?>
+<p:sld xmlns:a="http://schemas.openxmlformats.org/drawingml/2006/main" xmlns:r="http://schemas.openxmlformats.org/officeDocument/2006/relationships" xmlns:p="http://schemas.openxmlformats.org/presentationml/2006/main">
+  <p:cSld>
+    <p:spTree>
+      <p:nvGrpSpPr>
+        <p:cNvPr id="1" name=""/>
+        <p:cNvGrpSpPr/>
+        <p:nvPr/>
+      </p:nvGrpSpPr>
+      <p:grpSpPr>
+        <a:xfrm>
+          <a:off x="0" y="0"/>
+          <a:ext cx="0" cy="0"/>
+          <a:chOff x="0" y="0"/>
+          <a:chExt cx="0" cy="0"/>
+        </a:xfrm>
+      </p:grpSpPr>
+      <p:pic>
+        <p:nvPicPr>
+          <p:cNvPr id="4" name="그림 3"/>
+          <p:cNvPicPr>
+            <a:picLocks noChangeAspect="1"/>
+          </p:cNvPicPr>
+          <p:nvPr/>
+        </p:nvPicPr>
+        <p:blipFill>
+          <a:blip r:embed="rId2"/>
+          <a:stretch>
+            <a:fillRect/>
+          </a:stretch>
+        </p:blipFill>
+        <p:spPr>
+          <a:xfrm>
+            <a:off x="513362" y="338928"/>
+            <a:ext cx="6868484" cy="4582164"/>
+          </a:xfrm>
+          <a:prstGeom prst="rect">
+            <a:avLst/>
+          </a:prstGeom>
+        </p:spPr>
+      </p:pic>
+      <p:pic>
+        <p:nvPicPr>
+          <p:cNvPr id="5" name="그림 4"/>
+          <p:cNvPicPr>
+            <a:picLocks noChangeAspect="1"/>
+          </p:cNvPicPr>
+          <p:nvPr/>
+        </p:nvPicPr>
+        <p:blipFill>
+          <a:blip r:embed="rId3"/>
+          <a:stretch>
+            <a:fillRect/>
+          </a:stretch>
+        </p:blipFill>
+        <p:spPr>
+          <a:xfrm>
             <a:off x="8215079" y="338928"/>
             <a:ext cx="2686425" cy="1724266"/>
           </a:xfrm>
@@ -3834,7 +4135,7 @@
 </p:sld>
 </file>
 
-<file path=ppt/slides/slide6.xml><?xml version="1.0" encoding="utf-8"?>
+<file path=ppt/slides/slide7.xml><?xml version="1.0" encoding="utf-8"?>
 <p:sld xmlns:a="http://schemas.openxmlformats.org/drawingml/2006/main" xmlns:r="http://schemas.openxmlformats.org/officeDocument/2006/relationships" xmlns:p="http://schemas.openxmlformats.org/presentationml/2006/main">
   <p:cSld>
     <p:spTree>
@@ -3903,108 +4204,6 @@
     <p:extLst>
       <p:ext uri="{BB962C8B-B14F-4D97-AF65-F5344CB8AC3E}">
         <p14:creationId xmlns:p14="http://schemas.microsoft.com/office/powerpoint/2010/main" val="2656977250"/>
-      </p:ext>
-    </p:extLst>
-  </p:cSld>
-  <p:clrMapOvr>
-    <a:masterClrMapping/>
-  </p:clrMapOvr>
-</p:sld>
-</file>
-
-<file path=ppt/slides/slide7.xml><?xml version="1.0" encoding="utf-8"?>
-<p:sld xmlns:a="http://schemas.openxmlformats.org/drawingml/2006/main" xmlns:r="http://schemas.openxmlformats.org/officeDocument/2006/relationships" xmlns:p="http://schemas.openxmlformats.org/presentationml/2006/main">
-  <p:cSld>
-    <p:spTree>
-      <p:nvGrpSpPr>
-        <p:cNvPr id="1" name=""/>
-        <p:cNvGrpSpPr/>
-        <p:nvPr/>
-      </p:nvGrpSpPr>
-      <p:grpSpPr>
-        <a:xfrm>
-          <a:off x="0" y="0"/>
-          <a:ext cx="0" cy="0"/>
-          <a:chOff x="0" y="0"/>
-          <a:chExt cx="0" cy="0"/>
-        </a:xfrm>
-      </p:grpSpPr>
-      <p:pic>
-        <p:nvPicPr>
-          <p:cNvPr id="4" name="그림 3"/>
-          <p:cNvPicPr>
-            <a:picLocks noChangeAspect="1"/>
-          </p:cNvPicPr>
-          <p:nvPr/>
-        </p:nvPicPr>
-        <p:blipFill>
-          <a:blip r:embed="rId2"/>
-          <a:stretch>
-            <a:fillRect/>
-          </a:stretch>
-        </p:blipFill>
-        <p:spPr>
-          <a:xfrm>
-            <a:off x="655793" y="311328"/>
-            <a:ext cx="5944430" cy="2524477"/>
-          </a:xfrm>
-          <a:prstGeom prst="rect">
-            <a:avLst/>
-          </a:prstGeom>
-        </p:spPr>
-      </p:pic>
-      <p:pic>
-        <p:nvPicPr>
-          <p:cNvPr id="5" name="그림 4"/>
-          <p:cNvPicPr>
-            <a:picLocks noChangeAspect="1"/>
-          </p:cNvPicPr>
-          <p:nvPr/>
-        </p:nvPicPr>
-        <p:blipFill>
-          <a:blip r:embed="rId3"/>
-          <a:stretch>
-            <a:fillRect/>
-          </a:stretch>
-        </p:blipFill>
-        <p:spPr>
-          <a:xfrm>
-            <a:off x="543627" y="3097193"/>
-            <a:ext cx="5849166" cy="2705478"/>
-          </a:xfrm>
-          <a:prstGeom prst="rect">
-            <a:avLst/>
-          </a:prstGeom>
-        </p:spPr>
-      </p:pic>
-      <p:pic>
-        <p:nvPicPr>
-          <p:cNvPr id="2" name="그림 1"/>
-          <p:cNvPicPr>
-            <a:picLocks noChangeAspect="1"/>
-          </p:cNvPicPr>
-          <p:nvPr/>
-        </p:nvPicPr>
-        <p:blipFill>
-          <a:blip r:embed="rId4"/>
-          <a:stretch>
-            <a:fillRect/>
-          </a:stretch>
-        </p:blipFill>
-        <p:spPr>
-          <a:xfrm>
-            <a:off x="5565050" y="454222"/>
-            <a:ext cx="5839640" cy="2238687"/>
-          </a:xfrm>
-          <a:prstGeom prst="rect">
-            <a:avLst/>
-          </a:prstGeom>
-        </p:spPr>
-      </p:pic>
-    </p:spTree>
-    <p:extLst>
-      <p:ext uri="{BB962C8B-B14F-4D97-AF65-F5344CB8AC3E}">
-        <p14:creationId xmlns:p14="http://schemas.microsoft.com/office/powerpoint/2010/main" val="887493065"/>
       </p:ext>
     </p:extLst>
   </p:cSld>
@@ -4047,8 +4246,8 @@
         </p:blipFill>
         <p:spPr>
           <a:xfrm>
-            <a:off x="280392" y="278487"/>
-            <a:ext cx="4315427" cy="2406351"/>
+            <a:off x="655793" y="311328"/>
+            <a:ext cx="5944430" cy="2524477"/>
           </a:xfrm>
           <a:prstGeom prst="rect">
             <a:avLst/>
@@ -4071,71 +4270,32 @@
         </p:blipFill>
         <p:spPr>
           <a:xfrm>
-            <a:off x="5312126" y="373818"/>
-            <a:ext cx="3326594" cy="2709288"/>
+            <a:off x="543627" y="3097193"/>
+            <a:ext cx="5849166" cy="2705478"/>
           </a:xfrm>
           <a:prstGeom prst="rect">
             <a:avLst/>
           </a:prstGeom>
         </p:spPr>
       </p:pic>
-      <p:sp>
-        <p:nvSpPr>
-          <p:cNvPr id="2" name="직사각형 1"/>
-          <p:cNvSpPr/>
-          <p:nvPr/>
-        </p:nvSpPr>
-        <p:spPr>
-          <a:xfrm>
-            <a:off x="4167427" y="3244334"/>
-            <a:ext cx="3857146" cy="369332"/>
-          </a:xfrm>
-          <a:prstGeom prst="rect">
-            <a:avLst/>
-          </a:prstGeom>
-        </p:spPr>
-        <p:txBody>
-          <a:bodyPr wrap="none">
-            <a:spAutoFit/>
-          </a:bodyPr>
-          <a:lstStyle/>
-          <a:p>
-            <a:r>
-              <a:rPr lang="en-US" altLang="ko-KR" dirty="0">
-                <a:solidFill>
-                  <a:srgbClr val="CCCCCC"/>
-                </a:solidFill>
-                <a:latin typeface="Consolas" panose="020B0609020204030204" pitchFamily="49" charset="0"/>
-              </a:rPr>
-              <a:t>03_04_bertviz_neuron_view.png</a:t>
-            </a:r>
-            <a:endParaRPr lang="en-US" altLang="ko-KR" b="0" dirty="0">
-              <a:solidFill>
-                <a:srgbClr val="CCCCCC"/>
-              </a:solidFill>
-              <a:effectLst/>
-              <a:latin typeface="Consolas" panose="020B0609020204030204" pitchFamily="49" charset="0"/>
-            </a:endParaRPr>
-          </a:p>
-        </p:txBody>
-      </p:sp>
       <p:pic>
         <p:nvPicPr>
-          <p:cNvPr id="3" name="그림 2"/>
+          <p:cNvPr id="2" name="그림 1"/>
           <p:cNvPicPr>
             <a:picLocks noChangeAspect="1"/>
           </p:cNvPicPr>
           <p:nvPr/>
         </p:nvPicPr>
-        <p:blipFill rotWithShape="1">
+        <p:blipFill>
           <a:blip r:embed="rId4"/>
-          <a:srcRect t="14277"/>
-          <a:stretch/>
+          <a:stretch>
+            <a:fillRect/>
+          </a:stretch>
         </p:blipFill>
         <p:spPr>
           <a:xfrm>
-            <a:off x="1185915" y="3879541"/>
-            <a:ext cx="7192379" cy="2327387"/>
+            <a:off x="5565050" y="454222"/>
+            <a:ext cx="5839640" cy="2238687"/>
           </a:xfrm>
           <a:prstGeom prst="rect">
             <a:avLst/>
@@ -4145,7 +4305,7 @@
     </p:spTree>
     <p:extLst>
       <p:ext uri="{BB962C8B-B14F-4D97-AF65-F5344CB8AC3E}">
-        <p14:creationId xmlns:p14="http://schemas.microsoft.com/office/powerpoint/2010/main" val="4024031726"/>
+        <p14:creationId xmlns:p14="http://schemas.microsoft.com/office/powerpoint/2010/main" val="887493065"/>
       </p:ext>
     </p:extLst>
   </p:cSld>
@@ -4286,7 +4446,7 @@
     </p:spTree>
     <p:extLst>
       <p:ext uri="{BB962C8B-B14F-4D97-AF65-F5344CB8AC3E}">
-        <p14:creationId xmlns:p14="http://schemas.microsoft.com/office/powerpoint/2010/main" val="1575043608"/>
+        <p14:creationId xmlns:p14="http://schemas.microsoft.com/office/powerpoint/2010/main" val="4024031726"/>
       </p:ext>
     </p:extLst>
   </p:cSld>

--- a/image/이미지 생성용.pptx
+++ b/image/이미지 생성용.pptx
@@ -6,19 +6,20 @@
   </p:sldMasterIdLst>
   <p:sldIdLst>
     <p:sldId id="256" r:id="rId2"/>
-    <p:sldId id="268" r:id="rId3"/>
-    <p:sldId id="269" r:id="rId4"/>
-    <p:sldId id="267" r:id="rId5"/>
-    <p:sldId id="265" r:id="rId6"/>
-    <p:sldId id="266" r:id="rId7"/>
-    <p:sldId id="264" r:id="rId8"/>
-    <p:sldId id="263" r:id="rId9"/>
-    <p:sldId id="261" r:id="rId10"/>
-    <p:sldId id="262" r:id="rId11"/>
-    <p:sldId id="257" r:id="rId12"/>
-    <p:sldId id="258" r:id="rId13"/>
-    <p:sldId id="259" r:id="rId14"/>
-    <p:sldId id="260" r:id="rId15"/>
+    <p:sldId id="270" r:id="rId3"/>
+    <p:sldId id="268" r:id="rId4"/>
+    <p:sldId id="269" r:id="rId5"/>
+    <p:sldId id="267" r:id="rId6"/>
+    <p:sldId id="265" r:id="rId7"/>
+    <p:sldId id="266" r:id="rId8"/>
+    <p:sldId id="264" r:id="rId9"/>
+    <p:sldId id="263" r:id="rId10"/>
+    <p:sldId id="261" r:id="rId11"/>
+    <p:sldId id="262" r:id="rId12"/>
+    <p:sldId id="257" r:id="rId13"/>
+    <p:sldId id="258" r:id="rId14"/>
+    <p:sldId id="259" r:id="rId15"/>
+    <p:sldId id="260" r:id="rId16"/>
   </p:sldIdLst>
   <p:sldSz cx="12192000" cy="6858000"/>
   <p:notesSz cx="6858000" cy="9144000"/>
@@ -254,7 +255,7 @@
           <a:p>
             <a:fld id="{F0CD9246-440E-46C2-946E-50CD81230ED2}" type="datetimeFigureOut">
               <a:rPr lang="ko-KR" altLang="en-US" smtClean="0"/>
-              <a:t>2026-02-02</a:t>
+              <a:t>2026-02-06</a:t>
             </a:fld>
             <a:endParaRPr lang="ko-KR" altLang="en-US"/>
           </a:p>
@@ -422,7 +423,7 @@
           <a:p>
             <a:fld id="{F0CD9246-440E-46C2-946E-50CD81230ED2}" type="datetimeFigureOut">
               <a:rPr lang="ko-KR" altLang="en-US" smtClean="0"/>
-              <a:t>2026-02-02</a:t>
+              <a:t>2026-02-06</a:t>
             </a:fld>
             <a:endParaRPr lang="ko-KR" altLang="en-US"/>
           </a:p>
@@ -600,7 +601,7 @@
           <a:p>
             <a:fld id="{F0CD9246-440E-46C2-946E-50CD81230ED2}" type="datetimeFigureOut">
               <a:rPr lang="ko-KR" altLang="en-US" smtClean="0"/>
-              <a:t>2026-02-02</a:t>
+              <a:t>2026-02-06</a:t>
             </a:fld>
             <a:endParaRPr lang="ko-KR" altLang="en-US"/>
           </a:p>
@@ -768,7 +769,7 @@
           <a:p>
             <a:fld id="{F0CD9246-440E-46C2-946E-50CD81230ED2}" type="datetimeFigureOut">
               <a:rPr lang="ko-KR" altLang="en-US" smtClean="0"/>
-              <a:t>2026-02-02</a:t>
+              <a:t>2026-02-06</a:t>
             </a:fld>
             <a:endParaRPr lang="ko-KR" altLang="en-US"/>
           </a:p>
@@ -1013,7 +1014,7 @@
           <a:p>
             <a:fld id="{F0CD9246-440E-46C2-946E-50CD81230ED2}" type="datetimeFigureOut">
               <a:rPr lang="ko-KR" altLang="en-US" smtClean="0"/>
-              <a:t>2026-02-02</a:t>
+              <a:t>2026-02-06</a:t>
             </a:fld>
             <a:endParaRPr lang="ko-KR" altLang="en-US"/>
           </a:p>
@@ -1242,7 +1243,7 @@
           <a:p>
             <a:fld id="{F0CD9246-440E-46C2-946E-50CD81230ED2}" type="datetimeFigureOut">
               <a:rPr lang="ko-KR" altLang="en-US" smtClean="0"/>
-              <a:t>2026-02-02</a:t>
+              <a:t>2026-02-06</a:t>
             </a:fld>
             <a:endParaRPr lang="ko-KR" altLang="en-US"/>
           </a:p>
@@ -1606,7 +1607,7 @@
           <a:p>
             <a:fld id="{F0CD9246-440E-46C2-946E-50CD81230ED2}" type="datetimeFigureOut">
               <a:rPr lang="ko-KR" altLang="en-US" smtClean="0"/>
-              <a:t>2026-02-02</a:t>
+              <a:t>2026-02-06</a:t>
             </a:fld>
             <a:endParaRPr lang="ko-KR" altLang="en-US"/>
           </a:p>
@@ -1723,7 +1724,7 @@
           <a:p>
             <a:fld id="{F0CD9246-440E-46C2-946E-50CD81230ED2}" type="datetimeFigureOut">
               <a:rPr lang="ko-KR" altLang="en-US" smtClean="0"/>
-              <a:t>2026-02-02</a:t>
+              <a:t>2026-02-06</a:t>
             </a:fld>
             <a:endParaRPr lang="ko-KR" altLang="en-US"/>
           </a:p>
@@ -1818,7 +1819,7 @@
           <a:p>
             <a:fld id="{F0CD9246-440E-46C2-946E-50CD81230ED2}" type="datetimeFigureOut">
               <a:rPr lang="ko-KR" altLang="en-US" smtClean="0"/>
-              <a:t>2026-02-02</a:t>
+              <a:t>2026-02-06</a:t>
             </a:fld>
             <a:endParaRPr lang="ko-KR" altLang="en-US"/>
           </a:p>
@@ -2093,7 +2094,7 @@
           <a:p>
             <a:fld id="{F0CD9246-440E-46C2-946E-50CD81230ED2}" type="datetimeFigureOut">
               <a:rPr lang="ko-KR" altLang="en-US" smtClean="0"/>
-              <a:t>2026-02-02</a:t>
+              <a:t>2026-02-06</a:t>
             </a:fld>
             <a:endParaRPr lang="ko-KR" altLang="en-US"/>
           </a:p>
@@ -2345,7 +2346,7 @@
           <a:p>
             <a:fld id="{F0CD9246-440E-46C2-946E-50CD81230ED2}" type="datetimeFigureOut">
               <a:rPr lang="ko-KR" altLang="en-US" smtClean="0"/>
-              <a:t>2026-02-02</a:t>
+              <a:t>2026-02-06</a:t>
             </a:fld>
             <a:endParaRPr lang="ko-KR" altLang="en-US"/>
           </a:p>
@@ -2556,7 +2557,7 @@
           <a:p>
             <a:fld id="{F0CD9246-440E-46C2-946E-50CD81230ED2}" type="datetimeFigureOut">
               <a:rPr lang="ko-KR" altLang="en-US" smtClean="0"/>
-              <a:t>2026-02-02</a:t>
+              <a:t>2026-02-06</a:t>
             </a:fld>
             <a:endParaRPr lang="ko-KR" altLang="en-US"/>
           </a:p>
@@ -3201,7 +3202,7 @@
     </p:spTree>
     <p:extLst>
       <p:ext uri="{BB962C8B-B14F-4D97-AF65-F5344CB8AC3E}">
-        <p14:creationId xmlns:p14="http://schemas.microsoft.com/office/powerpoint/2010/main" val="1575043608"/>
+        <p14:creationId xmlns:p14="http://schemas.microsoft.com/office/powerpoint/2010/main" val="4024031726"/>
       </p:ext>
     </p:extLst>
   </p:cSld>
@@ -3244,8 +3245,8 @@
         </p:blipFill>
         <p:spPr>
           <a:xfrm>
-            <a:off x="299547" y="371100"/>
-            <a:ext cx="4212543" cy="3235141"/>
+            <a:off x="280392" y="278487"/>
+            <a:ext cx="4315427" cy="2406351"/>
           </a:xfrm>
           <a:prstGeom prst="rect">
             <a:avLst/>
@@ -3268,56 +3269,71 @@
         </p:blipFill>
         <p:spPr>
           <a:xfrm>
-            <a:off x="609134" y="4167072"/>
-            <a:ext cx="4001059" cy="1000265"/>
+            <a:off x="5312126" y="373818"/>
+            <a:ext cx="3326594" cy="2709288"/>
           </a:xfrm>
           <a:prstGeom prst="rect">
             <a:avLst/>
           </a:prstGeom>
         </p:spPr>
       </p:pic>
+      <p:sp>
+        <p:nvSpPr>
+          <p:cNvPr id="2" name="직사각형 1"/>
+          <p:cNvSpPr/>
+          <p:nvPr/>
+        </p:nvSpPr>
+        <p:spPr>
+          <a:xfrm>
+            <a:off x="4167427" y="3244334"/>
+            <a:ext cx="3857146" cy="369332"/>
+          </a:xfrm>
+          <a:prstGeom prst="rect">
+            <a:avLst/>
+          </a:prstGeom>
+        </p:spPr>
+        <p:txBody>
+          <a:bodyPr wrap="none">
+            <a:spAutoFit/>
+          </a:bodyPr>
+          <a:lstStyle/>
+          <a:p>
+            <a:r>
+              <a:rPr lang="en-US" altLang="ko-KR" dirty="0">
+                <a:solidFill>
+                  <a:srgbClr val="CCCCCC"/>
+                </a:solidFill>
+                <a:latin typeface="Consolas" panose="020B0609020204030204" pitchFamily="49" charset="0"/>
+              </a:rPr>
+              <a:t>03_04_bertviz_neuron_view.png</a:t>
+            </a:r>
+            <a:endParaRPr lang="en-US" altLang="ko-KR" b="0" dirty="0">
+              <a:solidFill>
+                <a:srgbClr val="CCCCCC"/>
+              </a:solidFill>
+              <a:effectLst/>
+              <a:latin typeface="Consolas" panose="020B0609020204030204" pitchFamily="49" charset="0"/>
+            </a:endParaRPr>
+          </a:p>
+        </p:txBody>
+      </p:sp>
       <p:pic>
         <p:nvPicPr>
-          <p:cNvPr id="6" name="그림 5"/>
+          <p:cNvPr id="3" name="그림 2"/>
           <p:cNvPicPr>
             <a:picLocks noChangeAspect="1"/>
           </p:cNvPicPr>
           <p:nvPr/>
         </p:nvPicPr>
-        <p:blipFill>
+        <p:blipFill rotWithShape="1">
           <a:blip r:embed="rId4"/>
-          <a:stretch>
-            <a:fillRect/>
-          </a:stretch>
+          <a:srcRect t="14277"/>
+          <a:stretch/>
         </p:blipFill>
         <p:spPr>
           <a:xfrm>
-            <a:off x="5495647" y="371100"/>
-            <a:ext cx="2389204" cy="2389204"/>
-          </a:xfrm>
-          <a:prstGeom prst="rect">
-            <a:avLst/>
-          </a:prstGeom>
-        </p:spPr>
-      </p:pic>
-      <p:pic>
-        <p:nvPicPr>
-          <p:cNvPr id="7" name="그림 6"/>
-          <p:cNvPicPr>
-            <a:picLocks noChangeAspect="1"/>
-          </p:cNvPicPr>
-          <p:nvPr/>
-        </p:nvPicPr>
-        <p:blipFill>
-          <a:blip r:embed="rId5"/>
-          <a:stretch>
-            <a:fillRect/>
-          </a:stretch>
-        </p:blipFill>
-        <p:spPr>
-          <a:xfrm>
-            <a:off x="5323983" y="3002913"/>
-            <a:ext cx="4229690" cy="2172003"/>
+            <a:off x="1185915" y="3879541"/>
+            <a:ext cx="7192379" cy="2327387"/>
           </a:xfrm>
           <a:prstGeom prst="rect">
             <a:avLst/>
@@ -3327,7 +3343,7 @@
     </p:spTree>
     <p:extLst>
       <p:ext uri="{BB962C8B-B14F-4D97-AF65-F5344CB8AC3E}">
-        <p14:creationId xmlns:p14="http://schemas.microsoft.com/office/powerpoint/2010/main" val="2628583716"/>
+        <p14:creationId xmlns:p14="http://schemas.microsoft.com/office/powerpoint/2010/main" val="1575043608"/>
       </p:ext>
     </p:extLst>
   </p:cSld>
@@ -3370,8 +3386,80 @@
         </p:blipFill>
         <p:spPr>
           <a:xfrm>
-            <a:off x="813880" y="385493"/>
-            <a:ext cx="7268589" cy="3858163"/>
+            <a:off x="299547" y="371100"/>
+            <a:ext cx="4212543" cy="3235141"/>
+          </a:xfrm>
+          <a:prstGeom prst="rect">
+            <a:avLst/>
+          </a:prstGeom>
+        </p:spPr>
+      </p:pic>
+      <p:pic>
+        <p:nvPicPr>
+          <p:cNvPr id="5" name="그림 4"/>
+          <p:cNvPicPr>
+            <a:picLocks noChangeAspect="1"/>
+          </p:cNvPicPr>
+          <p:nvPr/>
+        </p:nvPicPr>
+        <p:blipFill>
+          <a:blip r:embed="rId3"/>
+          <a:stretch>
+            <a:fillRect/>
+          </a:stretch>
+        </p:blipFill>
+        <p:spPr>
+          <a:xfrm>
+            <a:off x="609134" y="4167072"/>
+            <a:ext cx="4001059" cy="1000265"/>
+          </a:xfrm>
+          <a:prstGeom prst="rect">
+            <a:avLst/>
+          </a:prstGeom>
+        </p:spPr>
+      </p:pic>
+      <p:pic>
+        <p:nvPicPr>
+          <p:cNvPr id="6" name="그림 5"/>
+          <p:cNvPicPr>
+            <a:picLocks noChangeAspect="1"/>
+          </p:cNvPicPr>
+          <p:nvPr/>
+        </p:nvPicPr>
+        <p:blipFill>
+          <a:blip r:embed="rId4"/>
+          <a:stretch>
+            <a:fillRect/>
+          </a:stretch>
+        </p:blipFill>
+        <p:spPr>
+          <a:xfrm>
+            <a:off x="5495647" y="371100"/>
+            <a:ext cx="2389204" cy="2389204"/>
+          </a:xfrm>
+          <a:prstGeom prst="rect">
+            <a:avLst/>
+          </a:prstGeom>
+        </p:spPr>
+      </p:pic>
+      <p:pic>
+        <p:nvPicPr>
+          <p:cNvPr id="7" name="그림 6"/>
+          <p:cNvPicPr>
+            <a:picLocks noChangeAspect="1"/>
+          </p:cNvPicPr>
+          <p:nvPr/>
+        </p:nvPicPr>
+        <p:blipFill>
+          <a:blip r:embed="rId5"/>
+          <a:stretch>
+            <a:fillRect/>
+          </a:stretch>
+        </p:blipFill>
+        <p:spPr>
+          <a:xfrm>
+            <a:off x="5323983" y="3002913"/>
+            <a:ext cx="4229690" cy="2172003"/>
           </a:xfrm>
           <a:prstGeom prst="rect">
             <a:avLst/>
@@ -3381,7 +3469,7 @@
     </p:spTree>
     <p:extLst>
       <p:ext uri="{BB962C8B-B14F-4D97-AF65-F5344CB8AC3E}">
-        <p14:creationId xmlns:p14="http://schemas.microsoft.com/office/powerpoint/2010/main" val="2668780768"/>
+        <p14:creationId xmlns:p14="http://schemas.microsoft.com/office/powerpoint/2010/main" val="2628583716"/>
       </p:ext>
     </p:extLst>
   </p:cSld>
@@ -3424,104 +3512,8 @@
         </p:blipFill>
         <p:spPr>
           <a:xfrm>
-            <a:off x="656405" y="419195"/>
-            <a:ext cx="3086531" cy="1960519"/>
-          </a:xfrm>
-          <a:prstGeom prst="rect">
-            <a:avLst/>
-          </a:prstGeom>
-        </p:spPr>
-      </p:pic>
-      <p:pic>
-        <p:nvPicPr>
-          <p:cNvPr id="5" name="그림 4"/>
-          <p:cNvPicPr>
-            <a:picLocks noChangeAspect="1"/>
-          </p:cNvPicPr>
-          <p:nvPr/>
-        </p:nvPicPr>
-        <p:blipFill>
-          <a:blip r:embed="rId3"/>
-          <a:stretch>
-            <a:fillRect/>
-          </a:stretch>
-        </p:blipFill>
-        <p:spPr>
-          <a:xfrm>
-            <a:off x="656405" y="2630478"/>
-            <a:ext cx="7182852" cy="1171739"/>
-          </a:xfrm>
-          <a:prstGeom prst="rect">
-            <a:avLst/>
-          </a:prstGeom>
-        </p:spPr>
-      </p:pic>
-      <p:pic>
-        <p:nvPicPr>
-          <p:cNvPr id="2" name="그림 1"/>
-          <p:cNvPicPr>
-            <a:picLocks noChangeAspect="1"/>
-          </p:cNvPicPr>
-          <p:nvPr/>
-        </p:nvPicPr>
-        <p:blipFill>
-          <a:blip r:embed="rId4"/>
-          <a:stretch>
-            <a:fillRect/>
-          </a:stretch>
-        </p:blipFill>
-        <p:spPr>
-          <a:xfrm>
-            <a:off x="4156895" y="251531"/>
-            <a:ext cx="4212543" cy="1377507"/>
-          </a:xfrm>
-          <a:prstGeom prst="rect">
-            <a:avLst/>
-          </a:prstGeom>
-        </p:spPr>
-      </p:pic>
-      <p:pic>
-        <p:nvPicPr>
-          <p:cNvPr id="3" name="그림 2"/>
-          <p:cNvPicPr>
-            <a:picLocks noChangeAspect="1"/>
-          </p:cNvPicPr>
-          <p:nvPr/>
-        </p:nvPicPr>
-        <p:blipFill>
-          <a:blip r:embed="rId5"/>
-          <a:stretch>
-            <a:fillRect/>
-          </a:stretch>
-        </p:blipFill>
-        <p:spPr>
-          <a:xfrm>
-            <a:off x="656405" y="4332329"/>
-            <a:ext cx="3801005" cy="1863350"/>
-          </a:xfrm>
-          <a:prstGeom prst="rect">
-            <a:avLst/>
-          </a:prstGeom>
-        </p:spPr>
-      </p:pic>
-      <p:pic>
-        <p:nvPicPr>
-          <p:cNvPr id="6" name="그림 5"/>
-          <p:cNvPicPr>
-            <a:picLocks noChangeAspect="1"/>
-          </p:cNvPicPr>
-          <p:nvPr/>
-        </p:nvPicPr>
-        <p:blipFill>
-          <a:blip r:embed="rId6"/>
-          <a:stretch>
-            <a:fillRect/>
-          </a:stretch>
-        </p:blipFill>
-        <p:spPr>
-          <a:xfrm>
-            <a:off x="5161177" y="4220871"/>
-            <a:ext cx="4183964" cy="2086266"/>
+            <a:off x="813880" y="385493"/>
+            <a:ext cx="7268589" cy="3858163"/>
           </a:xfrm>
           <a:prstGeom prst="rect">
             <a:avLst/>
@@ -3531,7 +3523,7 @@
     </p:spTree>
     <p:extLst>
       <p:ext uri="{BB962C8B-B14F-4D97-AF65-F5344CB8AC3E}">
-        <p14:creationId xmlns:p14="http://schemas.microsoft.com/office/powerpoint/2010/main" val="2672974803"/>
+        <p14:creationId xmlns:p14="http://schemas.microsoft.com/office/powerpoint/2010/main" val="2668780768"/>
       </p:ext>
     </p:extLst>
   </p:cSld>
@@ -3574,6 +3566,156 @@
         </p:blipFill>
         <p:spPr>
           <a:xfrm>
+            <a:off x="656405" y="419195"/>
+            <a:ext cx="3086531" cy="1960519"/>
+          </a:xfrm>
+          <a:prstGeom prst="rect">
+            <a:avLst/>
+          </a:prstGeom>
+        </p:spPr>
+      </p:pic>
+      <p:pic>
+        <p:nvPicPr>
+          <p:cNvPr id="5" name="그림 4"/>
+          <p:cNvPicPr>
+            <a:picLocks noChangeAspect="1"/>
+          </p:cNvPicPr>
+          <p:nvPr/>
+        </p:nvPicPr>
+        <p:blipFill>
+          <a:blip r:embed="rId3"/>
+          <a:stretch>
+            <a:fillRect/>
+          </a:stretch>
+        </p:blipFill>
+        <p:spPr>
+          <a:xfrm>
+            <a:off x="656405" y="2630478"/>
+            <a:ext cx="7182852" cy="1171739"/>
+          </a:xfrm>
+          <a:prstGeom prst="rect">
+            <a:avLst/>
+          </a:prstGeom>
+        </p:spPr>
+      </p:pic>
+      <p:pic>
+        <p:nvPicPr>
+          <p:cNvPr id="2" name="그림 1"/>
+          <p:cNvPicPr>
+            <a:picLocks noChangeAspect="1"/>
+          </p:cNvPicPr>
+          <p:nvPr/>
+        </p:nvPicPr>
+        <p:blipFill>
+          <a:blip r:embed="rId4"/>
+          <a:stretch>
+            <a:fillRect/>
+          </a:stretch>
+        </p:blipFill>
+        <p:spPr>
+          <a:xfrm>
+            <a:off x="4156895" y="251531"/>
+            <a:ext cx="4212543" cy="1377507"/>
+          </a:xfrm>
+          <a:prstGeom prst="rect">
+            <a:avLst/>
+          </a:prstGeom>
+        </p:spPr>
+      </p:pic>
+      <p:pic>
+        <p:nvPicPr>
+          <p:cNvPr id="3" name="그림 2"/>
+          <p:cNvPicPr>
+            <a:picLocks noChangeAspect="1"/>
+          </p:cNvPicPr>
+          <p:nvPr/>
+        </p:nvPicPr>
+        <p:blipFill>
+          <a:blip r:embed="rId5"/>
+          <a:stretch>
+            <a:fillRect/>
+          </a:stretch>
+        </p:blipFill>
+        <p:spPr>
+          <a:xfrm>
+            <a:off x="656405" y="4332329"/>
+            <a:ext cx="3801005" cy="1863350"/>
+          </a:xfrm>
+          <a:prstGeom prst="rect">
+            <a:avLst/>
+          </a:prstGeom>
+        </p:spPr>
+      </p:pic>
+      <p:pic>
+        <p:nvPicPr>
+          <p:cNvPr id="6" name="그림 5"/>
+          <p:cNvPicPr>
+            <a:picLocks noChangeAspect="1"/>
+          </p:cNvPicPr>
+          <p:nvPr/>
+        </p:nvPicPr>
+        <p:blipFill>
+          <a:blip r:embed="rId6"/>
+          <a:stretch>
+            <a:fillRect/>
+          </a:stretch>
+        </p:blipFill>
+        <p:spPr>
+          <a:xfrm>
+            <a:off x="5161177" y="4220871"/>
+            <a:ext cx="4183964" cy="2086266"/>
+          </a:xfrm>
+          <a:prstGeom prst="rect">
+            <a:avLst/>
+          </a:prstGeom>
+        </p:spPr>
+      </p:pic>
+    </p:spTree>
+    <p:extLst>
+      <p:ext uri="{BB962C8B-B14F-4D97-AF65-F5344CB8AC3E}">
+        <p14:creationId xmlns:p14="http://schemas.microsoft.com/office/powerpoint/2010/main" val="2672974803"/>
+      </p:ext>
+    </p:extLst>
+  </p:cSld>
+  <p:clrMapOvr>
+    <a:masterClrMapping/>
+  </p:clrMapOvr>
+</p:sld>
+</file>
+
+<file path=ppt/slides/slide15.xml><?xml version="1.0" encoding="utf-8"?>
+<p:sld xmlns:a="http://schemas.openxmlformats.org/drawingml/2006/main" xmlns:r="http://schemas.openxmlformats.org/officeDocument/2006/relationships" xmlns:p="http://schemas.openxmlformats.org/presentationml/2006/main">
+  <p:cSld>
+    <p:spTree>
+      <p:nvGrpSpPr>
+        <p:cNvPr id="1" name=""/>
+        <p:cNvGrpSpPr/>
+        <p:nvPr/>
+      </p:nvGrpSpPr>
+      <p:grpSpPr>
+        <a:xfrm>
+          <a:off x="0" y="0"/>
+          <a:ext cx="0" cy="0"/>
+          <a:chOff x="0" y="0"/>
+          <a:chExt cx="0" cy="0"/>
+        </a:xfrm>
+      </p:grpSpPr>
+      <p:pic>
+        <p:nvPicPr>
+          <p:cNvPr id="4" name="그림 3"/>
+          <p:cNvPicPr>
+            <a:picLocks noChangeAspect="1"/>
+          </p:cNvPicPr>
+          <p:nvPr/>
+        </p:nvPicPr>
+        <p:blipFill>
+          <a:blip r:embed="rId2"/>
+          <a:stretch>
+            <a:fillRect/>
+          </a:stretch>
+        </p:blipFill>
+        <p:spPr>
+          <a:xfrm>
             <a:off x="264100" y="165653"/>
             <a:ext cx="3663826" cy="2126277"/>
           </a:xfrm>
@@ -3614,6 +3756,96 @@
       </p:grpSpPr>
       <p:pic>
         <p:nvPicPr>
+          <p:cNvPr id="4" name="그림 3">
+            <a:extLst>
+              <a:ext uri="{FF2B5EF4-FFF2-40B4-BE49-F238E27FC236}">
+                <a16:creationId xmlns:a16="http://schemas.microsoft.com/office/drawing/2014/main" id="{4806CDF6-C5BE-4C06-8605-F9E0EB5138C2}"/>
+              </a:ext>
+            </a:extLst>
+          </p:cNvPr>
+          <p:cNvPicPr>
+            <a:picLocks noChangeAspect="1"/>
+          </p:cNvPicPr>
+          <p:nvPr/>
+        </p:nvPicPr>
+        <p:blipFill>
+          <a:blip r:embed="rId2"/>
+          <a:stretch>
+            <a:fillRect/>
+          </a:stretch>
+        </p:blipFill>
+        <p:spPr>
+          <a:xfrm>
+            <a:off x="272648" y="342788"/>
+            <a:ext cx="5753903" cy="1600423"/>
+          </a:xfrm>
+          <a:prstGeom prst="rect">
+            <a:avLst/>
+          </a:prstGeom>
+        </p:spPr>
+      </p:pic>
+      <p:pic>
+        <p:nvPicPr>
+          <p:cNvPr id="5" name="그림 4">
+            <a:extLst>
+              <a:ext uri="{FF2B5EF4-FFF2-40B4-BE49-F238E27FC236}">
+                <a16:creationId xmlns:a16="http://schemas.microsoft.com/office/drawing/2014/main" id="{4121193D-8D68-4F94-8F36-9A63521F499D}"/>
+              </a:ext>
+            </a:extLst>
+          </p:cNvPr>
+          <p:cNvPicPr>
+            <a:picLocks noChangeAspect="1"/>
+          </p:cNvPicPr>
+          <p:nvPr/>
+        </p:nvPicPr>
+        <p:blipFill>
+          <a:blip r:embed="rId3"/>
+          <a:stretch>
+            <a:fillRect/>
+          </a:stretch>
+        </p:blipFill>
+        <p:spPr>
+          <a:xfrm>
+            <a:off x="196437" y="2077352"/>
+            <a:ext cx="5830114" cy="2229161"/>
+          </a:xfrm>
+          <a:prstGeom prst="rect">
+            <a:avLst/>
+          </a:prstGeom>
+        </p:spPr>
+      </p:pic>
+    </p:spTree>
+    <p:extLst>
+      <p:ext uri="{BB962C8B-B14F-4D97-AF65-F5344CB8AC3E}">
+        <p14:creationId xmlns:p14="http://schemas.microsoft.com/office/powerpoint/2010/main" val="984604362"/>
+      </p:ext>
+    </p:extLst>
+  </p:cSld>
+  <p:clrMapOvr>
+    <a:masterClrMapping/>
+  </p:clrMapOvr>
+</p:sld>
+</file>
+
+<file path=ppt/slides/slide3.xml><?xml version="1.0" encoding="utf-8"?>
+<p:sld xmlns:a="http://schemas.openxmlformats.org/drawingml/2006/main" xmlns:r="http://schemas.openxmlformats.org/officeDocument/2006/relationships" xmlns:p="http://schemas.openxmlformats.org/presentationml/2006/main">
+  <p:cSld>
+    <p:spTree>
+      <p:nvGrpSpPr>
+        <p:cNvPr id="1" name=""/>
+        <p:cNvGrpSpPr/>
+        <p:nvPr/>
+      </p:nvGrpSpPr>
+      <p:grpSpPr>
+        <a:xfrm>
+          <a:off x="0" y="0"/>
+          <a:ext cx="0" cy="0"/>
+          <a:chOff x="0" y="0"/>
+          <a:chExt cx="0" cy="0"/>
+        </a:xfrm>
+      </p:grpSpPr>
+      <p:pic>
+        <p:nvPicPr>
           <p:cNvPr id="4" name="그림 3"/>
           <p:cNvPicPr>
             <a:picLocks noChangeAspect="1"/>
@@ -3709,7 +3941,7 @@
 </p:sld>
 </file>
 
-<file path=ppt/slides/slide3.xml><?xml version="1.0" encoding="utf-8"?>
+<file path=ppt/slides/slide4.xml><?xml version="1.0" encoding="utf-8"?>
 <p:sld xmlns:a="http://schemas.openxmlformats.org/drawingml/2006/main" xmlns:r="http://schemas.openxmlformats.org/officeDocument/2006/relationships" xmlns:p="http://schemas.openxmlformats.org/presentationml/2006/main">
   <p:cSld>
     <p:spTree>
@@ -3820,108 +4052,6 @@
     <p:extLst>
       <p:ext uri="{BB962C8B-B14F-4D97-AF65-F5344CB8AC3E}">
         <p14:creationId xmlns:p14="http://schemas.microsoft.com/office/powerpoint/2010/main" val="3011048765"/>
-      </p:ext>
-    </p:extLst>
-  </p:cSld>
-  <p:clrMapOvr>
-    <a:masterClrMapping/>
-  </p:clrMapOvr>
-</p:sld>
-</file>
-
-<file path=ppt/slides/slide4.xml><?xml version="1.0" encoding="utf-8"?>
-<p:sld xmlns:a="http://schemas.openxmlformats.org/drawingml/2006/main" xmlns:r="http://schemas.openxmlformats.org/officeDocument/2006/relationships" xmlns:p="http://schemas.openxmlformats.org/presentationml/2006/main">
-  <p:cSld>
-    <p:spTree>
-      <p:nvGrpSpPr>
-        <p:cNvPr id="1" name=""/>
-        <p:cNvGrpSpPr/>
-        <p:nvPr/>
-      </p:nvGrpSpPr>
-      <p:grpSpPr>
-        <a:xfrm>
-          <a:off x="0" y="0"/>
-          <a:ext cx="0" cy="0"/>
-          <a:chOff x="0" y="0"/>
-          <a:chExt cx="0" cy="0"/>
-        </a:xfrm>
-      </p:grpSpPr>
-      <p:pic>
-        <p:nvPicPr>
-          <p:cNvPr id="4" name="그림 3"/>
-          <p:cNvPicPr>
-            <a:picLocks noChangeAspect="1"/>
-          </p:cNvPicPr>
-          <p:nvPr/>
-        </p:nvPicPr>
-        <p:blipFill>
-          <a:blip r:embed="rId2"/>
-          <a:stretch>
-            <a:fillRect/>
-          </a:stretch>
-        </p:blipFill>
-        <p:spPr>
-          <a:xfrm>
-            <a:off x="460967" y="230838"/>
-            <a:ext cx="6973273" cy="3715268"/>
-          </a:xfrm>
-          <a:prstGeom prst="rect">
-            <a:avLst/>
-          </a:prstGeom>
-        </p:spPr>
-      </p:pic>
-      <p:pic>
-        <p:nvPicPr>
-          <p:cNvPr id="5" name="그림 4"/>
-          <p:cNvPicPr>
-            <a:picLocks noChangeAspect="1"/>
-          </p:cNvPicPr>
-          <p:nvPr/>
-        </p:nvPicPr>
-        <p:blipFill>
-          <a:blip r:embed="rId3"/>
-          <a:stretch>
-            <a:fillRect/>
-          </a:stretch>
-        </p:blipFill>
-        <p:spPr>
-          <a:xfrm>
-            <a:off x="345558" y="3294244"/>
-            <a:ext cx="6973273" cy="2915057"/>
-          </a:xfrm>
-          <a:prstGeom prst="rect">
-            <a:avLst/>
-          </a:prstGeom>
-        </p:spPr>
-      </p:pic>
-      <p:pic>
-        <p:nvPicPr>
-          <p:cNvPr id="6" name="그림 5"/>
-          <p:cNvPicPr>
-            <a:picLocks noChangeAspect="1"/>
-          </p:cNvPicPr>
-          <p:nvPr/>
-        </p:nvPicPr>
-        <p:blipFill>
-          <a:blip r:embed="rId4"/>
-          <a:stretch>
-            <a:fillRect/>
-          </a:stretch>
-        </p:blipFill>
-        <p:spPr>
-          <a:xfrm>
-            <a:off x="2537916" y="1571366"/>
-            <a:ext cx="7116168" cy="3715268"/>
-          </a:xfrm>
-          <a:prstGeom prst="rect">
-            <a:avLst/>
-          </a:prstGeom>
-        </p:spPr>
-      </p:pic>
-    </p:spTree>
-    <p:extLst>
-      <p:ext uri="{BB962C8B-B14F-4D97-AF65-F5344CB8AC3E}">
-        <p14:creationId xmlns:p14="http://schemas.microsoft.com/office/powerpoint/2010/main" val="2005913688"/>
       </p:ext>
     </p:extLst>
   </p:cSld>
@@ -3964,8 +4094,8 @@
         </p:blipFill>
         <p:spPr>
           <a:xfrm>
-            <a:off x="177975" y="246068"/>
-            <a:ext cx="7201905" cy="790685"/>
+            <a:off x="460967" y="230838"/>
+            <a:ext cx="6973273" cy="3715268"/>
           </a:xfrm>
           <a:prstGeom prst="rect">
             <a:avLst/>
@@ -3988,8 +4118,8 @@
         </p:blipFill>
         <p:spPr>
           <a:xfrm>
-            <a:off x="539773" y="1179285"/>
-            <a:ext cx="6744641" cy="4801270"/>
+            <a:off x="345558" y="3294244"/>
+            <a:ext cx="6973273" cy="2915057"/>
           </a:xfrm>
           <a:prstGeom prst="rect">
             <a:avLst/>
@@ -3998,7 +4128,7 @@
       </p:pic>
       <p:pic>
         <p:nvPicPr>
-          <p:cNvPr id="2" name="그림 1"/>
+          <p:cNvPr id="6" name="그림 5"/>
           <p:cNvPicPr>
             <a:picLocks noChangeAspect="1"/>
           </p:cNvPicPr>
@@ -4012,32 +4142,8 @@
         </p:blipFill>
         <p:spPr>
           <a:xfrm>
-            <a:off x="5711524" y="246068"/>
-            <a:ext cx="6077798" cy="2181529"/>
-          </a:xfrm>
-          <a:prstGeom prst="rect">
-            <a:avLst/>
-          </a:prstGeom>
-        </p:spPr>
-      </p:pic>
-      <p:pic>
-        <p:nvPicPr>
-          <p:cNvPr id="3" name="그림 2"/>
-          <p:cNvPicPr>
-            <a:picLocks noChangeAspect="1"/>
-          </p:cNvPicPr>
-          <p:nvPr/>
-        </p:nvPicPr>
-        <p:blipFill>
-          <a:blip r:embed="rId5"/>
-          <a:stretch>
-            <a:fillRect/>
-          </a:stretch>
-        </p:blipFill>
-        <p:spPr>
-          <a:xfrm>
-            <a:off x="3171417" y="2019103"/>
-            <a:ext cx="5849166" cy="2819794"/>
+            <a:off x="2537916" y="1571366"/>
+            <a:ext cx="7116168" cy="3715268"/>
           </a:xfrm>
           <a:prstGeom prst="rect">
             <a:avLst/>
@@ -4047,7 +4153,7 @@
     </p:spTree>
     <p:extLst>
       <p:ext uri="{BB962C8B-B14F-4D97-AF65-F5344CB8AC3E}">
-        <p14:creationId xmlns:p14="http://schemas.microsoft.com/office/powerpoint/2010/main" val="1321305327"/>
+        <p14:creationId xmlns:p14="http://schemas.microsoft.com/office/powerpoint/2010/main" val="2005913688"/>
       </p:ext>
     </p:extLst>
   </p:cSld>
@@ -4090,8 +4196,8 @@
         </p:blipFill>
         <p:spPr>
           <a:xfrm>
-            <a:off x="513362" y="338928"/>
-            <a:ext cx="6868484" cy="4582164"/>
+            <a:off x="177975" y="246068"/>
+            <a:ext cx="7201905" cy="790685"/>
           </a:xfrm>
           <a:prstGeom prst="rect">
             <a:avLst/>
@@ -4114,6 +4220,132 @@
         </p:blipFill>
         <p:spPr>
           <a:xfrm>
+            <a:off x="539773" y="1179285"/>
+            <a:ext cx="6744641" cy="4801270"/>
+          </a:xfrm>
+          <a:prstGeom prst="rect">
+            <a:avLst/>
+          </a:prstGeom>
+        </p:spPr>
+      </p:pic>
+      <p:pic>
+        <p:nvPicPr>
+          <p:cNvPr id="2" name="그림 1"/>
+          <p:cNvPicPr>
+            <a:picLocks noChangeAspect="1"/>
+          </p:cNvPicPr>
+          <p:nvPr/>
+        </p:nvPicPr>
+        <p:blipFill>
+          <a:blip r:embed="rId4"/>
+          <a:stretch>
+            <a:fillRect/>
+          </a:stretch>
+        </p:blipFill>
+        <p:spPr>
+          <a:xfrm>
+            <a:off x="5711524" y="246068"/>
+            <a:ext cx="6077798" cy="2181529"/>
+          </a:xfrm>
+          <a:prstGeom prst="rect">
+            <a:avLst/>
+          </a:prstGeom>
+        </p:spPr>
+      </p:pic>
+      <p:pic>
+        <p:nvPicPr>
+          <p:cNvPr id="3" name="그림 2"/>
+          <p:cNvPicPr>
+            <a:picLocks noChangeAspect="1"/>
+          </p:cNvPicPr>
+          <p:nvPr/>
+        </p:nvPicPr>
+        <p:blipFill>
+          <a:blip r:embed="rId5"/>
+          <a:stretch>
+            <a:fillRect/>
+          </a:stretch>
+        </p:blipFill>
+        <p:spPr>
+          <a:xfrm>
+            <a:off x="3171417" y="2019103"/>
+            <a:ext cx="5849166" cy="2819794"/>
+          </a:xfrm>
+          <a:prstGeom prst="rect">
+            <a:avLst/>
+          </a:prstGeom>
+        </p:spPr>
+      </p:pic>
+    </p:spTree>
+    <p:extLst>
+      <p:ext uri="{BB962C8B-B14F-4D97-AF65-F5344CB8AC3E}">
+        <p14:creationId xmlns:p14="http://schemas.microsoft.com/office/powerpoint/2010/main" val="1321305327"/>
+      </p:ext>
+    </p:extLst>
+  </p:cSld>
+  <p:clrMapOvr>
+    <a:masterClrMapping/>
+  </p:clrMapOvr>
+</p:sld>
+</file>
+
+<file path=ppt/slides/slide7.xml><?xml version="1.0" encoding="utf-8"?>
+<p:sld xmlns:a="http://schemas.openxmlformats.org/drawingml/2006/main" xmlns:r="http://schemas.openxmlformats.org/officeDocument/2006/relationships" xmlns:p="http://schemas.openxmlformats.org/presentationml/2006/main">
+  <p:cSld>
+    <p:spTree>
+      <p:nvGrpSpPr>
+        <p:cNvPr id="1" name=""/>
+        <p:cNvGrpSpPr/>
+        <p:nvPr/>
+      </p:nvGrpSpPr>
+      <p:grpSpPr>
+        <a:xfrm>
+          <a:off x="0" y="0"/>
+          <a:ext cx="0" cy="0"/>
+          <a:chOff x="0" y="0"/>
+          <a:chExt cx="0" cy="0"/>
+        </a:xfrm>
+      </p:grpSpPr>
+      <p:pic>
+        <p:nvPicPr>
+          <p:cNvPr id="4" name="그림 3"/>
+          <p:cNvPicPr>
+            <a:picLocks noChangeAspect="1"/>
+          </p:cNvPicPr>
+          <p:nvPr/>
+        </p:nvPicPr>
+        <p:blipFill>
+          <a:blip r:embed="rId2"/>
+          <a:stretch>
+            <a:fillRect/>
+          </a:stretch>
+        </p:blipFill>
+        <p:spPr>
+          <a:xfrm>
+            <a:off x="513362" y="338928"/>
+            <a:ext cx="6868484" cy="4582164"/>
+          </a:xfrm>
+          <a:prstGeom prst="rect">
+            <a:avLst/>
+          </a:prstGeom>
+        </p:spPr>
+      </p:pic>
+      <p:pic>
+        <p:nvPicPr>
+          <p:cNvPr id="5" name="그림 4"/>
+          <p:cNvPicPr>
+            <a:picLocks noChangeAspect="1"/>
+          </p:cNvPicPr>
+          <p:nvPr/>
+        </p:nvPicPr>
+        <p:blipFill>
+          <a:blip r:embed="rId3"/>
+          <a:stretch>
+            <a:fillRect/>
+          </a:stretch>
+        </p:blipFill>
+        <p:spPr>
+          <a:xfrm>
             <a:off x="8215079" y="338928"/>
             <a:ext cx="2686425" cy="1724266"/>
           </a:xfrm>
@@ -4135,7 +4367,7 @@
 </p:sld>
 </file>
 
-<file path=ppt/slides/slide7.xml><?xml version="1.0" encoding="utf-8"?>
+<file path=ppt/slides/slide8.xml><?xml version="1.0" encoding="utf-8"?>
 <p:sld xmlns:a="http://schemas.openxmlformats.org/drawingml/2006/main" xmlns:r="http://schemas.openxmlformats.org/officeDocument/2006/relationships" xmlns:p="http://schemas.openxmlformats.org/presentationml/2006/main">
   <p:cSld>
     <p:spTree>
@@ -4204,108 +4436,6 @@
     <p:extLst>
       <p:ext uri="{BB962C8B-B14F-4D97-AF65-F5344CB8AC3E}">
         <p14:creationId xmlns:p14="http://schemas.microsoft.com/office/powerpoint/2010/main" val="2656977250"/>
-      </p:ext>
-    </p:extLst>
-  </p:cSld>
-  <p:clrMapOvr>
-    <a:masterClrMapping/>
-  </p:clrMapOvr>
-</p:sld>
-</file>
-
-<file path=ppt/slides/slide8.xml><?xml version="1.0" encoding="utf-8"?>
-<p:sld xmlns:a="http://schemas.openxmlformats.org/drawingml/2006/main" xmlns:r="http://schemas.openxmlformats.org/officeDocument/2006/relationships" xmlns:p="http://schemas.openxmlformats.org/presentationml/2006/main">
-  <p:cSld>
-    <p:spTree>
-      <p:nvGrpSpPr>
-        <p:cNvPr id="1" name=""/>
-        <p:cNvGrpSpPr/>
-        <p:nvPr/>
-      </p:nvGrpSpPr>
-      <p:grpSpPr>
-        <a:xfrm>
-          <a:off x="0" y="0"/>
-          <a:ext cx="0" cy="0"/>
-          <a:chOff x="0" y="0"/>
-          <a:chExt cx="0" cy="0"/>
-        </a:xfrm>
-      </p:grpSpPr>
-      <p:pic>
-        <p:nvPicPr>
-          <p:cNvPr id="4" name="그림 3"/>
-          <p:cNvPicPr>
-            <a:picLocks noChangeAspect="1"/>
-          </p:cNvPicPr>
-          <p:nvPr/>
-        </p:nvPicPr>
-        <p:blipFill>
-          <a:blip r:embed="rId2"/>
-          <a:stretch>
-            <a:fillRect/>
-          </a:stretch>
-        </p:blipFill>
-        <p:spPr>
-          <a:xfrm>
-            <a:off x="655793" y="311328"/>
-            <a:ext cx="5944430" cy="2524477"/>
-          </a:xfrm>
-          <a:prstGeom prst="rect">
-            <a:avLst/>
-          </a:prstGeom>
-        </p:spPr>
-      </p:pic>
-      <p:pic>
-        <p:nvPicPr>
-          <p:cNvPr id="5" name="그림 4"/>
-          <p:cNvPicPr>
-            <a:picLocks noChangeAspect="1"/>
-          </p:cNvPicPr>
-          <p:nvPr/>
-        </p:nvPicPr>
-        <p:blipFill>
-          <a:blip r:embed="rId3"/>
-          <a:stretch>
-            <a:fillRect/>
-          </a:stretch>
-        </p:blipFill>
-        <p:spPr>
-          <a:xfrm>
-            <a:off x="543627" y="3097193"/>
-            <a:ext cx="5849166" cy="2705478"/>
-          </a:xfrm>
-          <a:prstGeom prst="rect">
-            <a:avLst/>
-          </a:prstGeom>
-        </p:spPr>
-      </p:pic>
-      <p:pic>
-        <p:nvPicPr>
-          <p:cNvPr id="2" name="그림 1"/>
-          <p:cNvPicPr>
-            <a:picLocks noChangeAspect="1"/>
-          </p:cNvPicPr>
-          <p:nvPr/>
-        </p:nvPicPr>
-        <p:blipFill>
-          <a:blip r:embed="rId4"/>
-          <a:stretch>
-            <a:fillRect/>
-          </a:stretch>
-        </p:blipFill>
-        <p:spPr>
-          <a:xfrm>
-            <a:off x="5565050" y="454222"/>
-            <a:ext cx="5839640" cy="2238687"/>
-          </a:xfrm>
-          <a:prstGeom prst="rect">
-            <a:avLst/>
-          </a:prstGeom>
-        </p:spPr>
-      </p:pic>
-    </p:spTree>
-    <p:extLst>
-      <p:ext uri="{BB962C8B-B14F-4D97-AF65-F5344CB8AC3E}">
-        <p14:creationId xmlns:p14="http://schemas.microsoft.com/office/powerpoint/2010/main" val="887493065"/>
       </p:ext>
     </p:extLst>
   </p:cSld>
@@ -4348,8 +4478,8 @@
         </p:blipFill>
         <p:spPr>
           <a:xfrm>
-            <a:off x="280392" y="278487"/>
-            <a:ext cx="4315427" cy="2406351"/>
+            <a:off x="655793" y="311328"/>
+            <a:ext cx="5944430" cy="2524477"/>
           </a:xfrm>
           <a:prstGeom prst="rect">
             <a:avLst/>
@@ -4372,71 +4502,32 @@
         </p:blipFill>
         <p:spPr>
           <a:xfrm>
-            <a:off x="5312126" y="373818"/>
-            <a:ext cx="3326594" cy="2709288"/>
+            <a:off x="543627" y="3097193"/>
+            <a:ext cx="5849166" cy="2705478"/>
           </a:xfrm>
           <a:prstGeom prst="rect">
             <a:avLst/>
           </a:prstGeom>
         </p:spPr>
       </p:pic>
-      <p:sp>
-        <p:nvSpPr>
-          <p:cNvPr id="2" name="직사각형 1"/>
-          <p:cNvSpPr/>
-          <p:nvPr/>
-        </p:nvSpPr>
-        <p:spPr>
-          <a:xfrm>
-            <a:off x="4167427" y="3244334"/>
-            <a:ext cx="3857146" cy="369332"/>
-          </a:xfrm>
-          <a:prstGeom prst="rect">
-            <a:avLst/>
-          </a:prstGeom>
-        </p:spPr>
-        <p:txBody>
-          <a:bodyPr wrap="none">
-            <a:spAutoFit/>
-          </a:bodyPr>
-          <a:lstStyle/>
-          <a:p>
-            <a:r>
-              <a:rPr lang="en-US" altLang="ko-KR" dirty="0">
-                <a:solidFill>
-                  <a:srgbClr val="CCCCCC"/>
-                </a:solidFill>
-                <a:latin typeface="Consolas" panose="020B0609020204030204" pitchFamily="49" charset="0"/>
-              </a:rPr>
-              <a:t>03_04_bertviz_neuron_view.png</a:t>
-            </a:r>
-            <a:endParaRPr lang="en-US" altLang="ko-KR" b="0" dirty="0">
-              <a:solidFill>
-                <a:srgbClr val="CCCCCC"/>
-              </a:solidFill>
-              <a:effectLst/>
-              <a:latin typeface="Consolas" panose="020B0609020204030204" pitchFamily="49" charset="0"/>
-            </a:endParaRPr>
-          </a:p>
-        </p:txBody>
-      </p:sp>
       <p:pic>
         <p:nvPicPr>
-          <p:cNvPr id="3" name="그림 2"/>
+          <p:cNvPr id="2" name="그림 1"/>
           <p:cNvPicPr>
             <a:picLocks noChangeAspect="1"/>
           </p:cNvPicPr>
           <p:nvPr/>
         </p:nvPicPr>
-        <p:blipFill rotWithShape="1">
+        <p:blipFill>
           <a:blip r:embed="rId4"/>
-          <a:srcRect t="14277"/>
-          <a:stretch/>
+          <a:stretch>
+            <a:fillRect/>
+          </a:stretch>
         </p:blipFill>
         <p:spPr>
           <a:xfrm>
-            <a:off x="1185915" y="3879541"/>
-            <a:ext cx="7192379" cy="2327387"/>
+            <a:off x="5565050" y="454222"/>
+            <a:ext cx="5839640" cy="2238687"/>
           </a:xfrm>
           <a:prstGeom prst="rect">
             <a:avLst/>
@@ -4446,7 +4537,7 @@
     </p:spTree>
     <p:extLst>
       <p:ext uri="{BB962C8B-B14F-4D97-AF65-F5344CB8AC3E}">
-        <p14:creationId xmlns:p14="http://schemas.microsoft.com/office/powerpoint/2010/main" val="4024031726"/>
+        <p14:creationId xmlns:p14="http://schemas.microsoft.com/office/powerpoint/2010/main" val="887493065"/>
       </p:ext>
     </p:extLst>
   </p:cSld>

--- a/image/이미지 생성용.pptx
+++ b/image/이미지 생성용.pptx
@@ -6,20 +6,21 @@
   </p:sldMasterIdLst>
   <p:sldIdLst>
     <p:sldId id="256" r:id="rId2"/>
-    <p:sldId id="270" r:id="rId3"/>
-    <p:sldId id="268" r:id="rId4"/>
-    <p:sldId id="269" r:id="rId5"/>
-    <p:sldId id="267" r:id="rId6"/>
-    <p:sldId id="265" r:id="rId7"/>
-    <p:sldId id="266" r:id="rId8"/>
-    <p:sldId id="264" r:id="rId9"/>
-    <p:sldId id="263" r:id="rId10"/>
-    <p:sldId id="261" r:id="rId11"/>
-    <p:sldId id="262" r:id="rId12"/>
-    <p:sldId id="257" r:id="rId13"/>
-    <p:sldId id="258" r:id="rId14"/>
-    <p:sldId id="259" r:id="rId15"/>
-    <p:sldId id="260" r:id="rId16"/>
+    <p:sldId id="271" r:id="rId3"/>
+    <p:sldId id="270" r:id="rId4"/>
+    <p:sldId id="268" r:id="rId5"/>
+    <p:sldId id="269" r:id="rId6"/>
+    <p:sldId id="267" r:id="rId7"/>
+    <p:sldId id="265" r:id="rId8"/>
+    <p:sldId id="266" r:id="rId9"/>
+    <p:sldId id="264" r:id="rId10"/>
+    <p:sldId id="263" r:id="rId11"/>
+    <p:sldId id="261" r:id="rId12"/>
+    <p:sldId id="262" r:id="rId13"/>
+    <p:sldId id="257" r:id="rId14"/>
+    <p:sldId id="258" r:id="rId15"/>
+    <p:sldId id="259" r:id="rId16"/>
+    <p:sldId id="260" r:id="rId17"/>
   </p:sldIdLst>
   <p:sldSz cx="12192000" cy="6858000"/>
   <p:notesSz cx="6858000" cy="9144000"/>
@@ -255,7 +256,7 @@
           <a:p>
             <a:fld id="{F0CD9246-440E-46C2-946E-50CD81230ED2}" type="datetimeFigureOut">
               <a:rPr lang="ko-KR" altLang="en-US" smtClean="0"/>
-              <a:t>2026-02-06</a:t>
+              <a:t>2026-02-07</a:t>
             </a:fld>
             <a:endParaRPr lang="ko-KR" altLang="en-US"/>
           </a:p>
@@ -423,7 +424,7 @@
           <a:p>
             <a:fld id="{F0CD9246-440E-46C2-946E-50CD81230ED2}" type="datetimeFigureOut">
               <a:rPr lang="ko-KR" altLang="en-US" smtClean="0"/>
-              <a:t>2026-02-06</a:t>
+              <a:t>2026-02-07</a:t>
             </a:fld>
             <a:endParaRPr lang="ko-KR" altLang="en-US"/>
           </a:p>
@@ -601,7 +602,7 @@
           <a:p>
             <a:fld id="{F0CD9246-440E-46C2-946E-50CD81230ED2}" type="datetimeFigureOut">
               <a:rPr lang="ko-KR" altLang="en-US" smtClean="0"/>
-              <a:t>2026-02-06</a:t>
+              <a:t>2026-02-07</a:t>
             </a:fld>
             <a:endParaRPr lang="ko-KR" altLang="en-US"/>
           </a:p>
@@ -769,7 +770,7 @@
           <a:p>
             <a:fld id="{F0CD9246-440E-46C2-946E-50CD81230ED2}" type="datetimeFigureOut">
               <a:rPr lang="ko-KR" altLang="en-US" smtClean="0"/>
-              <a:t>2026-02-06</a:t>
+              <a:t>2026-02-07</a:t>
             </a:fld>
             <a:endParaRPr lang="ko-KR" altLang="en-US"/>
           </a:p>
@@ -1014,7 +1015,7 @@
           <a:p>
             <a:fld id="{F0CD9246-440E-46C2-946E-50CD81230ED2}" type="datetimeFigureOut">
               <a:rPr lang="ko-KR" altLang="en-US" smtClean="0"/>
-              <a:t>2026-02-06</a:t>
+              <a:t>2026-02-07</a:t>
             </a:fld>
             <a:endParaRPr lang="ko-KR" altLang="en-US"/>
           </a:p>
@@ -1243,7 +1244,7 @@
           <a:p>
             <a:fld id="{F0CD9246-440E-46C2-946E-50CD81230ED2}" type="datetimeFigureOut">
               <a:rPr lang="ko-KR" altLang="en-US" smtClean="0"/>
-              <a:t>2026-02-06</a:t>
+              <a:t>2026-02-07</a:t>
             </a:fld>
             <a:endParaRPr lang="ko-KR" altLang="en-US"/>
           </a:p>
@@ -1607,7 +1608,7 @@
           <a:p>
             <a:fld id="{F0CD9246-440E-46C2-946E-50CD81230ED2}" type="datetimeFigureOut">
               <a:rPr lang="ko-KR" altLang="en-US" smtClean="0"/>
-              <a:t>2026-02-06</a:t>
+              <a:t>2026-02-07</a:t>
             </a:fld>
             <a:endParaRPr lang="ko-KR" altLang="en-US"/>
           </a:p>
@@ -1724,7 +1725,7 @@
           <a:p>
             <a:fld id="{F0CD9246-440E-46C2-946E-50CD81230ED2}" type="datetimeFigureOut">
               <a:rPr lang="ko-KR" altLang="en-US" smtClean="0"/>
-              <a:t>2026-02-06</a:t>
+              <a:t>2026-02-07</a:t>
             </a:fld>
             <a:endParaRPr lang="ko-KR" altLang="en-US"/>
           </a:p>
@@ -1819,7 +1820,7 @@
           <a:p>
             <a:fld id="{F0CD9246-440E-46C2-946E-50CD81230ED2}" type="datetimeFigureOut">
               <a:rPr lang="ko-KR" altLang="en-US" smtClean="0"/>
-              <a:t>2026-02-06</a:t>
+              <a:t>2026-02-07</a:t>
             </a:fld>
             <a:endParaRPr lang="ko-KR" altLang="en-US"/>
           </a:p>
@@ -2094,7 +2095,7 @@
           <a:p>
             <a:fld id="{F0CD9246-440E-46C2-946E-50CD81230ED2}" type="datetimeFigureOut">
               <a:rPr lang="ko-KR" altLang="en-US" smtClean="0"/>
-              <a:t>2026-02-06</a:t>
+              <a:t>2026-02-07</a:t>
             </a:fld>
             <a:endParaRPr lang="ko-KR" altLang="en-US"/>
           </a:p>
@@ -2346,7 +2347,7 @@
           <a:p>
             <a:fld id="{F0CD9246-440E-46C2-946E-50CD81230ED2}" type="datetimeFigureOut">
               <a:rPr lang="ko-KR" altLang="en-US" smtClean="0"/>
-              <a:t>2026-02-06</a:t>
+              <a:t>2026-02-07</a:t>
             </a:fld>
             <a:endParaRPr lang="ko-KR" altLang="en-US"/>
           </a:p>
@@ -2557,7 +2558,7 @@
           <a:p>
             <a:fld id="{F0CD9246-440E-46C2-946E-50CD81230ED2}" type="datetimeFigureOut">
               <a:rPr lang="ko-KR" altLang="en-US" smtClean="0"/>
-              <a:t>2026-02-06</a:t>
+              <a:t>2026-02-07</a:t>
             </a:fld>
             <a:endParaRPr lang="ko-KR" altLang="en-US"/>
           </a:p>
@@ -3104,8 +3105,8 @@
         </p:blipFill>
         <p:spPr>
           <a:xfrm>
-            <a:off x="280392" y="278487"/>
-            <a:ext cx="4315427" cy="2406351"/>
+            <a:off x="655793" y="311328"/>
+            <a:ext cx="5944430" cy="2524477"/>
           </a:xfrm>
           <a:prstGeom prst="rect">
             <a:avLst/>
@@ -3128,71 +3129,32 @@
         </p:blipFill>
         <p:spPr>
           <a:xfrm>
-            <a:off x="5312126" y="373818"/>
-            <a:ext cx="3326594" cy="2709288"/>
+            <a:off x="543627" y="3097193"/>
+            <a:ext cx="5849166" cy="2705478"/>
           </a:xfrm>
           <a:prstGeom prst="rect">
             <a:avLst/>
           </a:prstGeom>
         </p:spPr>
       </p:pic>
-      <p:sp>
-        <p:nvSpPr>
-          <p:cNvPr id="2" name="직사각형 1"/>
-          <p:cNvSpPr/>
-          <p:nvPr/>
-        </p:nvSpPr>
-        <p:spPr>
-          <a:xfrm>
-            <a:off x="4167427" y="3244334"/>
-            <a:ext cx="3857146" cy="369332"/>
-          </a:xfrm>
-          <a:prstGeom prst="rect">
-            <a:avLst/>
-          </a:prstGeom>
-        </p:spPr>
-        <p:txBody>
-          <a:bodyPr wrap="none">
-            <a:spAutoFit/>
-          </a:bodyPr>
-          <a:lstStyle/>
-          <a:p>
-            <a:r>
-              <a:rPr lang="en-US" altLang="ko-KR" dirty="0">
-                <a:solidFill>
-                  <a:srgbClr val="CCCCCC"/>
-                </a:solidFill>
-                <a:latin typeface="Consolas" panose="020B0609020204030204" pitchFamily="49" charset="0"/>
-              </a:rPr>
-              <a:t>03_04_bertviz_neuron_view.png</a:t>
-            </a:r>
-            <a:endParaRPr lang="en-US" altLang="ko-KR" b="0" dirty="0">
-              <a:solidFill>
-                <a:srgbClr val="CCCCCC"/>
-              </a:solidFill>
-              <a:effectLst/>
-              <a:latin typeface="Consolas" panose="020B0609020204030204" pitchFamily="49" charset="0"/>
-            </a:endParaRPr>
-          </a:p>
-        </p:txBody>
-      </p:sp>
       <p:pic>
         <p:nvPicPr>
-          <p:cNvPr id="3" name="그림 2"/>
+          <p:cNvPr id="2" name="그림 1"/>
           <p:cNvPicPr>
             <a:picLocks noChangeAspect="1"/>
           </p:cNvPicPr>
           <p:nvPr/>
         </p:nvPicPr>
-        <p:blipFill rotWithShape="1">
+        <p:blipFill>
           <a:blip r:embed="rId4"/>
-          <a:srcRect t="14277"/>
-          <a:stretch/>
+          <a:stretch>
+            <a:fillRect/>
+          </a:stretch>
         </p:blipFill>
         <p:spPr>
           <a:xfrm>
-            <a:off x="1185915" y="3879541"/>
-            <a:ext cx="7192379" cy="2327387"/>
+            <a:off x="5565050" y="454222"/>
+            <a:ext cx="5839640" cy="2238687"/>
           </a:xfrm>
           <a:prstGeom prst="rect">
             <a:avLst/>
@@ -3202,7 +3164,7 @@
     </p:spTree>
     <p:extLst>
       <p:ext uri="{BB962C8B-B14F-4D97-AF65-F5344CB8AC3E}">
-        <p14:creationId xmlns:p14="http://schemas.microsoft.com/office/powerpoint/2010/main" val="4024031726"/>
+        <p14:creationId xmlns:p14="http://schemas.microsoft.com/office/powerpoint/2010/main" val="887493065"/>
       </p:ext>
     </p:extLst>
   </p:cSld>
@@ -3343,7 +3305,7 @@
     </p:spTree>
     <p:extLst>
       <p:ext uri="{BB962C8B-B14F-4D97-AF65-F5344CB8AC3E}">
-        <p14:creationId xmlns:p14="http://schemas.microsoft.com/office/powerpoint/2010/main" val="1575043608"/>
+        <p14:creationId xmlns:p14="http://schemas.microsoft.com/office/powerpoint/2010/main" val="4024031726"/>
       </p:ext>
     </p:extLst>
   </p:cSld>
@@ -3386,8 +3348,8 @@
         </p:blipFill>
         <p:spPr>
           <a:xfrm>
-            <a:off x="299547" y="371100"/>
-            <a:ext cx="4212543" cy="3235141"/>
+            <a:off x="280392" y="278487"/>
+            <a:ext cx="4315427" cy="2406351"/>
           </a:xfrm>
           <a:prstGeom prst="rect">
             <a:avLst/>
@@ -3410,56 +3372,71 @@
         </p:blipFill>
         <p:spPr>
           <a:xfrm>
-            <a:off x="609134" y="4167072"/>
-            <a:ext cx="4001059" cy="1000265"/>
+            <a:off x="5312126" y="373818"/>
+            <a:ext cx="3326594" cy="2709288"/>
           </a:xfrm>
           <a:prstGeom prst="rect">
             <a:avLst/>
           </a:prstGeom>
         </p:spPr>
       </p:pic>
+      <p:sp>
+        <p:nvSpPr>
+          <p:cNvPr id="2" name="직사각형 1"/>
+          <p:cNvSpPr/>
+          <p:nvPr/>
+        </p:nvSpPr>
+        <p:spPr>
+          <a:xfrm>
+            <a:off x="4167427" y="3244334"/>
+            <a:ext cx="3857146" cy="369332"/>
+          </a:xfrm>
+          <a:prstGeom prst="rect">
+            <a:avLst/>
+          </a:prstGeom>
+        </p:spPr>
+        <p:txBody>
+          <a:bodyPr wrap="none">
+            <a:spAutoFit/>
+          </a:bodyPr>
+          <a:lstStyle/>
+          <a:p>
+            <a:r>
+              <a:rPr lang="en-US" altLang="ko-KR" dirty="0">
+                <a:solidFill>
+                  <a:srgbClr val="CCCCCC"/>
+                </a:solidFill>
+                <a:latin typeface="Consolas" panose="020B0609020204030204" pitchFamily="49" charset="0"/>
+              </a:rPr>
+              <a:t>03_04_bertviz_neuron_view.png</a:t>
+            </a:r>
+            <a:endParaRPr lang="en-US" altLang="ko-KR" b="0" dirty="0">
+              <a:solidFill>
+                <a:srgbClr val="CCCCCC"/>
+              </a:solidFill>
+              <a:effectLst/>
+              <a:latin typeface="Consolas" panose="020B0609020204030204" pitchFamily="49" charset="0"/>
+            </a:endParaRPr>
+          </a:p>
+        </p:txBody>
+      </p:sp>
       <p:pic>
         <p:nvPicPr>
-          <p:cNvPr id="6" name="그림 5"/>
+          <p:cNvPr id="3" name="그림 2"/>
           <p:cNvPicPr>
             <a:picLocks noChangeAspect="1"/>
           </p:cNvPicPr>
           <p:nvPr/>
         </p:nvPicPr>
-        <p:blipFill>
+        <p:blipFill rotWithShape="1">
           <a:blip r:embed="rId4"/>
-          <a:stretch>
-            <a:fillRect/>
-          </a:stretch>
+          <a:srcRect t="14277"/>
+          <a:stretch/>
         </p:blipFill>
         <p:spPr>
           <a:xfrm>
-            <a:off x="5495647" y="371100"/>
-            <a:ext cx="2389204" cy="2389204"/>
-          </a:xfrm>
-          <a:prstGeom prst="rect">
-            <a:avLst/>
-          </a:prstGeom>
-        </p:spPr>
-      </p:pic>
-      <p:pic>
-        <p:nvPicPr>
-          <p:cNvPr id="7" name="그림 6"/>
-          <p:cNvPicPr>
-            <a:picLocks noChangeAspect="1"/>
-          </p:cNvPicPr>
-          <p:nvPr/>
-        </p:nvPicPr>
-        <p:blipFill>
-          <a:blip r:embed="rId5"/>
-          <a:stretch>
-            <a:fillRect/>
-          </a:stretch>
-        </p:blipFill>
-        <p:spPr>
-          <a:xfrm>
-            <a:off x="5323983" y="3002913"/>
-            <a:ext cx="4229690" cy="2172003"/>
+            <a:off x="1185915" y="3879541"/>
+            <a:ext cx="7192379" cy="2327387"/>
           </a:xfrm>
           <a:prstGeom prst="rect">
             <a:avLst/>
@@ -3469,7 +3446,7 @@
     </p:spTree>
     <p:extLst>
       <p:ext uri="{BB962C8B-B14F-4D97-AF65-F5344CB8AC3E}">
-        <p14:creationId xmlns:p14="http://schemas.microsoft.com/office/powerpoint/2010/main" val="2628583716"/>
+        <p14:creationId xmlns:p14="http://schemas.microsoft.com/office/powerpoint/2010/main" val="1575043608"/>
       </p:ext>
     </p:extLst>
   </p:cSld>
@@ -3512,8 +3489,80 @@
         </p:blipFill>
         <p:spPr>
           <a:xfrm>
-            <a:off x="813880" y="385493"/>
-            <a:ext cx="7268589" cy="3858163"/>
+            <a:off x="299547" y="371100"/>
+            <a:ext cx="4212543" cy="3235141"/>
+          </a:xfrm>
+          <a:prstGeom prst="rect">
+            <a:avLst/>
+          </a:prstGeom>
+        </p:spPr>
+      </p:pic>
+      <p:pic>
+        <p:nvPicPr>
+          <p:cNvPr id="5" name="그림 4"/>
+          <p:cNvPicPr>
+            <a:picLocks noChangeAspect="1"/>
+          </p:cNvPicPr>
+          <p:nvPr/>
+        </p:nvPicPr>
+        <p:blipFill>
+          <a:blip r:embed="rId3"/>
+          <a:stretch>
+            <a:fillRect/>
+          </a:stretch>
+        </p:blipFill>
+        <p:spPr>
+          <a:xfrm>
+            <a:off x="609134" y="4167072"/>
+            <a:ext cx="4001059" cy="1000265"/>
+          </a:xfrm>
+          <a:prstGeom prst="rect">
+            <a:avLst/>
+          </a:prstGeom>
+        </p:spPr>
+      </p:pic>
+      <p:pic>
+        <p:nvPicPr>
+          <p:cNvPr id="6" name="그림 5"/>
+          <p:cNvPicPr>
+            <a:picLocks noChangeAspect="1"/>
+          </p:cNvPicPr>
+          <p:nvPr/>
+        </p:nvPicPr>
+        <p:blipFill>
+          <a:blip r:embed="rId4"/>
+          <a:stretch>
+            <a:fillRect/>
+          </a:stretch>
+        </p:blipFill>
+        <p:spPr>
+          <a:xfrm>
+            <a:off x="5495647" y="371100"/>
+            <a:ext cx="2389204" cy="2389204"/>
+          </a:xfrm>
+          <a:prstGeom prst="rect">
+            <a:avLst/>
+          </a:prstGeom>
+        </p:spPr>
+      </p:pic>
+      <p:pic>
+        <p:nvPicPr>
+          <p:cNvPr id="7" name="그림 6"/>
+          <p:cNvPicPr>
+            <a:picLocks noChangeAspect="1"/>
+          </p:cNvPicPr>
+          <p:nvPr/>
+        </p:nvPicPr>
+        <p:blipFill>
+          <a:blip r:embed="rId5"/>
+          <a:stretch>
+            <a:fillRect/>
+          </a:stretch>
+        </p:blipFill>
+        <p:spPr>
+          <a:xfrm>
+            <a:off x="5323983" y="3002913"/>
+            <a:ext cx="4229690" cy="2172003"/>
           </a:xfrm>
           <a:prstGeom prst="rect">
             <a:avLst/>
@@ -3523,7 +3572,7 @@
     </p:spTree>
     <p:extLst>
       <p:ext uri="{BB962C8B-B14F-4D97-AF65-F5344CB8AC3E}">
-        <p14:creationId xmlns:p14="http://schemas.microsoft.com/office/powerpoint/2010/main" val="2668780768"/>
+        <p14:creationId xmlns:p14="http://schemas.microsoft.com/office/powerpoint/2010/main" val="2628583716"/>
       </p:ext>
     </p:extLst>
   </p:cSld>
@@ -3566,104 +3615,8 @@
         </p:blipFill>
         <p:spPr>
           <a:xfrm>
-            <a:off x="656405" y="419195"/>
-            <a:ext cx="3086531" cy="1960519"/>
-          </a:xfrm>
-          <a:prstGeom prst="rect">
-            <a:avLst/>
-          </a:prstGeom>
-        </p:spPr>
-      </p:pic>
-      <p:pic>
-        <p:nvPicPr>
-          <p:cNvPr id="5" name="그림 4"/>
-          <p:cNvPicPr>
-            <a:picLocks noChangeAspect="1"/>
-          </p:cNvPicPr>
-          <p:nvPr/>
-        </p:nvPicPr>
-        <p:blipFill>
-          <a:blip r:embed="rId3"/>
-          <a:stretch>
-            <a:fillRect/>
-          </a:stretch>
-        </p:blipFill>
-        <p:spPr>
-          <a:xfrm>
-            <a:off x="656405" y="2630478"/>
-            <a:ext cx="7182852" cy="1171739"/>
-          </a:xfrm>
-          <a:prstGeom prst="rect">
-            <a:avLst/>
-          </a:prstGeom>
-        </p:spPr>
-      </p:pic>
-      <p:pic>
-        <p:nvPicPr>
-          <p:cNvPr id="2" name="그림 1"/>
-          <p:cNvPicPr>
-            <a:picLocks noChangeAspect="1"/>
-          </p:cNvPicPr>
-          <p:nvPr/>
-        </p:nvPicPr>
-        <p:blipFill>
-          <a:blip r:embed="rId4"/>
-          <a:stretch>
-            <a:fillRect/>
-          </a:stretch>
-        </p:blipFill>
-        <p:spPr>
-          <a:xfrm>
-            <a:off x="4156895" y="251531"/>
-            <a:ext cx="4212543" cy="1377507"/>
-          </a:xfrm>
-          <a:prstGeom prst="rect">
-            <a:avLst/>
-          </a:prstGeom>
-        </p:spPr>
-      </p:pic>
-      <p:pic>
-        <p:nvPicPr>
-          <p:cNvPr id="3" name="그림 2"/>
-          <p:cNvPicPr>
-            <a:picLocks noChangeAspect="1"/>
-          </p:cNvPicPr>
-          <p:nvPr/>
-        </p:nvPicPr>
-        <p:blipFill>
-          <a:blip r:embed="rId5"/>
-          <a:stretch>
-            <a:fillRect/>
-          </a:stretch>
-        </p:blipFill>
-        <p:spPr>
-          <a:xfrm>
-            <a:off x="656405" y="4332329"/>
-            <a:ext cx="3801005" cy="1863350"/>
-          </a:xfrm>
-          <a:prstGeom prst="rect">
-            <a:avLst/>
-          </a:prstGeom>
-        </p:spPr>
-      </p:pic>
-      <p:pic>
-        <p:nvPicPr>
-          <p:cNvPr id="6" name="그림 5"/>
-          <p:cNvPicPr>
-            <a:picLocks noChangeAspect="1"/>
-          </p:cNvPicPr>
-          <p:nvPr/>
-        </p:nvPicPr>
-        <p:blipFill>
-          <a:blip r:embed="rId6"/>
-          <a:stretch>
-            <a:fillRect/>
-          </a:stretch>
-        </p:blipFill>
-        <p:spPr>
-          <a:xfrm>
-            <a:off x="5161177" y="4220871"/>
-            <a:ext cx="4183964" cy="2086266"/>
+            <a:off x="813880" y="385493"/>
+            <a:ext cx="7268589" cy="3858163"/>
           </a:xfrm>
           <a:prstGeom prst="rect">
             <a:avLst/>
@@ -3673,7 +3626,7 @@
     </p:spTree>
     <p:extLst>
       <p:ext uri="{BB962C8B-B14F-4D97-AF65-F5344CB8AC3E}">
-        <p14:creationId xmlns:p14="http://schemas.microsoft.com/office/powerpoint/2010/main" val="2672974803"/>
+        <p14:creationId xmlns:p14="http://schemas.microsoft.com/office/powerpoint/2010/main" val="2668780768"/>
       </p:ext>
     </p:extLst>
   </p:cSld>
@@ -3716,6 +3669,156 @@
         </p:blipFill>
         <p:spPr>
           <a:xfrm>
+            <a:off x="656405" y="419195"/>
+            <a:ext cx="3086531" cy="1960519"/>
+          </a:xfrm>
+          <a:prstGeom prst="rect">
+            <a:avLst/>
+          </a:prstGeom>
+        </p:spPr>
+      </p:pic>
+      <p:pic>
+        <p:nvPicPr>
+          <p:cNvPr id="5" name="그림 4"/>
+          <p:cNvPicPr>
+            <a:picLocks noChangeAspect="1"/>
+          </p:cNvPicPr>
+          <p:nvPr/>
+        </p:nvPicPr>
+        <p:blipFill>
+          <a:blip r:embed="rId3"/>
+          <a:stretch>
+            <a:fillRect/>
+          </a:stretch>
+        </p:blipFill>
+        <p:spPr>
+          <a:xfrm>
+            <a:off x="656405" y="2630478"/>
+            <a:ext cx="7182852" cy="1171739"/>
+          </a:xfrm>
+          <a:prstGeom prst="rect">
+            <a:avLst/>
+          </a:prstGeom>
+        </p:spPr>
+      </p:pic>
+      <p:pic>
+        <p:nvPicPr>
+          <p:cNvPr id="2" name="그림 1"/>
+          <p:cNvPicPr>
+            <a:picLocks noChangeAspect="1"/>
+          </p:cNvPicPr>
+          <p:nvPr/>
+        </p:nvPicPr>
+        <p:blipFill>
+          <a:blip r:embed="rId4"/>
+          <a:stretch>
+            <a:fillRect/>
+          </a:stretch>
+        </p:blipFill>
+        <p:spPr>
+          <a:xfrm>
+            <a:off x="4156895" y="251531"/>
+            <a:ext cx="4212543" cy="1377507"/>
+          </a:xfrm>
+          <a:prstGeom prst="rect">
+            <a:avLst/>
+          </a:prstGeom>
+        </p:spPr>
+      </p:pic>
+      <p:pic>
+        <p:nvPicPr>
+          <p:cNvPr id="3" name="그림 2"/>
+          <p:cNvPicPr>
+            <a:picLocks noChangeAspect="1"/>
+          </p:cNvPicPr>
+          <p:nvPr/>
+        </p:nvPicPr>
+        <p:blipFill>
+          <a:blip r:embed="rId5"/>
+          <a:stretch>
+            <a:fillRect/>
+          </a:stretch>
+        </p:blipFill>
+        <p:spPr>
+          <a:xfrm>
+            <a:off x="656405" y="4332329"/>
+            <a:ext cx="3801005" cy="1863350"/>
+          </a:xfrm>
+          <a:prstGeom prst="rect">
+            <a:avLst/>
+          </a:prstGeom>
+        </p:spPr>
+      </p:pic>
+      <p:pic>
+        <p:nvPicPr>
+          <p:cNvPr id="6" name="그림 5"/>
+          <p:cNvPicPr>
+            <a:picLocks noChangeAspect="1"/>
+          </p:cNvPicPr>
+          <p:nvPr/>
+        </p:nvPicPr>
+        <p:blipFill>
+          <a:blip r:embed="rId6"/>
+          <a:stretch>
+            <a:fillRect/>
+          </a:stretch>
+        </p:blipFill>
+        <p:spPr>
+          <a:xfrm>
+            <a:off x="5161177" y="4220871"/>
+            <a:ext cx="4183964" cy="2086266"/>
+          </a:xfrm>
+          <a:prstGeom prst="rect">
+            <a:avLst/>
+          </a:prstGeom>
+        </p:spPr>
+      </p:pic>
+    </p:spTree>
+    <p:extLst>
+      <p:ext uri="{BB962C8B-B14F-4D97-AF65-F5344CB8AC3E}">
+        <p14:creationId xmlns:p14="http://schemas.microsoft.com/office/powerpoint/2010/main" val="2672974803"/>
+      </p:ext>
+    </p:extLst>
+  </p:cSld>
+  <p:clrMapOvr>
+    <a:masterClrMapping/>
+  </p:clrMapOvr>
+</p:sld>
+</file>
+
+<file path=ppt/slides/slide16.xml><?xml version="1.0" encoding="utf-8"?>
+<p:sld xmlns:a="http://schemas.openxmlformats.org/drawingml/2006/main" xmlns:r="http://schemas.openxmlformats.org/officeDocument/2006/relationships" xmlns:p="http://schemas.openxmlformats.org/presentationml/2006/main">
+  <p:cSld>
+    <p:spTree>
+      <p:nvGrpSpPr>
+        <p:cNvPr id="1" name=""/>
+        <p:cNvGrpSpPr/>
+        <p:nvPr/>
+      </p:nvGrpSpPr>
+      <p:grpSpPr>
+        <a:xfrm>
+          <a:off x="0" y="0"/>
+          <a:ext cx="0" cy="0"/>
+          <a:chOff x="0" y="0"/>
+          <a:chExt cx="0" cy="0"/>
+        </a:xfrm>
+      </p:grpSpPr>
+      <p:pic>
+        <p:nvPicPr>
+          <p:cNvPr id="4" name="그림 3"/>
+          <p:cNvPicPr>
+            <a:picLocks noChangeAspect="1"/>
+          </p:cNvPicPr>
+          <p:nvPr/>
+        </p:nvPicPr>
+        <p:blipFill>
+          <a:blip r:embed="rId2"/>
+          <a:stretch>
+            <a:fillRect/>
+          </a:stretch>
+        </p:blipFill>
+        <p:spPr>
+          <a:xfrm>
             <a:off x="264100" y="165653"/>
             <a:ext cx="3663826" cy="2126277"/>
           </a:xfrm>
@@ -3759,6 +3862,96 @@
           <p:cNvPr id="4" name="그림 3">
             <a:extLst>
               <a:ext uri="{FF2B5EF4-FFF2-40B4-BE49-F238E27FC236}">
+                <a16:creationId xmlns:a16="http://schemas.microsoft.com/office/drawing/2014/main" id="{812D61A5-182F-4B79-95E0-C90DC371C653}"/>
+              </a:ext>
+            </a:extLst>
+          </p:cNvPr>
+          <p:cNvPicPr>
+            <a:picLocks noChangeAspect="1"/>
+          </p:cNvPicPr>
+          <p:nvPr/>
+        </p:nvPicPr>
+        <p:blipFill>
+          <a:blip r:embed="rId2"/>
+          <a:stretch>
+            <a:fillRect/>
+          </a:stretch>
+        </p:blipFill>
+        <p:spPr>
+          <a:xfrm>
+            <a:off x="151064" y="178678"/>
+            <a:ext cx="3982006" cy="2572109"/>
+          </a:xfrm>
+          <a:prstGeom prst="rect">
+            <a:avLst/>
+          </a:prstGeom>
+        </p:spPr>
+      </p:pic>
+      <p:pic>
+        <p:nvPicPr>
+          <p:cNvPr id="5" name="그림 4">
+            <a:extLst>
+              <a:ext uri="{FF2B5EF4-FFF2-40B4-BE49-F238E27FC236}">
+                <a16:creationId xmlns:a16="http://schemas.microsoft.com/office/drawing/2014/main" id="{D9452652-040F-4746-AC2C-BACFC80F0D73}"/>
+              </a:ext>
+            </a:extLst>
+          </p:cNvPr>
+          <p:cNvPicPr>
+            <a:picLocks noChangeAspect="1"/>
+          </p:cNvPicPr>
+          <p:nvPr/>
+        </p:nvPicPr>
+        <p:blipFill>
+          <a:blip r:embed="rId3"/>
+          <a:stretch>
+            <a:fillRect/>
+          </a:stretch>
+        </p:blipFill>
+        <p:spPr>
+          <a:xfrm>
+            <a:off x="4491083" y="294107"/>
+            <a:ext cx="6935168" cy="1562318"/>
+          </a:xfrm>
+          <a:prstGeom prst="rect">
+            <a:avLst/>
+          </a:prstGeom>
+        </p:spPr>
+      </p:pic>
+    </p:spTree>
+    <p:extLst>
+      <p:ext uri="{BB962C8B-B14F-4D97-AF65-F5344CB8AC3E}">
+        <p14:creationId xmlns:p14="http://schemas.microsoft.com/office/powerpoint/2010/main" val="1693059258"/>
+      </p:ext>
+    </p:extLst>
+  </p:cSld>
+  <p:clrMapOvr>
+    <a:masterClrMapping/>
+  </p:clrMapOvr>
+</p:sld>
+</file>
+
+<file path=ppt/slides/slide3.xml><?xml version="1.0" encoding="utf-8"?>
+<p:sld xmlns:a="http://schemas.openxmlformats.org/drawingml/2006/main" xmlns:r="http://schemas.openxmlformats.org/officeDocument/2006/relationships" xmlns:p="http://schemas.openxmlformats.org/presentationml/2006/main">
+  <p:cSld>
+    <p:spTree>
+      <p:nvGrpSpPr>
+        <p:cNvPr id="1" name=""/>
+        <p:cNvGrpSpPr/>
+        <p:nvPr/>
+      </p:nvGrpSpPr>
+      <p:grpSpPr>
+        <a:xfrm>
+          <a:off x="0" y="0"/>
+          <a:ext cx="0" cy="0"/>
+          <a:chOff x="0" y="0"/>
+          <a:chExt cx="0" cy="0"/>
+        </a:xfrm>
+      </p:grpSpPr>
+      <p:pic>
+        <p:nvPicPr>
+          <p:cNvPr id="4" name="그림 3">
+            <a:extLst>
+              <a:ext uri="{FF2B5EF4-FFF2-40B4-BE49-F238E27FC236}">
                 <a16:creationId xmlns:a16="http://schemas.microsoft.com/office/drawing/2014/main" id="{4806CDF6-C5BE-4C06-8605-F9E0EB5138C2}"/>
               </a:ext>
             </a:extLst>
@@ -3827,7 +4020,7 @@
 </p:sld>
 </file>
 
-<file path=ppt/slides/slide3.xml><?xml version="1.0" encoding="utf-8"?>
+<file path=ppt/slides/slide4.xml><?xml version="1.0" encoding="utf-8"?>
 <p:sld xmlns:a="http://schemas.openxmlformats.org/drawingml/2006/main" xmlns:r="http://schemas.openxmlformats.org/officeDocument/2006/relationships" xmlns:p="http://schemas.openxmlformats.org/presentationml/2006/main">
   <p:cSld>
     <p:spTree>
@@ -3941,7 +4134,7 @@
 </p:sld>
 </file>
 
-<file path=ppt/slides/slide4.xml><?xml version="1.0" encoding="utf-8"?>
+<file path=ppt/slides/slide5.xml><?xml version="1.0" encoding="utf-8"?>
 <p:sld xmlns:a="http://schemas.openxmlformats.org/drawingml/2006/main" xmlns:r="http://schemas.openxmlformats.org/officeDocument/2006/relationships" xmlns:p="http://schemas.openxmlformats.org/presentationml/2006/main">
   <p:cSld>
     <p:spTree>
@@ -4052,108 +4245,6 @@
     <p:extLst>
       <p:ext uri="{BB962C8B-B14F-4D97-AF65-F5344CB8AC3E}">
         <p14:creationId xmlns:p14="http://schemas.microsoft.com/office/powerpoint/2010/main" val="3011048765"/>
-      </p:ext>
-    </p:extLst>
-  </p:cSld>
-  <p:clrMapOvr>
-    <a:masterClrMapping/>
-  </p:clrMapOvr>
-</p:sld>
-</file>
-
-<file path=ppt/slides/slide5.xml><?xml version="1.0" encoding="utf-8"?>
-<p:sld xmlns:a="http://schemas.openxmlformats.org/drawingml/2006/main" xmlns:r="http://schemas.openxmlformats.org/officeDocument/2006/relationships" xmlns:p="http://schemas.openxmlformats.org/presentationml/2006/main">
-  <p:cSld>
-    <p:spTree>
-      <p:nvGrpSpPr>
-        <p:cNvPr id="1" name=""/>
-        <p:cNvGrpSpPr/>
-        <p:nvPr/>
-      </p:nvGrpSpPr>
-      <p:grpSpPr>
-        <a:xfrm>
-          <a:off x="0" y="0"/>
-          <a:ext cx="0" cy="0"/>
-          <a:chOff x="0" y="0"/>
-          <a:chExt cx="0" cy="0"/>
-        </a:xfrm>
-      </p:grpSpPr>
-      <p:pic>
-        <p:nvPicPr>
-          <p:cNvPr id="4" name="그림 3"/>
-          <p:cNvPicPr>
-            <a:picLocks noChangeAspect="1"/>
-          </p:cNvPicPr>
-          <p:nvPr/>
-        </p:nvPicPr>
-        <p:blipFill>
-          <a:blip r:embed="rId2"/>
-          <a:stretch>
-            <a:fillRect/>
-          </a:stretch>
-        </p:blipFill>
-        <p:spPr>
-          <a:xfrm>
-            <a:off x="460967" y="230838"/>
-            <a:ext cx="6973273" cy="3715268"/>
-          </a:xfrm>
-          <a:prstGeom prst="rect">
-            <a:avLst/>
-          </a:prstGeom>
-        </p:spPr>
-      </p:pic>
-      <p:pic>
-        <p:nvPicPr>
-          <p:cNvPr id="5" name="그림 4"/>
-          <p:cNvPicPr>
-            <a:picLocks noChangeAspect="1"/>
-          </p:cNvPicPr>
-          <p:nvPr/>
-        </p:nvPicPr>
-        <p:blipFill>
-          <a:blip r:embed="rId3"/>
-          <a:stretch>
-            <a:fillRect/>
-          </a:stretch>
-        </p:blipFill>
-        <p:spPr>
-          <a:xfrm>
-            <a:off x="345558" y="3294244"/>
-            <a:ext cx="6973273" cy="2915057"/>
-          </a:xfrm>
-          <a:prstGeom prst="rect">
-            <a:avLst/>
-          </a:prstGeom>
-        </p:spPr>
-      </p:pic>
-      <p:pic>
-        <p:nvPicPr>
-          <p:cNvPr id="6" name="그림 5"/>
-          <p:cNvPicPr>
-            <a:picLocks noChangeAspect="1"/>
-          </p:cNvPicPr>
-          <p:nvPr/>
-        </p:nvPicPr>
-        <p:blipFill>
-          <a:blip r:embed="rId4"/>
-          <a:stretch>
-            <a:fillRect/>
-          </a:stretch>
-        </p:blipFill>
-        <p:spPr>
-          <a:xfrm>
-            <a:off x="2537916" y="1571366"/>
-            <a:ext cx="7116168" cy="3715268"/>
-          </a:xfrm>
-          <a:prstGeom prst="rect">
-            <a:avLst/>
-          </a:prstGeom>
-        </p:spPr>
-      </p:pic>
-    </p:spTree>
-    <p:extLst>
-      <p:ext uri="{BB962C8B-B14F-4D97-AF65-F5344CB8AC3E}">
-        <p14:creationId xmlns:p14="http://schemas.microsoft.com/office/powerpoint/2010/main" val="2005913688"/>
       </p:ext>
     </p:extLst>
   </p:cSld>
@@ -4196,8 +4287,8 @@
         </p:blipFill>
         <p:spPr>
           <a:xfrm>
-            <a:off x="177975" y="246068"/>
-            <a:ext cx="7201905" cy="790685"/>
+            <a:off x="460967" y="230838"/>
+            <a:ext cx="6973273" cy="3715268"/>
           </a:xfrm>
           <a:prstGeom prst="rect">
             <a:avLst/>
@@ -4220,8 +4311,8 @@
         </p:blipFill>
         <p:spPr>
           <a:xfrm>
-            <a:off x="539773" y="1179285"/>
-            <a:ext cx="6744641" cy="4801270"/>
+            <a:off x="345558" y="3294244"/>
+            <a:ext cx="6973273" cy="2915057"/>
           </a:xfrm>
           <a:prstGeom prst="rect">
             <a:avLst/>
@@ -4230,7 +4321,7 @@
       </p:pic>
       <p:pic>
         <p:nvPicPr>
-          <p:cNvPr id="2" name="그림 1"/>
+          <p:cNvPr id="6" name="그림 5"/>
           <p:cNvPicPr>
             <a:picLocks noChangeAspect="1"/>
           </p:cNvPicPr>
@@ -4244,32 +4335,8 @@
         </p:blipFill>
         <p:spPr>
           <a:xfrm>
-            <a:off x="5711524" y="246068"/>
-            <a:ext cx="6077798" cy="2181529"/>
-          </a:xfrm>
-          <a:prstGeom prst="rect">
-            <a:avLst/>
-          </a:prstGeom>
-        </p:spPr>
-      </p:pic>
-      <p:pic>
-        <p:nvPicPr>
-          <p:cNvPr id="3" name="그림 2"/>
-          <p:cNvPicPr>
-            <a:picLocks noChangeAspect="1"/>
-          </p:cNvPicPr>
-          <p:nvPr/>
-        </p:nvPicPr>
-        <p:blipFill>
-          <a:blip r:embed="rId5"/>
-          <a:stretch>
-            <a:fillRect/>
-          </a:stretch>
-        </p:blipFill>
-        <p:spPr>
-          <a:xfrm>
-            <a:off x="3171417" y="2019103"/>
-            <a:ext cx="5849166" cy="2819794"/>
+            <a:off x="2537916" y="1571366"/>
+            <a:ext cx="7116168" cy="3715268"/>
           </a:xfrm>
           <a:prstGeom prst="rect">
             <a:avLst/>
@@ -4279,7 +4346,7 @@
     </p:spTree>
     <p:extLst>
       <p:ext uri="{BB962C8B-B14F-4D97-AF65-F5344CB8AC3E}">
-        <p14:creationId xmlns:p14="http://schemas.microsoft.com/office/powerpoint/2010/main" val="1321305327"/>
+        <p14:creationId xmlns:p14="http://schemas.microsoft.com/office/powerpoint/2010/main" val="2005913688"/>
       </p:ext>
     </p:extLst>
   </p:cSld>
@@ -4322,8 +4389,8 @@
         </p:blipFill>
         <p:spPr>
           <a:xfrm>
-            <a:off x="513362" y="338928"/>
-            <a:ext cx="6868484" cy="4582164"/>
+            <a:off x="177975" y="246068"/>
+            <a:ext cx="7201905" cy="790685"/>
           </a:xfrm>
           <a:prstGeom prst="rect">
             <a:avLst/>
@@ -4346,6 +4413,132 @@
         </p:blipFill>
         <p:spPr>
           <a:xfrm>
+            <a:off x="539773" y="1179285"/>
+            <a:ext cx="6744641" cy="4801270"/>
+          </a:xfrm>
+          <a:prstGeom prst="rect">
+            <a:avLst/>
+          </a:prstGeom>
+        </p:spPr>
+      </p:pic>
+      <p:pic>
+        <p:nvPicPr>
+          <p:cNvPr id="2" name="그림 1"/>
+          <p:cNvPicPr>
+            <a:picLocks noChangeAspect="1"/>
+          </p:cNvPicPr>
+          <p:nvPr/>
+        </p:nvPicPr>
+        <p:blipFill>
+          <a:blip r:embed="rId4"/>
+          <a:stretch>
+            <a:fillRect/>
+          </a:stretch>
+        </p:blipFill>
+        <p:spPr>
+          <a:xfrm>
+            <a:off x="5711524" y="246068"/>
+            <a:ext cx="6077798" cy="2181529"/>
+          </a:xfrm>
+          <a:prstGeom prst="rect">
+            <a:avLst/>
+          </a:prstGeom>
+        </p:spPr>
+      </p:pic>
+      <p:pic>
+        <p:nvPicPr>
+          <p:cNvPr id="3" name="그림 2"/>
+          <p:cNvPicPr>
+            <a:picLocks noChangeAspect="1"/>
+          </p:cNvPicPr>
+          <p:nvPr/>
+        </p:nvPicPr>
+        <p:blipFill>
+          <a:blip r:embed="rId5"/>
+          <a:stretch>
+            <a:fillRect/>
+          </a:stretch>
+        </p:blipFill>
+        <p:spPr>
+          <a:xfrm>
+            <a:off x="3171417" y="2019103"/>
+            <a:ext cx="5849166" cy="2819794"/>
+          </a:xfrm>
+          <a:prstGeom prst="rect">
+            <a:avLst/>
+          </a:prstGeom>
+        </p:spPr>
+      </p:pic>
+    </p:spTree>
+    <p:extLst>
+      <p:ext uri="{BB962C8B-B14F-4D97-AF65-F5344CB8AC3E}">
+        <p14:creationId xmlns:p14="http://schemas.microsoft.com/office/powerpoint/2010/main" val="1321305327"/>
+      </p:ext>
+    </p:extLst>
+  </p:cSld>
+  <p:clrMapOvr>
+    <a:masterClrMapping/>
+  </p:clrMapOvr>
+</p:sld>
+</file>
+
+<file path=ppt/slides/slide8.xml><?xml version="1.0" encoding="utf-8"?>
+<p:sld xmlns:a="http://schemas.openxmlformats.org/drawingml/2006/main" xmlns:r="http://schemas.openxmlformats.org/officeDocument/2006/relationships" xmlns:p="http://schemas.openxmlformats.org/presentationml/2006/main">
+  <p:cSld>
+    <p:spTree>
+      <p:nvGrpSpPr>
+        <p:cNvPr id="1" name=""/>
+        <p:cNvGrpSpPr/>
+        <p:nvPr/>
+      </p:nvGrpSpPr>
+      <p:grpSpPr>
+        <a:xfrm>
+          <a:off x="0" y="0"/>
+          <a:ext cx="0" cy="0"/>
+          <a:chOff x="0" y="0"/>
+          <a:chExt cx="0" cy="0"/>
+        </a:xfrm>
+      </p:grpSpPr>
+      <p:pic>
+        <p:nvPicPr>
+          <p:cNvPr id="4" name="그림 3"/>
+          <p:cNvPicPr>
+            <a:picLocks noChangeAspect="1"/>
+          </p:cNvPicPr>
+          <p:nvPr/>
+        </p:nvPicPr>
+        <p:blipFill>
+          <a:blip r:embed="rId2"/>
+          <a:stretch>
+            <a:fillRect/>
+          </a:stretch>
+        </p:blipFill>
+        <p:spPr>
+          <a:xfrm>
+            <a:off x="513362" y="338928"/>
+            <a:ext cx="6868484" cy="4582164"/>
+          </a:xfrm>
+          <a:prstGeom prst="rect">
+            <a:avLst/>
+          </a:prstGeom>
+        </p:spPr>
+      </p:pic>
+      <p:pic>
+        <p:nvPicPr>
+          <p:cNvPr id="5" name="그림 4"/>
+          <p:cNvPicPr>
+            <a:picLocks noChangeAspect="1"/>
+          </p:cNvPicPr>
+          <p:nvPr/>
+        </p:nvPicPr>
+        <p:blipFill>
+          <a:blip r:embed="rId3"/>
+          <a:stretch>
+            <a:fillRect/>
+          </a:stretch>
+        </p:blipFill>
+        <p:spPr>
+          <a:xfrm>
             <a:off x="8215079" y="338928"/>
             <a:ext cx="2686425" cy="1724266"/>
           </a:xfrm>
@@ -4367,7 +4560,7 @@
 </p:sld>
 </file>
 
-<file path=ppt/slides/slide8.xml><?xml version="1.0" encoding="utf-8"?>
+<file path=ppt/slides/slide9.xml><?xml version="1.0" encoding="utf-8"?>
 <p:sld xmlns:a="http://schemas.openxmlformats.org/drawingml/2006/main" xmlns:r="http://schemas.openxmlformats.org/officeDocument/2006/relationships" xmlns:p="http://schemas.openxmlformats.org/presentationml/2006/main">
   <p:cSld>
     <p:spTree>
@@ -4436,108 +4629,6 @@
     <p:extLst>
       <p:ext uri="{BB962C8B-B14F-4D97-AF65-F5344CB8AC3E}">
         <p14:creationId xmlns:p14="http://schemas.microsoft.com/office/powerpoint/2010/main" val="2656977250"/>
-      </p:ext>
-    </p:extLst>
-  </p:cSld>
-  <p:clrMapOvr>
-    <a:masterClrMapping/>
-  </p:clrMapOvr>
-</p:sld>
-</file>
-
-<file path=ppt/slides/slide9.xml><?xml version="1.0" encoding="utf-8"?>
-<p:sld xmlns:a="http://schemas.openxmlformats.org/drawingml/2006/main" xmlns:r="http://schemas.openxmlformats.org/officeDocument/2006/relationships" xmlns:p="http://schemas.openxmlformats.org/presentationml/2006/main">
-  <p:cSld>
-    <p:spTree>
-      <p:nvGrpSpPr>
-        <p:cNvPr id="1" name=""/>
-        <p:cNvGrpSpPr/>
-        <p:nvPr/>
-      </p:nvGrpSpPr>
-      <p:grpSpPr>
-        <a:xfrm>
-          <a:off x="0" y="0"/>
-          <a:ext cx="0" cy="0"/>
-          <a:chOff x="0" y="0"/>
-          <a:chExt cx="0" cy="0"/>
-        </a:xfrm>
-      </p:grpSpPr>
-      <p:pic>
-        <p:nvPicPr>
-          <p:cNvPr id="4" name="그림 3"/>
-          <p:cNvPicPr>
-            <a:picLocks noChangeAspect="1"/>
-          </p:cNvPicPr>
-          <p:nvPr/>
-        </p:nvPicPr>
-        <p:blipFill>
-          <a:blip r:embed="rId2"/>
-          <a:stretch>
-            <a:fillRect/>
-          </a:stretch>
-        </p:blipFill>
-        <p:spPr>
-          <a:xfrm>
-            <a:off x="655793" y="311328"/>
-            <a:ext cx="5944430" cy="2524477"/>
-          </a:xfrm>
-          <a:prstGeom prst="rect">
-            <a:avLst/>
-          </a:prstGeom>
-        </p:spPr>
-      </p:pic>
-      <p:pic>
-        <p:nvPicPr>
-          <p:cNvPr id="5" name="그림 4"/>
-          <p:cNvPicPr>
-            <a:picLocks noChangeAspect="1"/>
-          </p:cNvPicPr>
-          <p:nvPr/>
-        </p:nvPicPr>
-        <p:blipFill>
-          <a:blip r:embed="rId3"/>
-          <a:stretch>
-            <a:fillRect/>
-          </a:stretch>
-        </p:blipFill>
-        <p:spPr>
-          <a:xfrm>
-            <a:off x="543627" y="3097193"/>
-            <a:ext cx="5849166" cy="2705478"/>
-          </a:xfrm>
-          <a:prstGeom prst="rect">
-            <a:avLst/>
-          </a:prstGeom>
-        </p:spPr>
-      </p:pic>
-      <p:pic>
-        <p:nvPicPr>
-          <p:cNvPr id="2" name="그림 1"/>
-          <p:cNvPicPr>
-            <a:picLocks noChangeAspect="1"/>
-          </p:cNvPicPr>
-          <p:nvPr/>
-        </p:nvPicPr>
-        <p:blipFill>
-          <a:blip r:embed="rId4"/>
-          <a:stretch>
-            <a:fillRect/>
-          </a:stretch>
-        </p:blipFill>
-        <p:spPr>
-          <a:xfrm>
-            <a:off x="5565050" y="454222"/>
-            <a:ext cx="5839640" cy="2238687"/>
-          </a:xfrm>
-          <a:prstGeom prst="rect">
-            <a:avLst/>
-          </a:prstGeom>
-        </p:spPr>
-      </p:pic>
-    </p:spTree>
-    <p:extLst>
-      <p:ext uri="{BB962C8B-B14F-4D97-AF65-F5344CB8AC3E}">
-        <p14:creationId xmlns:p14="http://schemas.microsoft.com/office/powerpoint/2010/main" val="887493065"/>
       </p:ext>
     </p:extLst>
   </p:cSld>

--- a/image/이미지 생성용.pptx
+++ b/image/이미지 생성용.pptx
@@ -256,7 +256,7 @@
           <a:p>
             <a:fld id="{F0CD9246-440E-46C2-946E-50CD81230ED2}" type="datetimeFigureOut">
               <a:rPr lang="ko-KR" altLang="en-US" smtClean="0"/>
-              <a:t>2026-02-07</a:t>
+              <a:t>2026-02-08</a:t>
             </a:fld>
             <a:endParaRPr lang="ko-KR" altLang="en-US"/>
           </a:p>
@@ -424,7 +424,7 @@
           <a:p>
             <a:fld id="{F0CD9246-440E-46C2-946E-50CD81230ED2}" type="datetimeFigureOut">
               <a:rPr lang="ko-KR" altLang="en-US" smtClean="0"/>
-              <a:t>2026-02-07</a:t>
+              <a:t>2026-02-08</a:t>
             </a:fld>
             <a:endParaRPr lang="ko-KR" altLang="en-US"/>
           </a:p>
@@ -602,7 +602,7 @@
           <a:p>
             <a:fld id="{F0CD9246-440E-46C2-946E-50CD81230ED2}" type="datetimeFigureOut">
               <a:rPr lang="ko-KR" altLang="en-US" smtClean="0"/>
-              <a:t>2026-02-07</a:t>
+              <a:t>2026-02-08</a:t>
             </a:fld>
             <a:endParaRPr lang="ko-KR" altLang="en-US"/>
           </a:p>
@@ -770,7 +770,7 @@
           <a:p>
             <a:fld id="{F0CD9246-440E-46C2-946E-50CD81230ED2}" type="datetimeFigureOut">
               <a:rPr lang="ko-KR" altLang="en-US" smtClean="0"/>
-              <a:t>2026-02-07</a:t>
+              <a:t>2026-02-08</a:t>
             </a:fld>
             <a:endParaRPr lang="ko-KR" altLang="en-US"/>
           </a:p>
@@ -1015,7 +1015,7 @@
           <a:p>
             <a:fld id="{F0CD9246-440E-46C2-946E-50CD81230ED2}" type="datetimeFigureOut">
               <a:rPr lang="ko-KR" altLang="en-US" smtClean="0"/>
-              <a:t>2026-02-07</a:t>
+              <a:t>2026-02-08</a:t>
             </a:fld>
             <a:endParaRPr lang="ko-KR" altLang="en-US"/>
           </a:p>
@@ -1244,7 +1244,7 @@
           <a:p>
             <a:fld id="{F0CD9246-440E-46C2-946E-50CD81230ED2}" type="datetimeFigureOut">
               <a:rPr lang="ko-KR" altLang="en-US" smtClean="0"/>
-              <a:t>2026-02-07</a:t>
+              <a:t>2026-02-08</a:t>
             </a:fld>
             <a:endParaRPr lang="ko-KR" altLang="en-US"/>
           </a:p>
@@ -1608,7 +1608,7 @@
           <a:p>
             <a:fld id="{F0CD9246-440E-46C2-946E-50CD81230ED2}" type="datetimeFigureOut">
               <a:rPr lang="ko-KR" altLang="en-US" smtClean="0"/>
-              <a:t>2026-02-07</a:t>
+              <a:t>2026-02-08</a:t>
             </a:fld>
             <a:endParaRPr lang="ko-KR" altLang="en-US"/>
           </a:p>
@@ -1725,7 +1725,7 @@
           <a:p>
             <a:fld id="{F0CD9246-440E-46C2-946E-50CD81230ED2}" type="datetimeFigureOut">
               <a:rPr lang="ko-KR" altLang="en-US" smtClean="0"/>
-              <a:t>2026-02-07</a:t>
+              <a:t>2026-02-08</a:t>
             </a:fld>
             <a:endParaRPr lang="ko-KR" altLang="en-US"/>
           </a:p>
@@ -1820,7 +1820,7 @@
           <a:p>
             <a:fld id="{F0CD9246-440E-46C2-946E-50CD81230ED2}" type="datetimeFigureOut">
               <a:rPr lang="ko-KR" altLang="en-US" smtClean="0"/>
-              <a:t>2026-02-07</a:t>
+              <a:t>2026-02-08</a:t>
             </a:fld>
             <a:endParaRPr lang="ko-KR" altLang="en-US"/>
           </a:p>
@@ -2095,7 +2095,7 @@
           <a:p>
             <a:fld id="{F0CD9246-440E-46C2-946E-50CD81230ED2}" type="datetimeFigureOut">
               <a:rPr lang="ko-KR" altLang="en-US" smtClean="0"/>
-              <a:t>2026-02-07</a:t>
+              <a:t>2026-02-08</a:t>
             </a:fld>
             <a:endParaRPr lang="ko-KR" altLang="en-US"/>
           </a:p>
@@ -2347,7 +2347,7 @@
           <a:p>
             <a:fld id="{F0CD9246-440E-46C2-946E-50CD81230ED2}" type="datetimeFigureOut">
               <a:rPr lang="ko-KR" altLang="en-US" smtClean="0"/>
-              <a:t>2026-02-07</a:t>
+              <a:t>2026-02-08</a:t>
             </a:fld>
             <a:endParaRPr lang="ko-KR" altLang="en-US"/>
           </a:p>
@@ -2558,7 +2558,7 @@
           <a:p>
             <a:fld id="{F0CD9246-440E-46C2-946E-50CD81230ED2}" type="datetimeFigureOut">
               <a:rPr lang="ko-KR" altLang="en-US" smtClean="0"/>
-              <a:t>2026-02-07</a:t>
+              <a:t>2026-02-08</a:t>
             </a:fld>
             <a:endParaRPr lang="ko-KR" altLang="en-US"/>
           </a:p>
@@ -3917,6 +3917,66 @@
           </a:prstGeom>
         </p:spPr>
       </p:pic>
+      <p:pic>
+        <p:nvPicPr>
+          <p:cNvPr id="2" name="그림 1">
+            <a:extLst>
+              <a:ext uri="{FF2B5EF4-FFF2-40B4-BE49-F238E27FC236}">
+                <a16:creationId xmlns:a16="http://schemas.microsoft.com/office/drawing/2014/main" id="{D2CAF818-0E8E-4C03-A9B4-31DE4BB2C461}"/>
+              </a:ext>
+            </a:extLst>
+          </p:cNvPr>
+          <p:cNvPicPr>
+            <a:picLocks noChangeAspect="1"/>
+          </p:cNvPicPr>
+          <p:nvPr/>
+        </p:nvPicPr>
+        <p:blipFill>
+          <a:blip r:embed="rId4"/>
+          <a:stretch>
+            <a:fillRect/>
+          </a:stretch>
+        </p:blipFill>
+        <p:spPr>
+          <a:xfrm>
+            <a:off x="248918" y="2921815"/>
+            <a:ext cx="4582164" cy="3486637"/>
+          </a:xfrm>
+          <a:prstGeom prst="rect">
+            <a:avLst/>
+          </a:prstGeom>
+        </p:spPr>
+      </p:pic>
+      <p:pic>
+        <p:nvPicPr>
+          <p:cNvPr id="3" name="그림 2">
+            <a:extLst>
+              <a:ext uri="{FF2B5EF4-FFF2-40B4-BE49-F238E27FC236}">
+                <a16:creationId xmlns:a16="http://schemas.microsoft.com/office/drawing/2014/main" id="{8E3A7365-ABF5-4DBB-8599-E23D17532449}"/>
+              </a:ext>
+            </a:extLst>
+          </p:cNvPr>
+          <p:cNvPicPr>
+            <a:picLocks noChangeAspect="1"/>
+          </p:cNvPicPr>
+          <p:nvPr/>
+        </p:nvPicPr>
+        <p:blipFill>
+          <a:blip r:embed="rId5"/>
+          <a:stretch>
+            <a:fillRect/>
+          </a:stretch>
+        </p:blipFill>
+        <p:spPr>
+          <a:xfrm>
+            <a:off x="5829771" y="2553037"/>
+            <a:ext cx="4458322" cy="2734057"/>
+          </a:xfrm>
+          <a:prstGeom prst="rect">
+            <a:avLst/>
+          </a:prstGeom>
+        </p:spPr>
+      </p:pic>
     </p:spTree>
     <p:extLst>
       <p:ext uri="{BB962C8B-B14F-4D97-AF65-F5344CB8AC3E}">
@@ -4007,6 +4067,355 @@
           </a:prstGeom>
         </p:spPr>
       </p:pic>
+      <p:pic>
+        <p:nvPicPr>
+          <p:cNvPr id="2" name="그림 1">
+            <a:extLst>
+              <a:ext uri="{FF2B5EF4-FFF2-40B4-BE49-F238E27FC236}">
+                <a16:creationId xmlns:a16="http://schemas.microsoft.com/office/drawing/2014/main" id="{FBB917FC-EBD1-4D76-BC6F-035A81245932}"/>
+              </a:ext>
+            </a:extLst>
+          </p:cNvPr>
+          <p:cNvPicPr>
+            <a:picLocks noChangeAspect="1"/>
+          </p:cNvPicPr>
+          <p:nvPr/>
+        </p:nvPicPr>
+        <p:blipFill>
+          <a:blip r:embed="rId4"/>
+          <a:stretch>
+            <a:fillRect/>
+          </a:stretch>
+        </p:blipFill>
+        <p:spPr>
+          <a:xfrm>
+            <a:off x="5879166" y="399627"/>
+            <a:ext cx="5801535" cy="3029373"/>
+          </a:xfrm>
+          <a:prstGeom prst="rect">
+            <a:avLst/>
+          </a:prstGeom>
+        </p:spPr>
+      </p:pic>
+      <mc:AlternateContent xmlns:mc="http://schemas.openxmlformats.org/markup-compatibility/2006">
+        <mc:Choice xmlns:a14="http://schemas.microsoft.com/office/drawing/2010/main" Requires="a14">
+          <p:sp>
+            <p:nvSpPr>
+              <p:cNvPr id="3" name="TextBox 2">
+                <a:extLst>
+                  <a:ext uri="{FF2B5EF4-FFF2-40B4-BE49-F238E27FC236}">
+                    <a16:creationId xmlns:a16="http://schemas.microsoft.com/office/drawing/2014/main" id="{C440CFF9-4168-451E-A332-218501110DB1}"/>
+                  </a:ext>
+                </a:extLst>
+              </p:cNvPr>
+              <p:cNvSpPr txBox="1"/>
+              <p:nvPr/>
+            </p:nvSpPr>
+            <p:spPr>
+              <a:xfrm>
+                <a:off x="1049867" y="5317067"/>
+                <a:ext cx="3776133" cy="848758"/>
+              </a:xfrm>
+              <a:prstGeom prst="rect">
+                <a:avLst/>
+              </a:prstGeom>
+              <a:noFill/>
+            </p:spPr>
+            <p:txBody>
+              <a:bodyPr wrap="square" rtlCol="0">
+                <a:spAutoFit/>
+              </a:bodyPr>
+              <a:lstStyle/>
+              <a:p>
+                <a14:m>
+                  <m:oMathPara xmlns:m="http://schemas.openxmlformats.org/officeDocument/2006/math">
+                    <m:oMathParaPr>
+                      <m:jc m:val="centerGroup"/>
+                    </m:oMathParaPr>
+                    <m:oMath xmlns:m="http://schemas.openxmlformats.org/officeDocument/2006/math">
+                      <m:r>
+                        <a:rPr lang="en-US" altLang="ko-KR" i="1" smtClean="0">
+                          <a:latin typeface="Cambria Math" panose="02040503050406030204" pitchFamily="18" charset="0"/>
+                        </a:rPr>
+                        <m:t>𝐴</m:t>
+                      </m:r>
+                      <m:r>
+                        <a:rPr lang="en-US" altLang="ko-KR" i="1" smtClean="0">
+                          <a:latin typeface="Cambria Math" panose="02040503050406030204" pitchFamily="18" charset="0"/>
+                        </a:rPr>
+                        <m:t>=</m:t>
+                      </m:r>
+                      <m:r>
+                        <a:rPr lang="el-GR" altLang="ko-KR" i="1" smtClean="0">
+                          <a:latin typeface="Cambria Math" panose="02040503050406030204" pitchFamily="18" charset="0"/>
+                        </a:rPr>
+                        <m:t>𝜋</m:t>
+                      </m:r>
+                      <m:sSup>
+                        <m:sSupPr>
+                          <m:ctrlPr>
+                            <a:rPr lang="en-US" altLang="ko-KR" i="1" smtClean="0">
+                              <a:latin typeface="Cambria Math" panose="02040503050406030204" pitchFamily="18" charset="0"/>
+                            </a:rPr>
+                          </m:ctrlPr>
+                        </m:sSupPr>
+                        <m:e>
+                          <m:r>
+                            <a:rPr lang="en-US" altLang="ko-KR" i="1" smtClean="0">
+                              <a:latin typeface="Cambria Math" panose="02040503050406030204" pitchFamily="18" charset="0"/>
+                            </a:rPr>
+                            <m:t>𝑟</m:t>
+                          </m:r>
+                        </m:e>
+                        <m:sup>
+                          <m:r>
+                            <a:rPr lang="en-US" altLang="ko-KR" i="1" smtClean="0">
+                              <a:latin typeface="Cambria Math" panose="02040503050406030204" pitchFamily="18" charset="0"/>
+                            </a:rPr>
+                            <m:t>2</m:t>
+                          </m:r>
+                        </m:sup>
+                      </m:sSup>
+                      <m:sSup>
+                        <m:sSupPr>
+                          <m:ctrlPr>
+                            <a:rPr lang="pt-BR" altLang="ko-KR" i="1" smtClean="0">
+                              <a:latin typeface="Cambria Math" panose="02040503050406030204" pitchFamily="18" charset="0"/>
+                            </a:rPr>
+                          </m:ctrlPr>
+                        </m:sSupPr>
+                        <m:e>
+                          <m:d>
+                            <m:dPr>
+                              <m:ctrlPr>
+                                <a:rPr lang="pt-BR" altLang="ko-KR" i="1" smtClean="0">
+                                  <a:latin typeface="Cambria Math" panose="02040503050406030204" pitchFamily="18" charset="0"/>
+                                </a:rPr>
+                              </m:ctrlPr>
+                            </m:dPr>
+                            <m:e>
+                              <m:r>
+                                <a:rPr lang="pt-BR" altLang="ko-KR" i="1" smtClean="0">
+                                  <a:latin typeface="Cambria Math" panose="02040503050406030204" pitchFamily="18" charset="0"/>
+                                </a:rPr>
+                                <m:t>𝑥</m:t>
+                              </m:r>
+                              <m:r>
+                                <a:rPr lang="pt-BR" altLang="ko-KR" i="1" smtClean="0">
+                                  <a:latin typeface="Cambria Math" panose="02040503050406030204" pitchFamily="18" charset="0"/>
+                                </a:rPr>
+                                <m:t>+</m:t>
+                              </m:r>
+                              <m:r>
+                                <a:rPr lang="pt-BR" altLang="ko-KR" i="1" smtClean="0">
+                                  <a:latin typeface="Cambria Math" panose="02040503050406030204" pitchFamily="18" charset="0"/>
+                                </a:rPr>
+                                <m:t>𝑎</m:t>
+                              </m:r>
+                            </m:e>
+                          </m:d>
+                        </m:e>
+                        <m:sup>
+                          <m:r>
+                            <a:rPr lang="pt-BR" altLang="ko-KR" i="1" smtClean="0">
+                              <a:latin typeface="Cambria Math" panose="02040503050406030204" pitchFamily="18" charset="0"/>
+                            </a:rPr>
+                            <m:t>𝑛</m:t>
+                          </m:r>
+                        </m:sup>
+                      </m:sSup>
+                      <m:r>
+                        <a:rPr lang="pt-BR" altLang="ko-KR" i="1" smtClean="0">
+                          <a:latin typeface="Cambria Math" panose="02040503050406030204" pitchFamily="18" charset="0"/>
+                        </a:rPr>
+                        <m:t>=</m:t>
+                      </m:r>
+                      <m:nary>
+                        <m:naryPr>
+                          <m:chr m:val="∑"/>
+                          <m:ctrlPr>
+                            <a:rPr lang="pt-BR" altLang="ko-KR" i="1" smtClean="0">
+                              <a:latin typeface="Cambria Math" panose="02040503050406030204" pitchFamily="18" charset="0"/>
+                            </a:rPr>
+                          </m:ctrlPr>
+                        </m:naryPr>
+                        <m:sub>
+                          <m:r>
+                            <a:rPr lang="pt-BR" altLang="ko-KR" i="1" smtClean="0">
+                              <a:latin typeface="Cambria Math" panose="02040503050406030204" pitchFamily="18" charset="0"/>
+                            </a:rPr>
+                            <m:t>𝑘</m:t>
+                          </m:r>
+                          <m:r>
+                            <a:rPr lang="pt-BR" altLang="ko-KR" i="1" smtClean="0">
+                              <a:latin typeface="Cambria Math" panose="02040503050406030204" pitchFamily="18" charset="0"/>
+                            </a:rPr>
+                            <m:t>=0</m:t>
+                          </m:r>
+                        </m:sub>
+                        <m:sup>
+                          <m:r>
+                            <a:rPr lang="pt-BR" altLang="ko-KR" i="1" smtClean="0">
+                              <a:latin typeface="Cambria Math" panose="02040503050406030204" pitchFamily="18" charset="0"/>
+                            </a:rPr>
+                            <m:t>𝑛</m:t>
+                          </m:r>
+                        </m:sup>
+                        <m:e>
+                          <m:d>
+                            <m:dPr>
+                              <m:ctrlPr>
+                                <a:rPr lang="pt-BR" altLang="ko-KR" i="1" smtClean="0">
+                                  <a:latin typeface="Cambria Math" panose="02040503050406030204" pitchFamily="18" charset="0"/>
+                                </a:rPr>
+                              </m:ctrlPr>
+                            </m:dPr>
+                            <m:e>
+                              <m:f>
+                                <m:fPr>
+                                  <m:type m:val="noBar"/>
+                                  <m:ctrlPr>
+                                    <a:rPr lang="pt-BR" altLang="ko-KR" i="1" smtClean="0">
+                                      <a:latin typeface="Cambria Math" panose="02040503050406030204" pitchFamily="18" charset="0"/>
+                                    </a:rPr>
+                                  </m:ctrlPr>
+                                </m:fPr>
+                                <m:num>
+                                  <m:r>
+                                    <a:rPr lang="pt-BR" altLang="ko-KR" i="1" smtClean="0">
+                                      <a:latin typeface="Cambria Math" panose="02040503050406030204" pitchFamily="18" charset="0"/>
+                                    </a:rPr>
+                                    <m:t>𝑛</m:t>
+                                  </m:r>
+                                </m:num>
+                                <m:den>
+                                  <m:r>
+                                    <a:rPr lang="pt-BR" altLang="ko-KR" i="1" smtClean="0">
+                                      <a:latin typeface="Cambria Math" panose="02040503050406030204" pitchFamily="18" charset="0"/>
+                                    </a:rPr>
+                                    <m:t>𝑘</m:t>
+                                  </m:r>
+                                </m:den>
+                              </m:f>
+                            </m:e>
+                          </m:d>
+                          <m:sSup>
+                            <m:sSupPr>
+                              <m:ctrlPr>
+                                <a:rPr lang="pt-BR" altLang="ko-KR" i="1" smtClean="0">
+                                  <a:latin typeface="Cambria Math" panose="02040503050406030204" pitchFamily="18" charset="0"/>
+                                </a:rPr>
+                              </m:ctrlPr>
+                            </m:sSupPr>
+                            <m:e>
+                              <m:r>
+                                <a:rPr lang="pt-BR" altLang="ko-KR" i="1" smtClean="0">
+                                  <a:latin typeface="Cambria Math" panose="02040503050406030204" pitchFamily="18" charset="0"/>
+                                </a:rPr>
+                                <m:t>𝑥</m:t>
+                              </m:r>
+                            </m:e>
+                            <m:sup>
+                              <m:r>
+                                <a:rPr lang="pt-BR" altLang="ko-KR" i="1" smtClean="0">
+                                  <a:latin typeface="Cambria Math" panose="02040503050406030204" pitchFamily="18" charset="0"/>
+                                </a:rPr>
+                                <m:t>𝑘</m:t>
+                              </m:r>
+                            </m:sup>
+                          </m:sSup>
+                          <m:sSup>
+                            <m:sSupPr>
+                              <m:ctrlPr>
+                                <a:rPr lang="pt-BR" altLang="ko-KR" i="1" smtClean="0">
+                                  <a:latin typeface="Cambria Math" panose="02040503050406030204" pitchFamily="18" charset="0"/>
+                                </a:rPr>
+                              </m:ctrlPr>
+                            </m:sSupPr>
+                            <m:e>
+                              <m:r>
+                                <a:rPr lang="pt-BR" altLang="ko-KR" i="1" smtClean="0">
+                                  <a:latin typeface="Cambria Math" panose="02040503050406030204" pitchFamily="18" charset="0"/>
+                                </a:rPr>
+                                <m:t>𝑎</m:t>
+                              </m:r>
+                            </m:e>
+                            <m:sup>
+                              <m:r>
+                                <a:rPr lang="pt-BR" altLang="ko-KR" i="1" smtClean="0">
+                                  <a:latin typeface="Cambria Math" panose="02040503050406030204" pitchFamily="18" charset="0"/>
+                                </a:rPr>
+                                <m:t>𝑛</m:t>
+                              </m:r>
+                              <m:r>
+                                <a:rPr lang="pt-BR" altLang="ko-KR" i="1" smtClean="0">
+                                  <a:latin typeface="Cambria Math" panose="02040503050406030204" pitchFamily="18" charset="0"/>
+                                </a:rPr>
+                                <m:t>−</m:t>
+                              </m:r>
+                              <m:r>
+                                <a:rPr lang="pt-BR" altLang="ko-KR" i="1" smtClean="0">
+                                  <a:latin typeface="Cambria Math" panose="02040503050406030204" pitchFamily="18" charset="0"/>
+                                </a:rPr>
+                                <m:t>𝑘</m:t>
+                              </m:r>
+                            </m:sup>
+                          </m:sSup>
+                        </m:e>
+                      </m:nary>
+                    </m:oMath>
+                  </m:oMathPara>
+                </a14:m>
+                <a:endParaRPr lang="ko-KR" altLang="en-US" dirty="0"/>
+              </a:p>
+            </p:txBody>
+          </p:sp>
+        </mc:Choice>
+        <mc:Fallback>
+          <p:sp>
+            <p:nvSpPr>
+              <p:cNvPr id="3" name="TextBox 2">
+                <a:extLst>
+                  <a:ext uri="{FF2B5EF4-FFF2-40B4-BE49-F238E27FC236}">
+                    <a16:creationId xmlns:a16="http://schemas.microsoft.com/office/drawing/2014/main" id="{C440CFF9-4168-451E-A332-218501110DB1}"/>
+                  </a:ext>
+                </a:extLst>
+              </p:cNvPr>
+              <p:cNvSpPr txBox="1">
+                <a:spLocks noRot="1" noChangeAspect="1" noMove="1" noResize="1" noEditPoints="1" noAdjustHandles="1" noChangeArrowheads="1" noChangeShapeType="1" noTextEdit="1"/>
+              </p:cNvSpPr>
+              <p:nvPr/>
+            </p:nvSpPr>
+            <p:spPr>
+              <a:xfrm>
+                <a:off x="1049867" y="5317067"/>
+                <a:ext cx="3776133" cy="848758"/>
+              </a:xfrm>
+              <a:prstGeom prst="rect">
+                <a:avLst/>
+              </a:prstGeom>
+              <a:blipFill>
+                <a:blip r:embed="rId5"/>
+                <a:stretch>
+                  <a:fillRect/>
+                </a:stretch>
+              </a:blipFill>
+            </p:spPr>
+            <p:txBody>
+              <a:bodyPr/>
+              <a:lstStyle/>
+              <a:p>
+                <a:r>
+                  <a:rPr lang="ko-KR" altLang="en-US">
+                    <a:noFill/>
+                  </a:rPr>
+                  <a:t> </a:t>
+                </a:r>
+              </a:p>
+            </p:txBody>
+          </p:sp>
+        </mc:Fallback>
+      </mc:AlternateContent>
     </p:spTree>
     <p:extLst>
       <p:ext uri="{BB962C8B-B14F-4D97-AF65-F5344CB8AC3E}">

--- a/image/이미지 생성용.pptx
+++ b/image/이미지 생성용.pptx
@@ -6,21 +6,22 @@
   </p:sldMasterIdLst>
   <p:sldIdLst>
     <p:sldId id="256" r:id="rId2"/>
-    <p:sldId id="271" r:id="rId3"/>
-    <p:sldId id="270" r:id="rId4"/>
-    <p:sldId id="268" r:id="rId5"/>
-    <p:sldId id="269" r:id="rId6"/>
-    <p:sldId id="267" r:id="rId7"/>
-    <p:sldId id="265" r:id="rId8"/>
-    <p:sldId id="266" r:id="rId9"/>
-    <p:sldId id="264" r:id="rId10"/>
-    <p:sldId id="263" r:id="rId11"/>
-    <p:sldId id="261" r:id="rId12"/>
-    <p:sldId id="262" r:id="rId13"/>
-    <p:sldId id="257" r:id="rId14"/>
-    <p:sldId id="258" r:id="rId15"/>
-    <p:sldId id="259" r:id="rId16"/>
-    <p:sldId id="260" r:id="rId17"/>
+    <p:sldId id="272" r:id="rId3"/>
+    <p:sldId id="271" r:id="rId4"/>
+    <p:sldId id="270" r:id="rId5"/>
+    <p:sldId id="268" r:id="rId6"/>
+    <p:sldId id="269" r:id="rId7"/>
+    <p:sldId id="267" r:id="rId8"/>
+    <p:sldId id="265" r:id="rId9"/>
+    <p:sldId id="266" r:id="rId10"/>
+    <p:sldId id="264" r:id="rId11"/>
+    <p:sldId id="263" r:id="rId12"/>
+    <p:sldId id="261" r:id="rId13"/>
+    <p:sldId id="262" r:id="rId14"/>
+    <p:sldId id="257" r:id="rId15"/>
+    <p:sldId id="258" r:id="rId16"/>
+    <p:sldId id="259" r:id="rId17"/>
+    <p:sldId id="260" r:id="rId18"/>
   </p:sldIdLst>
   <p:sldSz cx="12192000" cy="6858000"/>
   <p:notesSz cx="6858000" cy="9144000"/>
@@ -256,7 +257,7 @@
           <a:p>
             <a:fld id="{F0CD9246-440E-46C2-946E-50CD81230ED2}" type="datetimeFigureOut">
               <a:rPr lang="ko-KR" altLang="en-US" smtClean="0"/>
-              <a:t>2026-02-08</a:t>
+              <a:t>2026-02-09</a:t>
             </a:fld>
             <a:endParaRPr lang="ko-KR" altLang="en-US"/>
           </a:p>
@@ -424,7 +425,7 @@
           <a:p>
             <a:fld id="{F0CD9246-440E-46C2-946E-50CD81230ED2}" type="datetimeFigureOut">
               <a:rPr lang="ko-KR" altLang="en-US" smtClean="0"/>
-              <a:t>2026-02-08</a:t>
+              <a:t>2026-02-09</a:t>
             </a:fld>
             <a:endParaRPr lang="ko-KR" altLang="en-US"/>
           </a:p>
@@ -602,7 +603,7 @@
           <a:p>
             <a:fld id="{F0CD9246-440E-46C2-946E-50CD81230ED2}" type="datetimeFigureOut">
               <a:rPr lang="ko-KR" altLang="en-US" smtClean="0"/>
-              <a:t>2026-02-08</a:t>
+              <a:t>2026-02-09</a:t>
             </a:fld>
             <a:endParaRPr lang="ko-KR" altLang="en-US"/>
           </a:p>
@@ -770,7 +771,7 @@
           <a:p>
             <a:fld id="{F0CD9246-440E-46C2-946E-50CD81230ED2}" type="datetimeFigureOut">
               <a:rPr lang="ko-KR" altLang="en-US" smtClean="0"/>
-              <a:t>2026-02-08</a:t>
+              <a:t>2026-02-09</a:t>
             </a:fld>
             <a:endParaRPr lang="ko-KR" altLang="en-US"/>
           </a:p>
@@ -1015,7 +1016,7 @@
           <a:p>
             <a:fld id="{F0CD9246-440E-46C2-946E-50CD81230ED2}" type="datetimeFigureOut">
               <a:rPr lang="ko-KR" altLang="en-US" smtClean="0"/>
-              <a:t>2026-02-08</a:t>
+              <a:t>2026-02-09</a:t>
             </a:fld>
             <a:endParaRPr lang="ko-KR" altLang="en-US"/>
           </a:p>
@@ -1244,7 +1245,7 @@
           <a:p>
             <a:fld id="{F0CD9246-440E-46C2-946E-50CD81230ED2}" type="datetimeFigureOut">
               <a:rPr lang="ko-KR" altLang="en-US" smtClean="0"/>
-              <a:t>2026-02-08</a:t>
+              <a:t>2026-02-09</a:t>
             </a:fld>
             <a:endParaRPr lang="ko-KR" altLang="en-US"/>
           </a:p>
@@ -1608,7 +1609,7 @@
           <a:p>
             <a:fld id="{F0CD9246-440E-46C2-946E-50CD81230ED2}" type="datetimeFigureOut">
               <a:rPr lang="ko-KR" altLang="en-US" smtClean="0"/>
-              <a:t>2026-02-08</a:t>
+              <a:t>2026-02-09</a:t>
             </a:fld>
             <a:endParaRPr lang="ko-KR" altLang="en-US"/>
           </a:p>
@@ -1725,7 +1726,7 @@
           <a:p>
             <a:fld id="{F0CD9246-440E-46C2-946E-50CD81230ED2}" type="datetimeFigureOut">
               <a:rPr lang="ko-KR" altLang="en-US" smtClean="0"/>
-              <a:t>2026-02-08</a:t>
+              <a:t>2026-02-09</a:t>
             </a:fld>
             <a:endParaRPr lang="ko-KR" altLang="en-US"/>
           </a:p>
@@ -1820,7 +1821,7 @@
           <a:p>
             <a:fld id="{F0CD9246-440E-46C2-946E-50CD81230ED2}" type="datetimeFigureOut">
               <a:rPr lang="ko-KR" altLang="en-US" smtClean="0"/>
-              <a:t>2026-02-08</a:t>
+              <a:t>2026-02-09</a:t>
             </a:fld>
             <a:endParaRPr lang="ko-KR" altLang="en-US"/>
           </a:p>
@@ -2095,7 +2096,7 @@
           <a:p>
             <a:fld id="{F0CD9246-440E-46C2-946E-50CD81230ED2}" type="datetimeFigureOut">
               <a:rPr lang="ko-KR" altLang="en-US" smtClean="0"/>
-              <a:t>2026-02-08</a:t>
+              <a:t>2026-02-09</a:t>
             </a:fld>
             <a:endParaRPr lang="ko-KR" altLang="en-US"/>
           </a:p>
@@ -2347,7 +2348,7 @@
           <a:p>
             <a:fld id="{F0CD9246-440E-46C2-946E-50CD81230ED2}" type="datetimeFigureOut">
               <a:rPr lang="ko-KR" altLang="en-US" smtClean="0"/>
-              <a:t>2026-02-08</a:t>
+              <a:t>2026-02-09</a:t>
             </a:fld>
             <a:endParaRPr lang="ko-KR" altLang="en-US"/>
           </a:p>
@@ -2558,7 +2559,7 @@
           <a:p>
             <a:fld id="{F0CD9246-440E-46C2-946E-50CD81230ED2}" type="datetimeFigureOut">
               <a:rPr lang="ko-KR" altLang="en-US" smtClean="0"/>
-              <a:t>2026-02-08</a:t>
+              <a:t>2026-02-09</a:t>
             </a:fld>
             <a:endParaRPr lang="ko-KR" altLang="en-US"/>
           </a:p>
@@ -3091,7 +3092,7 @@
       </p:grpSpPr>
       <p:pic>
         <p:nvPicPr>
-          <p:cNvPr id="4" name="그림 3"/>
+          <p:cNvPr id="2" name="그림 1"/>
           <p:cNvPicPr>
             <a:picLocks noChangeAspect="1"/>
           </p:cNvPicPr>
@@ -3105,8 +3106,8 @@
         </p:blipFill>
         <p:spPr>
           <a:xfrm>
-            <a:off x="655793" y="311328"/>
-            <a:ext cx="5944430" cy="2524477"/>
+            <a:off x="313513" y="293630"/>
+            <a:ext cx="7001852" cy="3696216"/>
           </a:xfrm>
           <a:prstGeom prst="rect">
             <a:avLst/>
@@ -3115,7 +3116,7 @@
       </p:pic>
       <p:pic>
         <p:nvPicPr>
-          <p:cNvPr id="5" name="그림 4"/>
+          <p:cNvPr id="3" name="그림 2"/>
           <p:cNvPicPr>
             <a:picLocks noChangeAspect="1"/>
           </p:cNvPicPr>
@@ -3129,32 +3130,8 @@
         </p:blipFill>
         <p:spPr>
           <a:xfrm>
-            <a:off x="543627" y="3097193"/>
-            <a:ext cx="5849166" cy="2705478"/>
-          </a:xfrm>
-          <a:prstGeom prst="rect">
-            <a:avLst/>
-          </a:prstGeom>
-        </p:spPr>
-      </p:pic>
-      <p:pic>
-        <p:nvPicPr>
-          <p:cNvPr id="2" name="그림 1"/>
-          <p:cNvPicPr>
-            <a:picLocks noChangeAspect="1"/>
-          </p:cNvPicPr>
-          <p:nvPr/>
-        </p:nvPicPr>
-        <p:blipFill>
-          <a:blip r:embed="rId4"/>
-          <a:stretch>
-            <a:fillRect/>
-          </a:stretch>
-        </p:blipFill>
-        <p:spPr>
-          <a:xfrm>
-            <a:off x="5565050" y="454222"/>
-            <a:ext cx="5839640" cy="2238687"/>
+            <a:off x="3300022" y="656838"/>
+            <a:ext cx="5591955" cy="5544324"/>
           </a:xfrm>
           <a:prstGeom prst="rect">
             <a:avLst/>
@@ -3164,7 +3141,7 @@
     </p:spTree>
     <p:extLst>
       <p:ext uri="{BB962C8B-B14F-4D97-AF65-F5344CB8AC3E}">
-        <p14:creationId xmlns:p14="http://schemas.microsoft.com/office/powerpoint/2010/main" val="887493065"/>
+        <p14:creationId xmlns:p14="http://schemas.microsoft.com/office/powerpoint/2010/main" val="2656977250"/>
       </p:ext>
     </p:extLst>
   </p:cSld>
@@ -3207,8 +3184,8 @@
         </p:blipFill>
         <p:spPr>
           <a:xfrm>
-            <a:off x="280392" y="278487"/>
-            <a:ext cx="4315427" cy="2406351"/>
+            <a:off x="655793" y="311328"/>
+            <a:ext cx="5944430" cy="2524477"/>
           </a:xfrm>
           <a:prstGeom prst="rect">
             <a:avLst/>
@@ -3231,71 +3208,32 @@
         </p:blipFill>
         <p:spPr>
           <a:xfrm>
-            <a:off x="5312126" y="373818"/>
-            <a:ext cx="3326594" cy="2709288"/>
+            <a:off x="543627" y="3097193"/>
+            <a:ext cx="5849166" cy="2705478"/>
           </a:xfrm>
           <a:prstGeom prst="rect">
             <a:avLst/>
           </a:prstGeom>
         </p:spPr>
       </p:pic>
-      <p:sp>
-        <p:nvSpPr>
-          <p:cNvPr id="2" name="직사각형 1"/>
-          <p:cNvSpPr/>
-          <p:nvPr/>
-        </p:nvSpPr>
-        <p:spPr>
-          <a:xfrm>
-            <a:off x="4167427" y="3244334"/>
-            <a:ext cx="3857146" cy="369332"/>
-          </a:xfrm>
-          <a:prstGeom prst="rect">
-            <a:avLst/>
-          </a:prstGeom>
-        </p:spPr>
-        <p:txBody>
-          <a:bodyPr wrap="none">
-            <a:spAutoFit/>
-          </a:bodyPr>
-          <a:lstStyle/>
-          <a:p>
-            <a:r>
-              <a:rPr lang="en-US" altLang="ko-KR" dirty="0">
-                <a:solidFill>
-                  <a:srgbClr val="CCCCCC"/>
-                </a:solidFill>
-                <a:latin typeface="Consolas" panose="020B0609020204030204" pitchFamily="49" charset="0"/>
-              </a:rPr>
-              <a:t>03_04_bertviz_neuron_view.png</a:t>
-            </a:r>
-            <a:endParaRPr lang="en-US" altLang="ko-KR" b="0" dirty="0">
-              <a:solidFill>
-                <a:srgbClr val="CCCCCC"/>
-              </a:solidFill>
-              <a:effectLst/>
-              <a:latin typeface="Consolas" panose="020B0609020204030204" pitchFamily="49" charset="0"/>
-            </a:endParaRPr>
-          </a:p>
-        </p:txBody>
-      </p:sp>
       <p:pic>
         <p:nvPicPr>
-          <p:cNvPr id="3" name="그림 2"/>
+          <p:cNvPr id="2" name="그림 1"/>
           <p:cNvPicPr>
             <a:picLocks noChangeAspect="1"/>
           </p:cNvPicPr>
           <p:nvPr/>
         </p:nvPicPr>
-        <p:blipFill rotWithShape="1">
+        <p:blipFill>
           <a:blip r:embed="rId4"/>
-          <a:srcRect t="14277"/>
-          <a:stretch/>
+          <a:stretch>
+            <a:fillRect/>
+          </a:stretch>
         </p:blipFill>
         <p:spPr>
           <a:xfrm>
-            <a:off x="1185915" y="3879541"/>
-            <a:ext cx="7192379" cy="2327387"/>
+            <a:off x="5565050" y="454222"/>
+            <a:ext cx="5839640" cy="2238687"/>
           </a:xfrm>
           <a:prstGeom prst="rect">
             <a:avLst/>
@@ -3305,7 +3243,7 @@
     </p:spTree>
     <p:extLst>
       <p:ext uri="{BB962C8B-B14F-4D97-AF65-F5344CB8AC3E}">
-        <p14:creationId xmlns:p14="http://schemas.microsoft.com/office/powerpoint/2010/main" val="4024031726"/>
+        <p14:creationId xmlns:p14="http://schemas.microsoft.com/office/powerpoint/2010/main" val="887493065"/>
       </p:ext>
     </p:extLst>
   </p:cSld>
@@ -3446,7 +3384,7 @@
     </p:spTree>
     <p:extLst>
       <p:ext uri="{BB962C8B-B14F-4D97-AF65-F5344CB8AC3E}">
-        <p14:creationId xmlns:p14="http://schemas.microsoft.com/office/powerpoint/2010/main" val="1575043608"/>
+        <p14:creationId xmlns:p14="http://schemas.microsoft.com/office/powerpoint/2010/main" val="4024031726"/>
       </p:ext>
     </p:extLst>
   </p:cSld>
@@ -3489,8 +3427,8 @@
         </p:blipFill>
         <p:spPr>
           <a:xfrm>
-            <a:off x="299547" y="371100"/>
-            <a:ext cx="4212543" cy="3235141"/>
+            <a:off x="280392" y="278487"/>
+            <a:ext cx="4315427" cy="2406351"/>
           </a:xfrm>
           <a:prstGeom prst="rect">
             <a:avLst/>
@@ -3513,56 +3451,71 @@
         </p:blipFill>
         <p:spPr>
           <a:xfrm>
-            <a:off x="609134" y="4167072"/>
-            <a:ext cx="4001059" cy="1000265"/>
+            <a:off x="5312126" y="373818"/>
+            <a:ext cx="3326594" cy="2709288"/>
           </a:xfrm>
           <a:prstGeom prst="rect">
             <a:avLst/>
           </a:prstGeom>
         </p:spPr>
       </p:pic>
+      <p:sp>
+        <p:nvSpPr>
+          <p:cNvPr id="2" name="직사각형 1"/>
+          <p:cNvSpPr/>
+          <p:nvPr/>
+        </p:nvSpPr>
+        <p:spPr>
+          <a:xfrm>
+            <a:off x="4167427" y="3244334"/>
+            <a:ext cx="3857146" cy="369332"/>
+          </a:xfrm>
+          <a:prstGeom prst="rect">
+            <a:avLst/>
+          </a:prstGeom>
+        </p:spPr>
+        <p:txBody>
+          <a:bodyPr wrap="none">
+            <a:spAutoFit/>
+          </a:bodyPr>
+          <a:lstStyle/>
+          <a:p>
+            <a:r>
+              <a:rPr lang="en-US" altLang="ko-KR" dirty="0">
+                <a:solidFill>
+                  <a:srgbClr val="CCCCCC"/>
+                </a:solidFill>
+                <a:latin typeface="Consolas" panose="020B0609020204030204" pitchFamily="49" charset="0"/>
+              </a:rPr>
+              <a:t>03_04_bertviz_neuron_view.png</a:t>
+            </a:r>
+            <a:endParaRPr lang="en-US" altLang="ko-KR" b="0" dirty="0">
+              <a:solidFill>
+                <a:srgbClr val="CCCCCC"/>
+              </a:solidFill>
+              <a:effectLst/>
+              <a:latin typeface="Consolas" panose="020B0609020204030204" pitchFamily="49" charset="0"/>
+            </a:endParaRPr>
+          </a:p>
+        </p:txBody>
+      </p:sp>
       <p:pic>
         <p:nvPicPr>
-          <p:cNvPr id="6" name="그림 5"/>
+          <p:cNvPr id="3" name="그림 2"/>
           <p:cNvPicPr>
             <a:picLocks noChangeAspect="1"/>
           </p:cNvPicPr>
           <p:nvPr/>
         </p:nvPicPr>
-        <p:blipFill>
+        <p:blipFill rotWithShape="1">
           <a:blip r:embed="rId4"/>
-          <a:stretch>
-            <a:fillRect/>
-          </a:stretch>
+          <a:srcRect t="14277"/>
+          <a:stretch/>
         </p:blipFill>
         <p:spPr>
           <a:xfrm>
-            <a:off x="5495647" y="371100"/>
-            <a:ext cx="2389204" cy="2389204"/>
-          </a:xfrm>
-          <a:prstGeom prst="rect">
-            <a:avLst/>
-          </a:prstGeom>
-        </p:spPr>
-      </p:pic>
-      <p:pic>
-        <p:nvPicPr>
-          <p:cNvPr id="7" name="그림 6"/>
-          <p:cNvPicPr>
-            <a:picLocks noChangeAspect="1"/>
-          </p:cNvPicPr>
-          <p:nvPr/>
-        </p:nvPicPr>
-        <p:blipFill>
-          <a:blip r:embed="rId5"/>
-          <a:stretch>
-            <a:fillRect/>
-          </a:stretch>
-        </p:blipFill>
-        <p:spPr>
-          <a:xfrm>
-            <a:off x="5323983" y="3002913"/>
-            <a:ext cx="4229690" cy="2172003"/>
+            <a:off x="1185915" y="3879541"/>
+            <a:ext cx="7192379" cy="2327387"/>
           </a:xfrm>
           <a:prstGeom prst="rect">
             <a:avLst/>
@@ -3572,7 +3525,7 @@
     </p:spTree>
     <p:extLst>
       <p:ext uri="{BB962C8B-B14F-4D97-AF65-F5344CB8AC3E}">
-        <p14:creationId xmlns:p14="http://schemas.microsoft.com/office/powerpoint/2010/main" val="2628583716"/>
+        <p14:creationId xmlns:p14="http://schemas.microsoft.com/office/powerpoint/2010/main" val="1575043608"/>
       </p:ext>
     </p:extLst>
   </p:cSld>
@@ -3615,8 +3568,80 @@
         </p:blipFill>
         <p:spPr>
           <a:xfrm>
-            <a:off x="813880" y="385493"/>
-            <a:ext cx="7268589" cy="3858163"/>
+            <a:off x="299547" y="371100"/>
+            <a:ext cx="4212543" cy="3235141"/>
+          </a:xfrm>
+          <a:prstGeom prst="rect">
+            <a:avLst/>
+          </a:prstGeom>
+        </p:spPr>
+      </p:pic>
+      <p:pic>
+        <p:nvPicPr>
+          <p:cNvPr id="5" name="그림 4"/>
+          <p:cNvPicPr>
+            <a:picLocks noChangeAspect="1"/>
+          </p:cNvPicPr>
+          <p:nvPr/>
+        </p:nvPicPr>
+        <p:blipFill>
+          <a:blip r:embed="rId3"/>
+          <a:stretch>
+            <a:fillRect/>
+          </a:stretch>
+        </p:blipFill>
+        <p:spPr>
+          <a:xfrm>
+            <a:off x="609134" y="4167072"/>
+            <a:ext cx="4001059" cy="1000265"/>
+          </a:xfrm>
+          <a:prstGeom prst="rect">
+            <a:avLst/>
+          </a:prstGeom>
+        </p:spPr>
+      </p:pic>
+      <p:pic>
+        <p:nvPicPr>
+          <p:cNvPr id="6" name="그림 5"/>
+          <p:cNvPicPr>
+            <a:picLocks noChangeAspect="1"/>
+          </p:cNvPicPr>
+          <p:nvPr/>
+        </p:nvPicPr>
+        <p:blipFill>
+          <a:blip r:embed="rId4"/>
+          <a:stretch>
+            <a:fillRect/>
+          </a:stretch>
+        </p:blipFill>
+        <p:spPr>
+          <a:xfrm>
+            <a:off x="5495647" y="371100"/>
+            <a:ext cx="2389204" cy="2389204"/>
+          </a:xfrm>
+          <a:prstGeom prst="rect">
+            <a:avLst/>
+          </a:prstGeom>
+        </p:spPr>
+      </p:pic>
+      <p:pic>
+        <p:nvPicPr>
+          <p:cNvPr id="7" name="그림 6"/>
+          <p:cNvPicPr>
+            <a:picLocks noChangeAspect="1"/>
+          </p:cNvPicPr>
+          <p:nvPr/>
+        </p:nvPicPr>
+        <p:blipFill>
+          <a:blip r:embed="rId5"/>
+          <a:stretch>
+            <a:fillRect/>
+          </a:stretch>
+        </p:blipFill>
+        <p:spPr>
+          <a:xfrm>
+            <a:off x="5323983" y="3002913"/>
+            <a:ext cx="4229690" cy="2172003"/>
           </a:xfrm>
           <a:prstGeom prst="rect">
             <a:avLst/>
@@ -3626,7 +3651,7 @@
     </p:spTree>
     <p:extLst>
       <p:ext uri="{BB962C8B-B14F-4D97-AF65-F5344CB8AC3E}">
-        <p14:creationId xmlns:p14="http://schemas.microsoft.com/office/powerpoint/2010/main" val="2668780768"/>
+        <p14:creationId xmlns:p14="http://schemas.microsoft.com/office/powerpoint/2010/main" val="2628583716"/>
       </p:ext>
     </p:extLst>
   </p:cSld>
@@ -3669,104 +3694,8 @@
         </p:blipFill>
         <p:spPr>
           <a:xfrm>
-            <a:off x="656405" y="419195"/>
-            <a:ext cx="3086531" cy="1960519"/>
-          </a:xfrm>
-          <a:prstGeom prst="rect">
-            <a:avLst/>
-          </a:prstGeom>
-        </p:spPr>
-      </p:pic>
-      <p:pic>
-        <p:nvPicPr>
-          <p:cNvPr id="5" name="그림 4"/>
-          <p:cNvPicPr>
-            <a:picLocks noChangeAspect="1"/>
-          </p:cNvPicPr>
-          <p:nvPr/>
-        </p:nvPicPr>
-        <p:blipFill>
-          <a:blip r:embed="rId3"/>
-          <a:stretch>
-            <a:fillRect/>
-          </a:stretch>
-        </p:blipFill>
-        <p:spPr>
-          <a:xfrm>
-            <a:off x="656405" y="2630478"/>
-            <a:ext cx="7182852" cy="1171739"/>
-          </a:xfrm>
-          <a:prstGeom prst="rect">
-            <a:avLst/>
-          </a:prstGeom>
-        </p:spPr>
-      </p:pic>
-      <p:pic>
-        <p:nvPicPr>
-          <p:cNvPr id="2" name="그림 1"/>
-          <p:cNvPicPr>
-            <a:picLocks noChangeAspect="1"/>
-          </p:cNvPicPr>
-          <p:nvPr/>
-        </p:nvPicPr>
-        <p:blipFill>
-          <a:blip r:embed="rId4"/>
-          <a:stretch>
-            <a:fillRect/>
-          </a:stretch>
-        </p:blipFill>
-        <p:spPr>
-          <a:xfrm>
-            <a:off x="4156895" y="251531"/>
-            <a:ext cx="4212543" cy="1377507"/>
-          </a:xfrm>
-          <a:prstGeom prst="rect">
-            <a:avLst/>
-          </a:prstGeom>
-        </p:spPr>
-      </p:pic>
-      <p:pic>
-        <p:nvPicPr>
-          <p:cNvPr id="3" name="그림 2"/>
-          <p:cNvPicPr>
-            <a:picLocks noChangeAspect="1"/>
-          </p:cNvPicPr>
-          <p:nvPr/>
-        </p:nvPicPr>
-        <p:blipFill>
-          <a:blip r:embed="rId5"/>
-          <a:stretch>
-            <a:fillRect/>
-          </a:stretch>
-        </p:blipFill>
-        <p:spPr>
-          <a:xfrm>
-            <a:off x="656405" y="4332329"/>
-            <a:ext cx="3801005" cy="1863350"/>
-          </a:xfrm>
-          <a:prstGeom prst="rect">
-            <a:avLst/>
-          </a:prstGeom>
-        </p:spPr>
-      </p:pic>
-      <p:pic>
-        <p:nvPicPr>
-          <p:cNvPr id="6" name="그림 5"/>
-          <p:cNvPicPr>
-            <a:picLocks noChangeAspect="1"/>
-          </p:cNvPicPr>
-          <p:nvPr/>
-        </p:nvPicPr>
-        <p:blipFill>
-          <a:blip r:embed="rId6"/>
-          <a:stretch>
-            <a:fillRect/>
-          </a:stretch>
-        </p:blipFill>
-        <p:spPr>
-          <a:xfrm>
-            <a:off x="5161177" y="4220871"/>
-            <a:ext cx="4183964" cy="2086266"/>
+            <a:off x="813880" y="385493"/>
+            <a:ext cx="7268589" cy="3858163"/>
           </a:xfrm>
           <a:prstGeom prst="rect">
             <a:avLst/>
@@ -3776,7 +3705,7 @@
     </p:spTree>
     <p:extLst>
       <p:ext uri="{BB962C8B-B14F-4D97-AF65-F5344CB8AC3E}">
-        <p14:creationId xmlns:p14="http://schemas.microsoft.com/office/powerpoint/2010/main" val="2672974803"/>
+        <p14:creationId xmlns:p14="http://schemas.microsoft.com/office/powerpoint/2010/main" val="2668780768"/>
       </p:ext>
     </p:extLst>
   </p:cSld>
@@ -3819,6 +3748,156 @@
         </p:blipFill>
         <p:spPr>
           <a:xfrm>
+            <a:off x="656405" y="419195"/>
+            <a:ext cx="3086531" cy="1960519"/>
+          </a:xfrm>
+          <a:prstGeom prst="rect">
+            <a:avLst/>
+          </a:prstGeom>
+        </p:spPr>
+      </p:pic>
+      <p:pic>
+        <p:nvPicPr>
+          <p:cNvPr id="5" name="그림 4"/>
+          <p:cNvPicPr>
+            <a:picLocks noChangeAspect="1"/>
+          </p:cNvPicPr>
+          <p:nvPr/>
+        </p:nvPicPr>
+        <p:blipFill>
+          <a:blip r:embed="rId3"/>
+          <a:stretch>
+            <a:fillRect/>
+          </a:stretch>
+        </p:blipFill>
+        <p:spPr>
+          <a:xfrm>
+            <a:off x="656405" y="2630478"/>
+            <a:ext cx="7182852" cy="1171739"/>
+          </a:xfrm>
+          <a:prstGeom prst="rect">
+            <a:avLst/>
+          </a:prstGeom>
+        </p:spPr>
+      </p:pic>
+      <p:pic>
+        <p:nvPicPr>
+          <p:cNvPr id="2" name="그림 1"/>
+          <p:cNvPicPr>
+            <a:picLocks noChangeAspect="1"/>
+          </p:cNvPicPr>
+          <p:nvPr/>
+        </p:nvPicPr>
+        <p:blipFill>
+          <a:blip r:embed="rId4"/>
+          <a:stretch>
+            <a:fillRect/>
+          </a:stretch>
+        </p:blipFill>
+        <p:spPr>
+          <a:xfrm>
+            <a:off x="4156895" y="251531"/>
+            <a:ext cx="4212543" cy="1377507"/>
+          </a:xfrm>
+          <a:prstGeom prst="rect">
+            <a:avLst/>
+          </a:prstGeom>
+        </p:spPr>
+      </p:pic>
+      <p:pic>
+        <p:nvPicPr>
+          <p:cNvPr id="3" name="그림 2"/>
+          <p:cNvPicPr>
+            <a:picLocks noChangeAspect="1"/>
+          </p:cNvPicPr>
+          <p:nvPr/>
+        </p:nvPicPr>
+        <p:blipFill>
+          <a:blip r:embed="rId5"/>
+          <a:stretch>
+            <a:fillRect/>
+          </a:stretch>
+        </p:blipFill>
+        <p:spPr>
+          <a:xfrm>
+            <a:off x="656405" y="4332329"/>
+            <a:ext cx="3801005" cy="1863350"/>
+          </a:xfrm>
+          <a:prstGeom prst="rect">
+            <a:avLst/>
+          </a:prstGeom>
+        </p:spPr>
+      </p:pic>
+      <p:pic>
+        <p:nvPicPr>
+          <p:cNvPr id="6" name="그림 5"/>
+          <p:cNvPicPr>
+            <a:picLocks noChangeAspect="1"/>
+          </p:cNvPicPr>
+          <p:nvPr/>
+        </p:nvPicPr>
+        <p:blipFill>
+          <a:blip r:embed="rId6"/>
+          <a:stretch>
+            <a:fillRect/>
+          </a:stretch>
+        </p:blipFill>
+        <p:spPr>
+          <a:xfrm>
+            <a:off x="5161177" y="4220871"/>
+            <a:ext cx="4183964" cy="2086266"/>
+          </a:xfrm>
+          <a:prstGeom prst="rect">
+            <a:avLst/>
+          </a:prstGeom>
+        </p:spPr>
+      </p:pic>
+    </p:spTree>
+    <p:extLst>
+      <p:ext uri="{BB962C8B-B14F-4D97-AF65-F5344CB8AC3E}">
+        <p14:creationId xmlns:p14="http://schemas.microsoft.com/office/powerpoint/2010/main" val="2672974803"/>
+      </p:ext>
+    </p:extLst>
+  </p:cSld>
+  <p:clrMapOvr>
+    <a:masterClrMapping/>
+  </p:clrMapOvr>
+</p:sld>
+</file>
+
+<file path=ppt/slides/slide17.xml><?xml version="1.0" encoding="utf-8"?>
+<p:sld xmlns:a="http://schemas.openxmlformats.org/drawingml/2006/main" xmlns:r="http://schemas.openxmlformats.org/officeDocument/2006/relationships" xmlns:p="http://schemas.openxmlformats.org/presentationml/2006/main">
+  <p:cSld>
+    <p:spTree>
+      <p:nvGrpSpPr>
+        <p:cNvPr id="1" name=""/>
+        <p:cNvGrpSpPr/>
+        <p:nvPr/>
+      </p:nvGrpSpPr>
+      <p:grpSpPr>
+        <a:xfrm>
+          <a:off x="0" y="0"/>
+          <a:ext cx="0" cy="0"/>
+          <a:chOff x="0" y="0"/>
+          <a:chExt cx="0" cy="0"/>
+        </a:xfrm>
+      </p:grpSpPr>
+      <p:pic>
+        <p:nvPicPr>
+          <p:cNvPr id="4" name="그림 3"/>
+          <p:cNvPicPr>
+            <a:picLocks noChangeAspect="1"/>
+          </p:cNvPicPr>
+          <p:nvPr/>
+        </p:nvPicPr>
+        <p:blipFill>
+          <a:blip r:embed="rId2"/>
+          <a:stretch>
+            <a:fillRect/>
+          </a:stretch>
+        </p:blipFill>
+        <p:spPr>
+          <a:xfrm>
             <a:off x="264100" y="165653"/>
             <a:ext cx="3663826" cy="2126277"/>
           </a:xfrm>
@@ -3862,6 +3941,66 @@
           <p:cNvPr id="4" name="그림 3">
             <a:extLst>
               <a:ext uri="{FF2B5EF4-FFF2-40B4-BE49-F238E27FC236}">
+                <a16:creationId xmlns:a16="http://schemas.microsoft.com/office/drawing/2014/main" id="{6571A0A2-6599-418B-8B15-5D27BA2E7877}"/>
+              </a:ext>
+            </a:extLst>
+          </p:cNvPr>
+          <p:cNvPicPr>
+            <a:picLocks noChangeAspect="1"/>
+          </p:cNvPicPr>
+          <p:nvPr/>
+        </p:nvPicPr>
+        <p:blipFill>
+          <a:blip r:embed="rId2"/>
+          <a:stretch>
+            <a:fillRect/>
+          </a:stretch>
+        </p:blipFill>
+        <p:spPr>
+          <a:xfrm>
+            <a:off x="476458" y="244282"/>
+            <a:ext cx="4601217" cy="2762636"/>
+          </a:xfrm>
+          <a:prstGeom prst="rect">
+            <a:avLst/>
+          </a:prstGeom>
+        </p:spPr>
+      </p:pic>
+    </p:spTree>
+    <p:extLst>
+      <p:ext uri="{BB962C8B-B14F-4D97-AF65-F5344CB8AC3E}">
+        <p14:creationId xmlns:p14="http://schemas.microsoft.com/office/powerpoint/2010/main" val="1643956684"/>
+      </p:ext>
+    </p:extLst>
+  </p:cSld>
+  <p:clrMapOvr>
+    <a:masterClrMapping/>
+  </p:clrMapOvr>
+</p:sld>
+</file>
+
+<file path=ppt/slides/slide3.xml><?xml version="1.0" encoding="utf-8"?>
+<p:sld xmlns:a="http://schemas.openxmlformats.org/drawingml/2006/main" xmlns:r="http://schemas.openxmlformats.org/officeDocument/2006/relationships" xmlns:p="http://schemas.openxmlformats.org/presentationml/2006/main">
+  <p:cSld>
+    <p:spTree>
+      <p:nvGrpSpPr>
+        <p:cNvPr id="1" name=""/>
+        <p:cNvGrpSpPr/>
+        <p:nvPr/>
+      </p:nvGrpSpPr>
+      <p:grpSpPr>
+        <a:xfrm>
+          <a:off x="0" y="0"/>
+          <a:ext cx="0" cy="0"/>
+          <a:chOff x="0" y="0"/>
+          <a:chExt cx="0" cy="0"/>
+        </a:xfrm>
+      </p:grpSpPr>
+      <p:pic>
+        <p:nvPicPr>
+          <p:cNvPr id="4" name="그림 3">
+            <a:extLst>
+              <a:ext uri="{FF2B5EF4-FFF2-40B4-BE49-F238E27FC236}">
                 <a16:creationId xmlns:a16="http://schemas.microsoft.com/office/drawing/2014/main" id="{812D61A5-182F-4B79-95E0-C90DC371C653}"/>
               </a:ext>
             </a:extLst>
@@ -3990,7 +4129,7 @@
 </p:sld>
 </file>
 
-<file path=ppt/slides/slide3.xml><?xml version="1.0" encoding="utf-8"?>
+<file path=ppt/slides/slide4.xml><?xml version="1.0" encoding="utf-8"?>
 <p:sld xmlns:a="http://schemas.openxmlformats.org/drawingml/2006/main" xmlns:r="http://schemas.openxmlformats.org/officeDocument/2006/relationships" xmlns:p="http://schemas.openxmlformats.org/presentationml/2006/main">
   <p:cSld>
     <p:spTree>
@@ -4097,8 +4236,8 @@
           </a:prstGeom>
         </p:spPr>
       </p:pic>
-      <mc:AlternateContent xmlns:mc="http://schemas.openxmlformats.org/markup-compatibility/2006">
-        <mc:Choice xmlns:a14="http://schemas.microsoft.com/office/drawing/2010/main" Requires="a14">
+      <mc:AlternateContent xmlns:mc="http://schemas.openxmlformats.org/markup-compatibility/2006" xmlns:a14="http://schemas.microsoft.com/office/drawing/2010/main">
+        <mc:Choice Requires="a14">
           <p:sp>
             <p:nvSpPr>
               <p:cNvPr id="3" name="TextBox 2">
@@ -4127,6 +4266,7 @@
               </a:bodyPr>
               <a:lstStyle/>
               <a:p>
+                <a:pPr/>
                 <a14:m>
                   <m:oMathPara xmlns:m="http://schemas.openxmlformats.org/officeDocument/2006/math">
                     <m:oMathParaPr>
@@ -4371,7 +4511,7 @@
             </p:txBody>
           </p:sp>
         </mc:Choice>
-        <mc:Fallback>
+        <mc:Fallback xmlns="">
           <p:sp>
             <p:nvSpPr>
               <p:cNvPr id="3" name="TextBox 2">
@@ -4429,7 +4569,7 @@
 </p:sld>
 </file>
 
-<file path=ppt/slides/slide4.xml><?xml version="1.0" encoding="utf-8"?>
+<file path=ppt/slides/slide5.xml><?xml version="1.0" encoding="utf-8"?>
 <p:sld xmlns:a="http://schemas.openxmlformats.org/drawingml/2006/main" xmlns:r="http://schemas.openxmlformats.org/officeDocument/2006/relationships" xmlns:p="http://schemas.openxmlformats.org/presentationml/2006/main">
   <p:cSld>
     <p:spTree>
@@ -4543,7 +4683,7 @@
 </p:sld>
 </file>
 
-<file path=ppt/slides/slide5.xml><?xml version="1.0" encoding="utf-8"?>
+<file path=ppt/slides/slide6.xml><?xml version="1.0" encoding="utf-8"?>
 <p:sld xmlns:a="http://schemas.openxmlformats.org/drawingml/2006/main" xmlns:r="http://schemas.openxmlformats.org/officeDocument/2006/relationships" xmlns:p="http://schemas.openxmlformats.org/presentationml/2006/main">
   <p:cSld>
     <p:spTree>
@@ -4654,108 +4794,6 @@
     <p:extLst>
       <p:ext uri="{BB962C8B-B14F-4D97-AF65-F5344CB8AC3E}">
         <p14:creationId xmlns:p14="http://schemas.microsoft.com/office/powerpoint/2010/main" val="3011048765"/>
-      </p:ext>
-    </p:extLst>
-  </p:cSld>
-  <p:clrMapOvr>
-    <a:masterClrMapping/>
-  </p:clrMapOvr>
-</p:sld>
-</file>
-
-<file path=ppt/slides/slide6.xml><?xml version="1.0" encoding="utf-8"?>
-<p:sld xmlns:a="http://schemas.openxmlformats.org/drawingml/2006/main" xmlns:r="http://schemas.openxmlformats.org/officeDocument/2006/relationships" xmlns:p="http://schemas.openxmlformats.org/presentationml/2006/main">
-  <p:cSld>
-    <p:spTree>
-      <p:nvGrpSpPr>
-        <p:cNvPr id="1" name=""/>
-        <p:cNvGrpSpPr/>
-        <p:nvPr/>
-      </p:nvGrpSpPr>
-      <p:grpSpPr>
-        <a:xfrm>
-          <a:off x="0" y="0"/>
-          <a:ext cx="0" cy="0"/>
-          <a:chOff x="0" y="0"/>
-          <a:chExt cx="0" cy="0"/>
-        </a:xfrm>
-      </p:grpSpPr>
-      <p:pic>
-        <p:nvPicPr>
-          <p:cNvPr id="4" name="그림 3"/>
-          <p:cNvPicPr>
-            <a:picLocks noChangeAspect="1"/>
-          </p:cNvPicPr>
-          <p:nvPr/>
-        </p:nvPicPr>
-        <p:blipFill>
-          <a:blip r:embed="rId2"/>
-          <a:stretch>
-            <a:fillRect/>
-          </a:stretch>
-        </p:blipFill>
-        <p:spPr>
-          <a:xfrm>
-            <a:off x="460967" y="230838"/>
-            <a:ext cx="6973273" cy="3715268"/>
-          </a:xfrm>
-          <a:prstGeom prst="rect">
-            <a:avLst/>
-          </a:prstGeom>
-        </p:spPr>
-      </p:pic>
-      <p:pic>
-        <p:nvPicPr>
-          <p:cNvPr id="5" name="그림 4"/>
-          <p:cNvPicPr>
-            <a:picLocks noChangeAspect="1"/>
-          </p:cNvPicPr>
-          <p:nvPr/>
-        </p:nvPicPr>
-        <p:blipFill>
-          <a:blip r:embed="rId3"/>
-          <a:stretch>
-            <a:fillRect/>
-          </a:stretch>
-        </p:blipFill>
-        <p:spPr>
-          <a:xfrm>
-            <a:off x="345558" y="3294244"/>
-            <a:ext cx="6973273" cy="2915057"/>
-          </a:xfrm>
-          <a:prstGeom prst="rect">
-            <a:avLst/>
-          </a:prstGeom>
-        </p:spPr>
-      </p:pic>
-      <p:pic>
-        <p:nvPicPr>
-          <p:cNvPr id="6" name="그림 5"/>
-          <p:cNvPicPr>
-            <a:picLocks noChangeAspect="1"/>
-          </p:cNvPicPr>
-          <p:nvPr/>
-        </p:nvPicPr>
-        <p:blipFill>
-          <a:blip r:embed="rId4"/>
-          <a:stretch>
-            <a:fillRect/>
-          </a:stretch>
-        </p:blipFill>
-        <p:spPr>
-          <a:xfrm>
-            <a:off x="2537916" y="1571366"/>
-            <a:ext cx="7116168" cy="3715268"/>
-          </a:xfrm>
-          <a:prstGeom prst="rect">
-            <a:avLst/>
-          </a:prstGeom>
-        </p:spPr>
-      </p:pic>
-    </p:spTree>
-    <p:extLst>
-      <p:ext uri="{BB962C8B-B14F-4D97-AF65-F5344CB8AC3E}">
-        <p14:creationId xmlns:p14="http://schemas.microsoft.com/office/powerpoint/2010/main" val="2005913688"/>
       </p:ext>
     </p:extLst>
   </p:cSld>
@@ -4798,8 +4836,8 @@
         </p:blipFill>
         <p:spPr>
           <a:xfrm>
-            <a:off x="177975" y="246068"/>
-            <a:ext cx="7201905" cy="790685"/>
+            <a:off x="460967" y="230838"/>
+            <a:ext cx="6973273" cy="3715268"/>
           </a:xfrm>
           <a:prstGeom prst="rect">
             <a:avLst/>
@@ -4822,8 +4860,8 @@
         </p:blipFill>
         <p:spPr>
           <a:xfrm>
-            <a:off x="539773" y="1179285"/>
-            <a:ext cx="6744641" cy="4801270"/>
+            <a:off x="345558" y="3294244"/>
+            <a:ext cx="6973273" cy="2915057"/>
           </a:xfrm>
           <a:prstGeom prst="rect">
             <a:avLst/>
@@ -4832,7 +4870,7 @@
       </p:pic>
       <p:pic>
         <p:nvPicPr>
-          <p:cNvPr id="2" name="그림 1"/>
+          <p:cNvPr id="6" name="그림 5"/>
           <p:cNvPicPr>
             <a:picLocks noChangeAspect="1"/>
           </p:cNvPicPr>
@@ -4846,32 +4884,8 @@
         </p:blipFill>
         <p:spPr>
           <a:xfrm>
-            <a:off x="5711524" y="246068"/>
-            <a:ext cx="6077798" cy="2181529"/>
-          </a:xfrm>
-          <a:prstGeom prst="rect">
-            <a:avLst/>
-          </a:prstGeom>
-        </p:spPr>
-      </p:pic>
-      <p:pic>
-        <p:nvPicPr>
-          <p:cNvPr id="3" name="그림 2"/>
-          <p:cNvPicPr>
-            <a:picLocks noChangeAspect="1"/>
-          </p:cNvPicPr>
-          <p:nvPr/>
-        </p:nvPicPr>
-        <p:blipFill>
-          <a:blip r:embed="rId5"/>
-          <a:stretch>
-            <a:fillRect/>
-          </a:stretch>
-        </p:blipFill>
-        <p:spPr>
-          <a:xfrm>
-            <a:off x="3171417" y="2019103"/>
-            <a:ext cx="5849166" cy="2819794"/>
+            <a:off x="2537916" y="1571366"/>
+            <a:ext cx="7116168" cy="3715268"/>
           </a:xfrm>
           <a:prstGeom prst="rect">
             <a:avLst/>
@@ -4881,7 +4895,7 @@
     </p:spTree>
     <p:extLst>
       <p:ext uri="{BB962C8B-B14F-4D97-AF65-F5344CB8AC3E}">
-        <p14:creationId xmlns:p14="http://schemas.microsoft.com/office/powerpoint/2010/main" val="1321305327"/>
+        <p14:creationId xmlns:p14="http://schemas.microsoft.com/office/powerpoint/2010/main" val="2005913688"/>
       </p:ext>
     </p:extLst>
   </p:cSld>
@@ -4924,8 +4938,8 @@
         </p:blipFill>
         <p:spPr>
           <a:xfrm>
-            <a:off x="513362" y="338928"/>
-            <a:ext cx="6868484" cy="4582164"/>
+            <a:off x="177975" y="246068"/>
+            <a:ext cx="7201905" cy="790685"/>
           </a:xfrm>
           <a:prstGeom prst="rect">
             <a:avLst/>
@@ -4948,8 +4962,56 @@
         </p:blipFill>
         <p:spPr>
           <a:xfrm>
-            <a:off x="8215079" y="338928"/>
-            <a:ext cx="2686425" cy="1724266"/>
+            <a:off x="539773" y="1179285"/>
+            <a:ext cx="6744641" cy="4801270"/>
+          </a:xfrm>
+          <a:prstGeom prst="rect">
+            <a:avLst/>
+          </a:prstGeom>
+        </p:spPr>
+      </p:pic>
+      <p:pic>
+        <p:nvPicPr>
+          <p:cNvPr id="2" name="그림 1"/>
+          <p:cNvPicPr>
+            <a:picLocks noChangeAspect="1"/>
+          </p:cNvPicPr>
+          <p:nvPr/>
+        </p:nvPicPr>
+        <p:blipFill>
+          <a:blip r:embed="rId4"/>
+          <a:stretch>
+            <a:fillRect/>
+          </a:stretch>
+        </p:blipFill>
+        <p:spPr>
+          <a:xfrm>
+            <a:off x="5711524" y="246068"/>
+            <a:ext cx="6077798" cy="2181529"/>
+          </a:xfrm>
+          <a:prstGeom prst="rect">
+            <a:avLst/>
+          </a:prstGeom>
+        </p:spPr>
+      </p:pic>
+      <p:pic>
+        <p:nvPicPr>
+          <p:cNvPr id="3" name="그림 2"/>
+          <p:cNvPicPr>
+            <a:picLocks noChangeAspect="1"/>
+          </p:cNvPicPr>
+          <p:nvPr/>
+        </p:nvPicPr>
+        <p:blipFill>
+          <a:blip r:embed="rId5"/>
+          <a:stretch>
+            <a:fillRect/>
+          </a:stretch>
+        </p:blipFill>
+        <p:spPr>
+          <a:xfrm>
+            <a:off x="3171417" y="2019103"/>
+            <a:ext cx="5849166" cy="2819794"/>
           </a:xfrm>
           <a:prstGeom prst="rect">
             <a:avLst/>
@@ -4959,7 +5021,7 @@
     </p:spTree>
     <p:extLst>
       <p:ext uri="{BB962C8B-B14F-4D97-AF65-F5344CB8AC3E}">
-        <p14:creationId xmlns:p14="http://schemas.microsoft.com/office/powerpoint/2010/main" val="156433515"/>
+        <p14:creationId xmlns:p14="http://schemas.microsoft.com/office/powerpoint/2010/main" val="1321305327"/>
       </p:ext>
     </p:extLst>
   </p:cSld>
@@ -4988,7 +5050,7 @@
       </p:grpSpPr>
       <p:pic>
         <p:nvPicPr>
-          <p:cNvPr id="2" name="그림 1"/>
+          <p:cNvPr id="4" name="그림 3"/>
           <p:cNvPicPr>
             <a:picLocks noChangeAspect="1"/>
           </p:cNvPicPr>
@@ -5002,8 +5064,8 @@
         </p:blipFill>
         <p:spPr>
           <a:xfrm>
-            <a:off x="313513" y="293630"/>
-            <a:ext cx="7001852" cy="3696216"/>
+            <a:off x="513362" y="338928"/>
+            <a:ext cx="6868484" cy="4582164"/>
           </a:xfrm>
           <a:prstGeom prst="rect">
             <a:avLst/>
@@ -5012,7 +5074,7 @@
       </p:pic>
       <p:pic>
         <p:nvPicPr>
-          <p:cNvPr id="3" name="그림 2"/>
+          <p:cNvPr id="5" name="그림 4"/>
           <p:cNvPicPr>
             <a:picLocks noChangeAspect="1"/>
           </p:cNvPicPr>
@@ -5026,8 +5088,8 @@
         </p:blipFill>
         <p:spPr>
           <a:xfrm>
-            <a:off x="3300022" y="656838"/>
-            <a:ext cx="5591955" cy="5544324"/>
+            <a:off x="8215079" y="338928"/>
+            <a:ext cx="2686425" cy="1724266"/>
           </a:xfrm>
           <a:prstGeom prst="rect">
             <a:avLst/>
@@ -5037,7 +5099,7 @@
     </p:spTree>
     <p:extLst>
       <p:ext uri="{BB962C8B-B14F-4D97-AF65-F5344CB8AC3E}">
-        <p14:creationId xmlns:p14="http://schemas.microsoft.com/office/powerpoint/2010/main" val="2656977250"/>
+        <p14:creationId xmlns:p14="http://schemas.microsoft.com/office/powerpoint/2010/main" val="156433515"/>
       </p:ext>
     </p:extLst>
   </p:cSld>

--- a/image/이미지 생성용.pptx
+++ b/image/이미지 생성용.pptx
@@ -3960,6 +3960,36 @@
           <a:xfrm>
             <a:off x="476458" y="244282"/>
             <a:ext cx="4601217" cy="2762636"/>
+          </a:xfrm>
+          <a:prstGeom prst="rect">
+            <a:avLst/>
+          </a:prstGeom>
+        </p:spPr>
+      </p:pic>
+      <p:pic>
+        <p:nvPicPr>
+          <p:cNvPr id="5" name="그림 4">
+            <a:extLst>
+              <a:ext uri="{FF2B5EF4-FFF2-40B4-BE49-F238E27FC236}">
+                <a16:creationId xmlns:a16="http://schemas.microsoft.com/office/drawing/2014/main" id="{D7BC051A-035C-4BC4-811A-795126FCC0EB}"/>
+              </a:ext>
+            </a:extLst>
+          </p:cNvPr>
+          <p:cNvPicPr>
+            <a:picLocks noChangeAspect="1"/>
+          </p:cNvPicPr>
+          <p:nvPr/>
+        </p:nvPicPr>
+        <p:blipFill>
+          <a:blip r:embed="rId3"/>
+          <a:stretch>
+            <a:fillRect/>
+          </a:stretch>
+        </p:blipFill>
+        <p:spPr>
+          <a:xfrm>
+            <a:off x="5799797" y="160526"/>
+            <a:ext cx="5706271" cy="4877481"/>
           </a:xfrm>
           <a:prstGeom prst="rect">
             <a:avLst/>
